--- a/learning/P01_zephyr_make_project/slides/P001_准备UCRT64环境与下载Zephyr_Windows.pptx
+++ b/learning/P01_zephyr_make_project/slides/P001_准备UCRT64环境与下载Zephyr_Windows.pptx
@@ -993,7 +993,7 @@
           </a:p>
           <a:p xmlns:a="http://schemas.openxmlformats.org/drawingml/2006/main">
             <a:r>
-              <a:t>ZIP 已可进入 P002—P006，不必为了编译先补全部 Git 历史。</a:t>
+              <a:t>ZIP 已可进入 P002—P005，不必为了编译先补全部 Git 历史。</a:t>
             </a:r>
           </a:p>
           <a:p xmlns:a="http://schemas.openxmlformats.org/drawingml/2006/main">
@@ -11363,7 +11363,7 @@
                 <a:ea typeface="Microsoft YaHei"/>
                 <a:cs typeface="Microsoft YaHei"/>
               </a:rPr>
-              <a:t>Git 管版本；curl/wget 下载网址；其余工具负责归档。编译工具在 P002—P006。</a:t>
+              <a:t>Git 管版本；curl/wget 下载网址；其余工具负责归档。编译工具在 P002—P005。</a:t>
             </a:r>
           </a:p>
         </p:txBody>
@@ -14780,7 +14780,7 @@
                 <a:ea typeface="Microsoft YaHei"/>
                 <a:cs typeface="Microsoft YaHei"/>
               </a:rPr>
-              <a:t>ZIP 已可进入 P002—P006，不必为了编译先补全部 Git 历史。</a:t>
+              <a:t>ZIP 已可进入 P002—P005，不必为了编译先补全部 Git 历史。</a:t>
             </a:r>
           </a:p>
           <a:p xmlns:a="http://schemas.openxmlformats.org/drawingml/2006/main">
@@ -29016,7 +29016,7 @@
                 <a:ea typeface="Consolas" panose="020B0609020204030204"/>
                 <a:cs typeface="Consolas" panose="020B0609020204030204"/>
               </a:rPr>
-              <a:t>官方安装来源：Windows 用 winget；详见 Windows P002—P006</a:t>
+              <a:t>官方安装来源：Windows 用 winget；详见 Windows P002—P005</a:t>
             </a:r>
           </a:p>
         </p:txBody>

--- a/learning/P01_zephyr_make_project/slides/P001_准备UCRT64环境与下载Zephyr_Windows.pptx
+++ b/learning/P01_zephyr_make_project/slides/P001_准备UCRT64环境与下载Zephyr_Windows.pptx
@@ -10760,7 +10760,29 @@
                           <a:ea typeface="Microsoft YaHei"/>
                           <a:cs typeface="Microsoft YaHei"/>
                         </a:rPr>
-                        <a:t>读者执行 cp 后生成的备份</a:t>
+                        <a:t>读者执行 </a:t>
+                      </a:r>
+                      <a:r>
+                        <a:rPr sz="1800" b="0">
+                          <a:solidFill>
+                            <a:srgbClr val="A02B93"/>
+                          </a:solidFill>
+                          <a:latin typeface="Microsoft YaHei"/>
+                          <a:ea typeface="Microsoft YaHei"/>
+                          <a:cs typeface="Microsoft YaHei"/>
+                        </a:rPr>
+                        <a:t>cp</a:t>
+                      </a:r>
+                      <a:r>
+                        <a:rPr sz="1800" b="0">
+                          <a:solidFill>
+                            <a:srgbClr val="29263B"/>
+                          </a:solidFill>
+                          <a:latin typeface="Microsoft YaHei"/>
+                          <a:ea typeface="Microsoft YaHei"/>
+                          <a:cs typeface="Microsoft YaHei"/>
+                        </a:rPr>
+                        <a:t> 后生成的备份</a:t>
                       </a:r>
                     </a:p>
                   </a:txBody>
@@ -10793,7 +10815,18 @@
                           <a:ea typeface="Microsoft YaHei"/>
                           <a:cs typeface="Microsoft YaHei"/>
                         </a:rPr>
-                        <a:t>zephyr-main / VERSION</a:t>
+                        <a:t>zephyr-main / </a:t>
+                      </a:r>
+                      <a:r>
+                        <a:rPr sz="1800" b="0">
+                          <a:solidFill>
+                            <a:srgbClr val="0070C0"/>
+                          </a:solidFill>
+                          <a:latin typeface="Microsoft YaHei"/>
+                          <a:ea typeface="Microsoft YaHei"/>
+                          <a:cs typeface="Microsoft YaHei"/>
+                        </a:rPr>
+                        <a:t>VERSION</a:t>
                       </a:r>
                     </a:p>
                   </a:txBody>
@@ -10851,13 +10884,35 @@
                       <a:r>
                         <a:rPr sz="1800" b="0">
                           <a:solidFill>
+                            <a:srgbClr val="0070C0"/>
+                          </a:solidFill>
+                          <a:latin typeface="Microsoft YaHei"/>
+                          <a:ea typeface="Microsoft YaHei"/>
+                          <a:cs typeface="Microsoft YaHei"/>
+                        </a:rPr>
+                        <a:t>.git</a:t>
+                      </a:r>
+                      <a:r>
+                        <a:rPr sz="1800" b="0">
+                          <a:solidFill>
                             <a:srgbClr val="29263B"/>
                           </a:solidFill>
                           <a:latin typeface="Microsoft YaHei"/>
                           <a:ea typeface="Microsoft YaHei"/>
                           <a:cs typeface="Microsoft YaHei"/>
                         </a:rPr>
-                        <a:t>.git / git-meta</a:t>
+                        <a:t> / </a:t>
+                      </a:r>
+                      <a:r>
+                        <a:rPr sz="1800" b="0">
+                          <a:solidFill>
+                            <a:srgbClr val="0070C0"/>
+                          </a:solidFill>
+                          <a:latin typeface="Microsoft YaHei"/>
+                          <a:ea typeface="Microsoft YaHei"/>
+                          <a:cs typeface="Microsoft YaHei"/>
+                        </a:rPr>
+                        <a:t>git-meta</a:t>
                       </a:r>
                     </a:p>
                   </a:txBody>
@@ -10888,7 +10943,18 @@
                           <a:ea typeface="Microsoft YaHei"/>
                           <a:cs typeface="Microsoft YaHei"/>
                         </a:rPr>
-                        <a:t>Git 生成；ZIP 默认没有 .git</a:t>
+                        <a:t>Git 生成；ZIP 默认没有 </a:t>
+                      </a:r>
+                      <a:r>
+                        <a:rPr sz="1800" b="0">
+                          <a:solidFill>
+                            <a:srgbClr val="0070C0"/>
+                          </a:solidFill>
+                          <a:latin typeface="Microsoft YaHei"/>
+                          <a:ea typeface="Microsoft YaHei"/>
+                          <a:cs typeface="Microsoft YaHei"/>
+                        </a:rPr>
+                        <a:t>.git</a:t>
                       </a:r>
                     </a:p>
                   </a:txBody>
@@ -10921,7 +10987,29 @@
                           <a:ea typeface="Microsoft YaHei"/>
                           <a:cs typeface="Microsoft YaHei"/>
                         </a:rPr>
-                        <a:t>learning / .venv / SDK</a:t>
+                        <a:t>learning / </a:t>
+                      </a:r>
+                      <a:r>
+                        <a:rPr sz="1800" b="0">
+                          <a:solidFill>
+                            <a:srgbClr val="0070C0"/>
+                          </a:solidFill>
+                          <a:latin typeface="Microsoft YaHei"/>
+                          <a:ea typeface="Microsoft YaHei"/>
+                          <a:cs typeface="Microsoft YaHei"/>
+                        </a:rPr>
+                        <a:t>.venv</a:t>
+                      </a:r>
+                      <a:r>
+                        <a:rPr sz="1800" b="0">
+                          <a:solidFill>
+                            <a:srgbClr val="29263B"/>
+                          </a:solidFill>
+                          <a:latin typeface="Microsoft YaHei"/>
+                          <a:ea typeface="Microsoft YaHei"/>
+                          <a:cs typeface="Microsoft YaHei"/>
+                        </a:rPr>
+                        <a:t> / SDK</a:t>
                       </a:r>
                     </a:p>
                   </a:txBody>
@@ -11260,7 +11348,7 @@
             <a:r>
               <a:rPr sz="1875" b="0">
                 <a:solidFill>
-                  <a:srgbClr val="005968"/>
+                  <a:srgbClr val="646173"/>
                 </a:solidFill>
                 <a:latin typeface="Consolas"/>
                 <a:ea typeface="Consolas"/>
@@ -11286,13 +11374,178 @@
             <a:r>
               <a:rPr sz="1875" b="0">
                 <a:solidFill>
-                  <a:srgbClr val="005968"/>
+                  <a:srgbClr val="A02B93"/>
                 </a:solidFill>
                 <a:latin typeface="Consolas"/>
                 <a:ea typeface="Consolas"/>
                 <a:cs typeface="Consolas"/>
               </a:rPr>
-              <a:t>pacman -S --needed git curl wget unzip tar xz</a:t>
+              <a:t>pacman</a:t>
+            </a:r>
+            <a:r>
+              <a:rPr sz="1875" b="0">
+                <a:solidFill>
+                  <a:srgbClr val="29263B"/>
+                </a:solidFill>
+                <a:latin typeface="Consolas"/>
+                <a:ea typeface="Consolas"/>
+                <a:cs typeface="Consolas"/>
+              </a:rPr>
+              <a:t> </a:t>
+            </a:r>
+            <a:r>
+              <a:rPr sz="1875" b="0">
+                <a:solidFill>
+                  <a:srgbClr val="B84E00"/>
+                </a:solidFill>
+                <a:latin typeface="Consolas"/>
+                <a:ea typeface="Consolas"/>
+                <a:cs typeface="Consolas"/>
+              </a:rPr>
+              <a:t>-S</a:t>
+            </a:r>
+            <a:r>
+              <a:rPr sz="1875" b="0">
+                <a:solidFill>
+                  <a:srgbClr val="29263B"/>
+                </a:solidFill>
+                <a:latin typeface="Consolas"/>
+                <a:ea typeface="Consolas"/>
+                <a:cs typeface="Consolas"/>
+              </a:rPr>
+              <a:t> </a:t>
+            </a:r>
+            <a:r>
+              <a:rPr sz="1875" b="0">
+                <a:solidFill>
+                  <a:srgbClr val="B84E00"/>
+                </a:solidFill>
+                <a:latin typeface="Consolas"/>
+                <a:ea typeface="Consolas"/>
+                <a:cs typeface="Consolas"/>
+              </a:rPr>
+              <a:t>--needed</a:t>
+            </a:r>
+            <a:r>
+              <a:rPr sz="1875" b="0">
+                <a:solidFill>
+                  <a:srgbClr val="29263B"/>
+                </a:solidFill>
+                <a:latin typeface="Consolas"/>
+                <a:ea typeface="Consolas"/>
+                <a:cs typeface="Consolas"/>
+              </a:rPr>
+              <a:t> </a:t>
+            </a:r>
+            <a:r>
+              <a:rPr sz="1875" b="0">
+                <a:solidFill>
+                  <a:srgbClr val="A02B93"/>
+                </a:solidFill>
+                <a:latin typeface="Consolas"/>
+                <a:ea typeface="Consolas"/>
+                <a:cs typeface="Consolas"/>
+              </a:rPr>
+              <a:t>git</a:t>
+            </a:r>
+            <a:r>
+              <a:rPr sz="1875" b="0">
+                <a:solidFill>
+                  <a:srgbClr val="29263B"/>
+                </a:solidFill>
+                <a:latin typeface="Consolas"/>
+                <a:ea typeface="Consolas"/>
+                <a:cs typeface="Consolas"/>
+              </a:rPr>
+              <a:t> </a:t>
+            </a:r>
+            <a:r>
+              <a:rPr sz="1875" b="0">
+                <a:solidFill>
+                  <a:srgbClr val="A02B93"/>
+                </a:solidFill>
+                <a:latin typeface="Consolas"/>
+                <a:ea typeface="Consolas"/>
+                <a:cs typeface="Consolas"/>
+              </a:rPr>
+              <a:t>curl</a:t>
+            </a:r>
+            <a:r>
+              <a:rPr sz="1875" b="0">
+                <a:solidFill>
+                  <a:srgbClr val="29263B"/>
+                </a:solidFill>
+                <a:latin typeface="Consolas"/>
+                <a:ea typeface="Consolas"/>
+                <a:cs typeface="Consolas"/>
+              </a:rPr>
+              <a:t> </a:t>
+            </a:r>
+            <a:r>
+              <a:rPr sz="1875" b="0">
+                <a:solidFill>
+                  <a:srgbClr val="A02B93"/>
+                </a:solidFill>
+                <a:latin typeface="Consolas"/>
+                <a:ea typeface="Consolas"/>
+                <a:cs typeface="Consolas"/>
+              </a:rPr>
+              <a:t>wget</a:t>
+            </a:r>
+            <a:r>
+              <a:rPr sz="1875" b="0">
+                <a:solidFill>
+                  <a:srgbClr val="29263B"/>
+                </a:solidFill>
+                <a:latin typeface="Consolas"/>
+                <a:ea typeface="Consolas"/>
+                <a:cs typeface="Consolas"/>
+              </a:rPr>
+              <a:t> </a:t>
+            </a:r>
+            <a:r>
+              <a:rPr sz="1875" b="0">
+                <a:solidFill>
+                  <a:srgbClr val="A02B93"/>
+                </a:solidFill>
+                <a:latin typeface="Consolas"/>
+                <a:ea typeface="Consolas"/>
+                <a:cs typeface="Consolas"/>
+              </a:rPr>
+              <a:t>unzip</a:t>
+            </a:r>
+            <a:r>
+              <a:rPr sz="1875" b="0">
+                <a:solidFill>
+                  <a:srgbClr val="29263B"/>
+                </a:solidFill>
+                <a:latin typeface="Consolas"/>
+                <a:ea typeface="Consolas"/>
+                <a:cs typeface="Consolas"/>
+              </a:rPr>
+              <a:t> </a:t>
+            </a:r>
+            <a:r>
+              <a:rPr sz="1875" b="0">
+                <a:solidFill>
+                  <a:srgbClr val="A02B93"/>
+                </a:solidFill>
+                <a:latin typeface="Consolas"/>
+                <a:ea typeface="Consolas"/>
+                <a:cs typeface="Consolas"/>
+              </a:rPr>
+              <a:t>tar</a:t>
+            </a:r>
+            <a:r>
+              <a:rPr sz="1875" b="0">
+                <a:solidFill>
+                  <a:srgbClr val="29263B"/>
+                </a:solidFill>
+                <a:latin typeface="Consolas"/>
+                <a:ea typeface="Consolas"/>
+                <a:cs typeface="Consolas"/>
+              </a:rPr>
+              <a:t> xz</a:t>
             </a:r>
           </a:p>
         </p:txBody>
@@ -11730,7 +11983,7 @@
             <a:r>
               <a:rPr sz="1875" b="0">
                 <a:solidFill>
-                  <a:srgbClr val="005968"/>
+                  <a:srgbClr val="646173"/>
                 </a:solidFill>
                 <a:latin typeface="Consolas"/>
                 <a:ea typeface="Consolas"/>
@@ -11756,13 +12009,57 @@
             <a:r>
               <a:rPr sz="1875" b="0">
                 <a:solidFill>
-                  <a:srgbClr val="005968"/>
+                  <a:srgbClr val="A02B93"/>
                 </a:solidFill>
                 <a:latin typeface="Consolas"/>
                 <a:ea typeface="Consolas"/>
                 <a:cs typeface="Consolas"/>
               </a:rPr>
-              <a:t>mkdir -p /g/zephyr_practice</a:t>
+              <a:t>mkdir</a:t>
+            </a:r>
+            <a:r>
+              <a:rPr sz="1875" b="0">
+                <a:solidFill>
+                  <a:srgbClr val="29263B"/>
+                </a:solidFill>
+                <a:latin typeface="Consolas"/>
+                <a:ea typeface="Consolas"/>
+                <a:cs typeface="Consolas"/>
+              </a:rPr>
+              <a:t> </a:t>
+            </a:r>
+            <a:r>
+              <a:rPr sz="1875" b="0">
+                <a:solidFill>
+                  <a:srgbClr val="B84E00"/>
+                </a:solidFill>
+                <a:latin typeface="Consolas"/>
+                <a:ea typeface="Consolas"/>
+                <a:cs typeface="Consolas"/>
+              </a:rPr>
+              <a:t>-p</a:t>
+            </a:r>
+            <a:r>
+              <a:rPr sz="1875" b="0">
+                <a:solidFill>
+                  <a:srgbClr val="29263B"/>
+                </a:solidFill>
+                <a:latin typeface="Consolas"/>
+                <a:ea typeface="Consolas"/>
+                <a:cs typeface="Consolas"/>
+              </a:rPr>
+              <a:t> </a:t>
+            </a:r>
+            <a:r>
+              <a:rPr sz="1875" b="0">
+                <a:solidFill>
+                  <a:srgbClr val="0070C0"/>
+                </a:solidFill>
+                <a:latin typeface="Consolas"/>
+                <a:ea typeface="Consolas"/>
+                <a:cs typeface="Consolas"/>
+              </a:rPr>
+              <a:t>/g/zephyr_practice</a:t>
             </a:r>
           </a:p>
           <a:p xmlns:a="http://schemas.openxmlformats.org/drawingml/2006/main">
@@ -11782,13 +12079,35 @@
             <a:r>
               <a:rPr sz="1875" b="0">
                 <a:solidFill>
-                  <a:srgbClr val="005968"/>
+                  <a:srgbClr val="A02B93"/>
                 </a:solidFill>
                 <a:latin typeface="Consolas"/>
                 <a:ea typeface="Consolas"/>
                 <a:cs typeface="Consolas"/>
               </a:rPr>
-              <a:t>cd /g/zephyr_practice</a:t>
+              <a:t>cd</a:t>
+            </a:r>
+            <a:r>
+              <a:rPr sz="1875" b="0">
+                <a:solidFill>
+                  <a:srgbClr val="29263B"/>
+                </a:solidFill>
+                <a:latin typeface="Consolas"/>
+                <a:ea typeface="Consolas"/>
+                <a:cs typeface="Consolas"/>
+              </a:rPr>
+              <a:t> </a:t>
+            </a:r>
+            <a:r>
+              <a:rPr sz="1875" b="0">
+                <a:solidFill>
+                  <a:srgbClr val="0070C0"/>
+                </a:solidFill>
+                <a:latin typeface="Consolas"/>
+                <a:ea typeface="Consolas"/>
+                <a:cs typeface="Consolas"/>
+              </a:rPr>
+              <a:t>/g/zephyr_practice</a:t>
             </a:r>
           </a:p>
           <a:p xmlns:a="http://schemas.openxmlformats.org/drawingml/2006/main">
@@ -11808,7 +12127,7 @@
             <a:r>
               <a:rPr sz="1875" b="0">
                 <a:solidFill>
-                  <a:srgbClr val="005968"/>
+                  <a:srgbClr val="A02B93"/>
                 </a:solidFill>
                 <a:latin typeface="Consolas"/>
                 <a:ea typeface="Consolas"/>
@@ -11885,7 +12204,29 @@
                 <a:ea typeface="Microsoft YaHei"/>
                 <a:cs typeface="Microsoft YaHei"/>
               </a:rPr>
-              <a:t>这是读者创建的存放位置，mkdir 本身没有下载 Zephyr。</a:t>
+              <a:t>这是读者创建的存放位置，</a:t>
+            </a:r>
+            <a:r>
+              <a:rPr sz="1875" b="0">
+                <a:solidFill>
+                  <a:srgbClr val="A02B93"/>
+                </a:solidFill>
+                <a:latin typeface="Microsoft YaHei"/>
+                <a:ea typeface="Microsoft YaHei"/>
+                <a:cs typeface="Microsoft YaHei"/>
+              </a:rPr>
+              <a:t>mkdir</a:t>
+            </a:r>
+            <a:r>
+              <a:rPr sz="1875" b="0">
+                <a:solidFill>
+                  <a:srgbClr val="29263B"/>
+                </a:solidFill>
+                <a:latin typeface="Microsoft YaHei"/>
+                <a:ea typeface="Microsoft YaHei"/>
+                <a:cs typeface="Microsoft YaHei"/>
+              </a:rPr>
+              <a:t> 本身没有下载 Zephyr。</a:t>
             </a:r>
           </a:p>
         </p:txBody>
@@ -12252,7 +12593,7 @@
             <a:r>
               <a:rPr sz="1875" b="0">
                 <a:solidFill>
-                  <a:srgbClr val="005968"/>
+                  <a:srgbClr val="646173"/>
                 </a:solidFill>
                 <a:latin typeface="Consolas"/>
                 <a:ea typeface="Consolas"/>
@@ -12278,13 +12619,46 @@
             <a:r>
               <a:rPr sz="1875" b="0">
                 <a:solidFill>
-                  <a:srgbClr val="005968"/>
+                  <a:srgbClr val="A02B93"/>
                 </a:solidFill>
                 <a:latin typeface="Consolas"/>
                 <a:ea typeface="Consolas"/>
                 <a:cs typeface="Consolas"/>
               </a:rPr>
-              <a:t>git clone https://github.com/zephyrproject-rtos/zephyr.git zephyr-main</a:t>
+              <a:t>git</a:t>
+            </a:r>
+            <a:r>
+              <a:rPr sz="1875" b="0">
+                <a:solidFill>
+                  <a:srgbClr val="29263B"/>
+                </a:solidFill>
+                <a:latin typeface="Consolas"/>
+                <a:ea typeface="Consolas"/>
+                <a:cs typeface="Consolas"/>
+              </a:rPr>
+              <a:t> clone </a:t>
+            </a:r>
+            <a:r>
+              <a:rPr sz="1875" b="0">
+                <a:solidFill>
+                  <a:srgbClr val="0070C0"/>
+                </a:solidFill>
+                <a:latin typeface="Consolas"/>
+                <a:ea typeface="Consolas"/>
+                <a:cs typeface="Consolas"/>
+              </a:rPr>
+              <a:t>https://github.com/zephyrproject-rtos/zephyr.git</a:t>
+            </a:r>
+            <a:r>
+              <a:rPr sz="1875" b="0">
+                <a:solidFill>
+                  <a:srgbClr val="29263B"/>
+                </a:solidFill>
+                <a:latin typeface="Consolas"/>
+                <a:ea typeface="Consolas"/>
+                <a:cs typeface="Consolas"/>
+              </a:rPr>
+              <a:t> zephyr-main</a:t>
             </a:r>
           </a:p>
         </p:txBody>
@@ -12355,7 +12729,29 @@
                 <a:ea typeface="Microsoft YaHei"/>
                 <a:cs typeface="Microsoft YaHei"/>
               </a:rPr>
-              <a:t>目标目录应不存在。Git 同时取得源码与 .git；成功后无需补历史。</a:t>
+              <a:t>目标目录应不存在。Git 同时取得源码与 </a:t>
+            </a:r>
+            <a:r>
+              <a:rPr sz="1875" b="0">
+                <a:solidFill>
+                  <a:srgbClr val="0070C0"/>
+                </a:solidFill>
+                <a:latin typeface="Microsoft YaHei"/>
+                <a:ea typeface="Microsoft YaHei"/>
+                <a:cs typeface="Microsoft YaHei"/>
+              </a:rPr>
+              <a:t>.git</a:t>
+            </a:r>
+            <a:r>
+              <a:rPr sz="1875" b="0">
+                <a:solidFill>
+                  <a:srgbClr val="29263B"/>
+                </a:solidFill>
+                <a:latin typeface="Microsoft YaHei"/>
+                <a:ea typeface="Microsoft YaHei"/>
+                <a:cs typeface="Microsoft YaHei"/>
+              </a:rPr>
+              <a:t>；成功后无需补历史。</a:t>
             </a:r>
           </a:p>
         </p:txBody>
@@ -12722,7 +13118,7 @@
             <a:r>
               <a:rPr sz="1875" b="0">
                 <a:solidFill>
-                  <a:srgbClr val="005968"/>
+                  <a:srgbClr val="646173"/>
                 </a:solidFill>
                 <a:latin typeface="Consolas"/>
                 <a:ea typeface="Consolas"/>
@@ -12748,13 +13144,24 @@
             <a:r>
               <a:rPr sz="1875" b="0">
                 <a:solidFill>
-                  <a:srgbClr val="005968"/>
+                  <a:srgbClr val="A02B93"/>
                 </a:solidFill>
                 <a:latin typeface="Consolas"/>
                 <a:ea typeface="Consolas"/>
                 <a:cs typeface="Consolas"/>
               </a:rPr>
-              <a:t>cd zephyr-main</a:t>
+              <a:t>cd</a:t>
+            </a:r>
+            <a:r>
+              <a:rPr sz="1875" b="0">
+                <a:solidFill>
+                  <a:srgbClr val="29263B"/>
+                </a:solidFill>
+                <a:latin typeface="Consolas"/>
+                <a:ea typeface="Consolas"/>
+                <a:cs typeface="Consolas"/>
+              </a:rPr>
+              <a:t> zephyr-main</a:t>
             </a:r>
           </a:p>
           <a:p xmlns:a="http://schemas.openxmlformats.org/drawingml/2006/main">
@@ -12774,13 +13181,35 @@
             <a:r>
               <a:rPr sz="1875" b="0">
                 <a:solidFill>
-                  <a:srgbClr val="005968"/>
+                  <a:srgbClr val="A02B93"/>
                 </a:solidFill>
                 <a:latin typeface="Consolas"/>
                 <a:ea typeface="Consolas"/>
                 <a:cs typeface="Consolas"/>
               </a:rPr>
-              <a:t>git rev-parse --show-toplevel</a:t>
+              <a:t>git</a:t>
+            </a:r>
+            <a:r>
+              <a:rPr sz="1875" b="0">
+                <a:solidFill>
+                  <a:srgbClr val="29263B"/>
+                </a:solidFill>
+                <a:latin typeface="Consolas"/>
+                <a:ea typeface="Consolas"/>
+                <a:cs typeface="Consolas"/>
+              </a:rPr>
+              <a:t> rev-parse </a:t>
+            </a:r>
+            <a:r>
+              <a:rPr sz="1875" b="0">
+                <a:solidFill>
+                  <a:srgbClr val="B84E00"/>
+                </a:solidFill>
+                <a:latin typeface="Consolas"/>
+                <a:ea typeface="Consolas"/>
+                <a:cs typeface="Consolas"/>
+              </a:rPr>
+              <a:t>--show-toplevel</a:t>
             </a:r>
           </a:p>
           <a:p xmlns:a="http://schemas.openxmlformats.org/drawingml/2006/main">
@@ -12800,13 +13229,24 @@
             <a:r>
               <a:rPr sz="1875" b="0">
                 <a:solidFill>
-                  <a:srgbClr val="005968"/>
+                  <a:srgbClr val="A02B93"/>
                 </a:solidFill>
                 <a:latin typeface="Consolas"/>
                 <a:ea typeface="Consolas"/>
                 <a:cs typeface="Consolas"/>
               </a:rPr>
-              <a:t>git rev-parse HEAD</a:t>
+              <a:t>git</a:t>
+            </a:r>
+            <a:r>
+              <a:rPr sz="1875" b="0">
+                <a:solidFill>
+                  <a:srgbClr val="29263B"/>
+                </a:solidFill>
+                <a:latin typeface="Consolas"/>
+                <a:ea typeface="Consolas"/>
+                <a:cs typeface="Consolas"/>
+              </a:rPr>
+              <a:t> rev-parse HEAD</a:t>
             </a:r>
           </a:p>
           <a:p xmlns:a="http://schemas.openxmlformats.org/drawingml/2006/main">
@@ -12826,13 +13266,24 @@
             <a:r>
               <a:rPr sz="1875" b="0">
                 <a:solidFill>
-                  <a:srgbClr val="005968"/>
+                  <a:srgbClr val="A02B93"/>
                 </a:solidFill>
                 <a:latin typeface="Consolas"/>
                 <a:ea typeface="Consolas"/>
                 <a:cs typeface="Consolas"/>
               </a:rPr>
-              <a:t>git status</a:t>
+              <a:t>git</a:t>
+            </a:r>
+            <a:r>
+              <a:rPr sz="1875" b="0">
+                <a:solidFill>
+                  <a:srgbClr val="29263B"/>
+                </a:solidFill>
+                <a:latin typeface="Consolas"/>
+                <a:ea typeface="Consolas"/>
+                <a:cs typeface="Consolas"/>
+              </a:rPr>
+              <a:t> status</a:t>
             </a:r>
           </a:p>
           <a:p xmlns:a="http://schemas.openxmlformats.org/drawingml/2006/main">
@@ -12852,7 +13303,7 @@
             <a:r>
               <a:rPr sz="1875" b="0">
                 <a:solidFill>
-                  <a:srgbClr val="005968"/>
+                  <a:srgbClr val="A02B93"/>
                 </a:solidFill>
                 <a:latin typeface="Consolas"/>
                 <a:ea typeface="Consolas"/>
@@ -12878,13 +13329,35 @@
             <a:r>
               <a:rPr sz="1875" b="0">
                 <a:solidFill>
-                  <a:srgbClr val="005968"/>
+                  <a:srgbClr val="A02B93"/>
                 </a:solidFill>
                 <a:latin typeface="Consolas"/>
                 <a:ea typeface="Consolas"/>
                 <a:cs typeface="Consolas"/>
               </a:rPr>
-              <a:t>ls -al</a:t>
+              <a:t>ls</a:t>
+            </a:r>
+            <a:r>
+              <a:rPr sz="1875" b="0">
+                <a:solidFill>
+                  <a:srgbClr val="29263B"/>
+                </a:solidFill>
+                <a:latin typeface="Consolas"/>
+                <a:ea typeface="Consolas"/>
+                <a:cs typeface="Consolas"/>
+              </a:rPr>
+              <a:t> </a:t>
+            </a:r>
+            <a:r>
+              <a:rPr sz="1875" b="0">
+                <a:solidFill>
+                  <a:srgbClr val="B84E00"/>
+                </a:solidFill>
+                <a:latin typeface="Consolas"/>
+                <a:ea typeface="Consolas"/>
+                <a:cs typeface="Consolas"/>
+              </a:rPr>
+              <a:t>-al</a:t>
             </a:r>
           </a:p>
         </p:txBody>
@@ -13322,7 +13795,7 @@
             <a:r>
               <a:rPr sz="1875" b="0">
                 <a:solidFill>
-                  <a:srgbClr val="005968"/>
+                  <a:srgbClr val="646173"/>
                 </a:solidFill>
                 <a:latin typeface="Consolas"/>
                 <a:ea typeface="Consolas"/>
@@ -13348,13 +13821,79 @@
             <a:r>
               <a:rPr sz="1875" b="0">
                 <a:solidFill>
-                  <a:srgbClr val="005968"/>
+                  <a:srgbClr val="A02B93"/>
                 </a:solidFill>
                 <a:latin typeface="Consolas"/>
                 <a:ea typeface="Consolas"/>
                 <a:cs typeface="Consolas"/>
               </a:rPr>
-              <a:t>git config --global --replace-all http.proxy http://127.0.0.1:10808</a:t>
+              <a:t>git</a:t>
+            </a:r>
+            <a:r>
+              <a:rPr sz="1875" b="0">
+                <a:solidFill>
+                  <a:srgbClr val="29263B"/>
+                </a:solidFill>
+                <a:latin typeface="Consolas"/>
+                <a:ea typeface="Consolas"/>
+                <a:cs typeface="Consolas"/>
+              </a:rPr>
+              <a:t> config </a:t>
+            </a:r>
+            <a:r>
+              <a:rPr sz="1875" b="0">
+                <a:solidFill>
+                  <a:srgbClr val="B84E00"/>
+                </a:solidFill>
+                <a:latin typeface="Consolas"/>
+                <a:ea typeface="Consolas"/>
+                <a:cs typeface="Consolas"/>
+              </a:rPr>
+              <a:t>--global</a:t>
+            </a:r>
+            <a:r>
+              <a:rPr sz="1875" b="0">
+                <a:solidFill>
+                  <a:srgbClr val="29263B"/>
+                </a:solidFill>
+                <a:latin typeface="Consolas"/>
+                <a:ea typeface="Consolas"/>
+                <a:cs typeface="Consolas"/>
+              </a:rPr>
+              <a:t> </a:t>
+            </a:r>
+            <a:r>
+              <a:rPr sz="1875" b="0">
+                <a:solidFill>
+                  <a:srgbClr val="B84E00"/>
+                </a:solidFill>
+                <a:latin typeface="Consolas"/>
+                <a:ea typeface="Consolas"/>
+                <a:cs typeface="Consolas"/>
+              </a:rPr>
+              <a:t>--replace-all</a:t>
+            </a:r>
+            <a:r>
+              <a:rPr sz="1875" b="0">
+                <a:solidFill>
+                  <a:srgbClr val="29263B"/>
+                </a:solidFill>
+                <a:latin typeface="Consolas"/>
+                <a:ea typeface="Consolas"/>
+                <a:cs typeface="Consolas"/>
+              </a:rPr>
+              <a:t> http.proxy </a:t>
+            </a:r>
+            <a:r>
+              <a:rPr sz="1875" b="0">
+                <a:solidFill>
+                  <a:srgbClr val="0070C0"/>
+                </a:solidFill>
+                <a:latin typeface="Consolas"/>
+                <a:ea typeface="Consolas"/>
+                <a:cs typeface="Consolas"/>
+              </a:rPr>
+              <a:t>http://127.0.0.1:10808</a:t>
             </a:r>
           </a:p>
           <a:p xmlns:a="http://schemas.openxmlformats.org/drawingml/2006/main">
@@ -13374,13 +13913,68 @@
             <a:r>
               <a:rPr sz="1875" b="0">
                 <a:solidFill>
-                  <a:srgbClr val="005968"/>
+                  <a:srgbClr val="A02B93"/>
                 </a:solidFill>
                 <a:latin typeface="Consolas"/>
                 <a:ea typeface="Consolas"/>
                 <a:cs typeface="Consolas"/>
               </a:rPr>
-              <a:t>git config --show-origin --get-all http.proxy</a:t>
+              <a:t>git</a:t>
+            </a:r>
+            <a:r>
+              <a:rPr sz="1875" b="0">
+                <a:solidFill>
+                  <a:srgbClr val="29263B"/>
+                </a:solidFill>
+                <a:latin typeface="Consolas"/>
+                <a:ea typeface="Consolas"/>
+                <a:cs typeface="Consolas"/>
+              </a:rPr>
+              <a:t> config </a:t>
+            </a:r>
+            <a:r>
+              <a:rPr sz="1875" b="0">
+                <a:solidFill>
+                  <a:srgbClr val="B84E00"/>
+                </a:solidFill>
+                <a:latin typeface="Consolas"/>
+                <a:ea typeface="Consolas"/>
+                <a:cs typeface="Consolas"/>
+              </a:rPr>
+              <a:t>--show-origin</a:t>
+            </a:r>
+            <a:r>
+              <a:rPr sz="1875" b="0">
+                <a:solidFill>
+                  <a:srgbClr val="29263B"/>
+                </a:solidFill>
+                <a:latin typeface="Consolas"/>
+                <a:ea typeface="Consolas"/>
+                <a:cs typeface="Consolas"/>
+              </a:rPr>
+              <a:t> </a:t>
+            </a:r>
+            <a:r>
+              <a:rPr sz="1875" b="0">
+                <a:solidFill>
+                  <a:srgbClr val="B84E00"/>
+                </a:solidFill>
+                <a:latin typeface="Consolas"/>
+                <a:ea typeface="Consolas"/>
+                <a:cs typeface="Consolas"/>
+              </a:rPr>
+              <a:t>--get-all</a:t>
+            </a:r>
+            <a:r>
+              <a:rPr sz="1875" b="0">
+                <a:solidFill>
+                  <a:srgbClr val="29263B"/>
+                </a:solidFill>
+                <a:latin typeface="Consolas"/>
+                <a:ea typeface="Consolas"/>
+                <a:cs typeface="Consolas"/>
+              </a:rPr>
+              <a:t> http.proxy</a:t>
             </a:r>
           </a:p>
           <a:p xmlns:a="http://schemas.openxmlformats.org/drawingml/2006/main">
@@ -13400,13 +13994,101 @@
             <a:r>
               <a:rPr sz="1875" b="0">
                 <a:solidFill>
-                  <a:srgbClr val="005968"/>
+                  <a:srgbClr val="A02B93"/>
                 </a:solidFill>
                 <a:latin typeface="Consolas"/>
                 <a:ea typeface="Consolas"/>
                 <a:cs typeface="Consolas"/>
               </a:rPr>
-              <a:t>curl -I -x http://127.0.0.1:10808 https://github.com</a:t>
+              <a:t>curl</a:t>
+            </a:r>
+            <a:r>
+              <a:rPr sz="1875" b="0">
+                <a:solidFill>
+                  <a:srgbClr val="29263B"/>
+                </a:solidFill>
+                <a:latin typeface="Consolas"/>
+                <a:ea typeface="Consolas"/>
+                <a:cs typeface="Consolas"/>
+              </a:rPr>
+              <a:t> </a:t>
+            </a:r>
+            <a:r>
+              <a:rPr sz="1875" b="0">
+                <a:solidFill>
+                  <a:srgbClr val="B84E00"/>
+                </a:solidFill>
+                <a:latin typeface="Consolas"/>
+                <a:ea typeface="Consolas"/>
+                <a:cs typeface="Consolas"/>
+              </a:rPr>
+              <a:t>-I</a:t>
+            </a:r>
+            <a:r>
+              <a:rPr sz="1875" b="0">
+                <a:solidFill>
+                  <a:srgbClr val="29263B"/>
+                </a:solidFill>
+                <a:latin typeface="Consolas"/>
+                <a:ea typeface="Consolas"/>
+                <a:cs typeface="Consolas"/>
+              </a:rPr>
+              <a:t> </a:t>
+            </a:r>
+            <a:r>
+              <a:rPr sz="1875" b="0">
+                <a:solidFill>
+                  <a:srgbClr val="B84E00"/>
+                </a:solidFill>
+                <a:latin typeface="Consolas"/>
+                <a:ea typeface="Consolas"/>
+                <a:cs typeface="Consolas"/>
+              </a:rPr>
+              <a:t>-x</a:t>
+            </a:r>
+            <a:r>
+              <a:rPr sz="1875" b="0">
+                <a:solidFill>
+                  <a:srgbClr val="29263B"/>
+                </a:solidFill>
+                <a:latin typeface="Consolas"/>
+                <a:ea typeface="Consolas"/>
+                <a:cs typeface="Consolas"/>
+              </a:rPr>
+              <a:t> </a:t>
+            </a:r>
+            <a:r>
+              <a:rPr sz="1875" b="0">
+                <a:solidFill>
+                  <a:srgbClr val="0070C0"/>
+                </a:solidFill>
+                <a:latin typeface="Consolas"/>
+                <a:ea typeface="Consolas"/>
+                <a:cs typeface="Consolas"/>
+              </a:rPr>
+              <a:t>http://127.0.0.1:10808</a:t>
+            </a:r>
+            <a:r>
+              <a:rPr sz="1875" b="0">
+                <a:solidFill>
+                  <a:srgbClr val="29263B"/>
+                </a:solidFill>
+                <a:latin typeface="Consolas"/>
+                <a:ea typeface="Consolas"/>
+                <a:cs typeface="Consolas"/>
+              </a:rPr>
+              <a:t> </a:t>
+            </a:r>
+            <a:r>
+              <a:rPr sz="1875" b="0">
+                <a:solidFill>
+                  <a:srgbClr val="0070C0"/>
+                </a:solidFill>
+                <a:latin typeface="Consolas"/>
+                <a:ea typeface="Consolas"/>
+                <a:cs typeface="Consolas"/>
+              </a:rPr>
+              <a:t>https://github.com</a:t>
             </a:r>
           </a:p>
         </p:txBody>
@@ -13902,7 +14584,51 @@
                 <a:ea typeface="Microsoft YaHei"/>
                 <a:cs typeface="Microsoft YaHei"/>
               </a:rPr>
-              <a:t>3. 解压到 G:\zephyr_practice，找直接含 VERSION 的那层。</a:t>
+              <a:t>3. 解压到 </a:t>
+            </a:r>
+            <a:r>
+              <a:rPr sz="2175" b="0">
+                <a:solidFill>
+                  <a:srgbClr val="0070C0"/>
+                </a:solidFill>
+                <a:latin typeface="Microsoft YaHei"/>
+                <a:ea typeface="Microsoft YaHei"/>
+                <a:cs typeface="Microsoft YaHei"/>
+              </a:rPr>
+              <a:t>G:\zephyr_practice</a:t>
+            </a:r>
+            <a:r>
+              <a:rPr sz="2175" b="0">
+                <a:solidFill>
+                  <a:srgbClr val="29263B"/>
+                </a:solidFill>
+                <a:latin typeface="Microsoft YaHei"/>
+                <a:ea typeface="Microsoft YaHei"/>
+                <a:cs typeface="Microsoft YaHei"/>
+              </a:rPr>
+              <a:t>，找直接含 </a:t>
+            </a:r>
+            <a:r>
+              <a:rPr sz="2175" b="0">
+                <a:solidFill>
+                  <a:srgbClr val="0070C0"/>
+                </a:solidFill>
+                <a:latin typeface="Microsoft YaHei"/>
+                <a:ea typeface="Microsoft YaHei"/>
+                <a:cs typeface="Microsoft YaHei"/>
+              </a:rPr>
+              <a:t>VERSION</a:t>
+            </a:r>
+            <a:r>
+              <a:rPr sz="2175" b="0">
+                <a:solidFill>
+                  <a:srgbClr val="29263B"/>
+                </a:solidFill>
+                <a:latin typeface="Microsoft YaHei"/>
+                <a:ea typeface="Microsoft YaHei"/>
+                <a:cs typeface="Microsoft YaHei"/>
+              </a:rPr>
+              <a:t> 的那层。</a:t>
             </a:r>
           </a:p>
           <a:p xmlns:a="http://schemas.openxmlformats.org/drawingml/2006/main">
@@ -13928,7 +14654,29 @@
                 <a:ea typeface="Microsoft YaHei"/>
                 <a:cs typeface="Microsoft YaHei"/>
               </a:rPr>
-              <a:t>4. 将该层命名为 zephyr-main；ZIP 不带 .git 是正常现象。</a:t>
+              <a:t>4. 将该层命名为 zephyr-main；ZIP 不带 </a:t>
+            </a:r>
+            <a:r>
+              <a:rPr sz="2175" b="0">
+                <a:solidFill>
+                  <a:srgbClr val="0070C0"/>
+                </a:solidFill>
+                <a:latin typeface="Microsoft YaHei"/>
+                <a:ea typeface="Microsoft YaHei"/>
+                <a:cs typeface="Microsoft YaHei"/>
+              </a:rPr>
+              <a:t>.git</a:t>
+            </a:r>
+            <a:r>
+              <a:rPr sz="2175" b="0">
+                <a:solidFill>
+                  <a:srgbClr val="29263B"/>
+                </a:solidFill>
+                <a:latin typeface="Microsoft YaHei"/>
+                <a:ea typeface="Microsoft YaHei"/>
+                <a:cs typeface="Microsoft YaHei"/>
+              </a:rPr>
+              <a:t> 是正常现象。</a:t>
             </a:r>
           </a:p>
         </p:txBody>
@@ -14226,7 +14974,7 @@
             <a:r>
               <a:rPr sz="1875" b="0">
                 <a:solidFill>
-                  <a:srgbClr val="005968"/>
+                  <a:srgbClr val="646173"/>
                 </a:solidFill>
                 <a:latin typeface="Consolas"/>
                 <a:ea typeface="Consolas"/>
@@ -14252,13 +15000,35 @@
             <a:r>
               <a:rPr sz="1875" b="0">
                 <a:solidFill>
-                  <a:srgbClr val="005968"/>
+                  <a:srgbClr val="A02B93"/>
                 </a:solidFill>
                 <a:latin typeface="Consolas"/>
                 <a:ea typeface="Consolas"/>
                 <a:cs typeface="Consolas"/>
               </a:rPr>
-              <a:t>cd /g/zephyr_practice/zephyr-main</a:t>
+              <a:t>cd</a:t>
+            </a:r>
+            <a:r>
+              <a:rPr sz="1875" b="0">
+                <a:solidFill>
+                  <a:srgbClr val="29263B"/>
+                </a:solidFill>
+                <a:latin typeface="Consolas"/>
+                <a:ea typeface="Consolas"/>
+                <a:cs typeface="Consolas"/>
+              </a:rPr>
+              <a:t> </a:t>
+            </a:r>
+            <a:r>
+              <a:rPr sz="1875" b="0">
+                <a:solidFill>
+                  <a:srgbClr val="0070C0"/>
+                </a:solidFill>
+                <a:latin typeface="Consolas"/>
+                <a:ea typeface="Consolas"/>
+                <a:cs typeface="Consolas"/>
+              </a:rPr>
+              <a:t>/g/zephyr_practice/zephyr-main</a:t>
             </a:r>
           </a:p>
           <a:p xmlns:a="http://schemas.openxmlformats.org/drawingml/2006/main">
@@ -14278,13 +15048,90 @@
             <a:r>
               <a:rPr sz="1875" b="0">
                 <a:solidFill>
-                  <a:srgbClr val="005968"/>
+                  <a:srgbClr val="A02B93"/>
                 </a:solidFill>
                 <a:latin typeface="Consolas"/>
                 <a:ea typeface="Consolas"/>
                 <a:cs typeface="Consolas"/>
               </a:rPr>
-              <a:t>ls VERSION SDK_VERSION west.yml boards samples</a:t>
+              <a:t>ls</a:t>
+            </a:r>
+            <a:r>
+              <a:rPr sz="1875" b="0">
+                <a:solidFill>
+                  <a:srgbClr val="29263B"/>
+                </a:solidFill>
+                <a:latin typeface="Consolas"/>
+                <a:ea typeface="Consolas"/>
+                <a:cs typeface="Consolas"/>
+              </a:rPr>
+              <a:t> </a:t>
+            </a:r>
+            <a:r>
+              <a:rPr sz="1875" b="0">
+                <a:solidFill>
+                  <a:srgbClr val="0070C0"/>
+                </a:solidFill>
+                <a:latin typeface="Consolas"/>
+                <a:ea typeface="Consolas"/>
+                <a:cs typeface="Consolas"/>
+              </a:rPr>
+              <a:t>VERSION</a:t>
+            </a:r>
+            <a:r>
+              <a:rPr sz="1875" b="0">
+                <a:solidFill>
+                  <a:srgbClr val="29263B"/>
+                </a:solidFill>
+                <a:latin typeface="Consolas"/>
+                <a:ea typeface="Consolas"/>
+                <a:cs typeface="Consolas"/>
+              </a:rPr>
+              <a:t> </a:t>
+            </a:r>
+            <a:r>
+              <a:rPr sz="1875" b="0">
+                <a:solidFill>
+                  <a:srgbClr val="0070C0"/>
+                </a:solidFill>
+                <a:latin typeface="Consolas"/>
+                <a:ea typeface="Consolas"/>
+                <a:cs typeface="Consolas"/>
+              </a:rPr>
+              <a:t>SDK_VERSION</a:t>
+            </a:r>
+            <a:r>
+              <a:rPr sz="1875" b="0">
+                <a:solidFill>
+                  <a:srgbClr val="29263B"/>
+                </a:solidFill>
+                <a:latin typeface="Consolas"/>
+                <a:ea typeface="Consolas"/>
+                <a:cs typeface="Consolas"/>
+              </a:rPr>
+              <a:t> </a:t>
+            </a:r>
+            <a:r>
+              <a:rPr sz="1875" b="0">
+                <a:solidFill>
+                  <a:srgbClr val="0070C0"/>
+                </a:solidFill>
+                <a:latin typeface="Consolas"/>
+                <a:ea typeface="Consolas"/>
+                <a:cs typeface="Consolas"/>
+              </a:rPr>
+              <a:t>west.yml</a:t>
+            </a:r>
+            <a:r>
+              <a:rPr sz="1875" b="0">
+                <a:solidFill>
+                  <a:srgbClr val="29263B"/>
+                </a:solidFill>
+                <a:latin typeface="Consolas"/>
+                <a:ea typeface="Consolas"/>
+                <a:cs typeface="Consolas"/>
+              </a:rPr>
+              <a:t> boards samples</a:t>
             </a:r>
           </a:p>
           <a:p xmlns:a="http://schemas.openxmlformats.org/drawingml/2006/main">
@@ -14304,7 +15151,7 @@
             <a:r>
               <a:rPr sz="1875" b="0">
                 <a:solidFill>
-                  <a:srgbClr val="005968"/>
+                  <a:srgbClr val="646173"/>
                 </a:solidFill>
                 <a:latin typeface="Consolas"/>
                 <a:ea typeface="Consolas"/>
@@ -14330,13 +15177,167 @@
             <a:r>
               <a:rPr sz="1875" b="0">
                 <a:solidFill>
-                  <a:srgbClr val="005968"/>
+                  <a:srgbClr val="A02B93"/>
                 </a:solidFill>
                 <a:latin typeface="Consolas"/>
                 <a:ea typeface="Consolas"/>
                 <a:cs typeface="Consolas"/>
               </a:rPr>
-              <a:t>if [ -d .git ]; then git rev-parse HEAD; else printf 'ZIP snapshot: no Git metadata\n'; fi</a:t>
+              <a:t>if</a:t>
+            </a:r>
+            <a:r>
+              <a:rPr sz="1875" b="0">
+                <a:solidFill>
+                  <a:srgbClr val="29263B"/>
+                </a:solidFill>
+                <a:latin typeface="Consolas"/>
+                <a:ea typeface="Consolas"/>
+                <a:cs typeface="Consolas"/>
+              </a:rPr>
+              <a:t> [ </a:t>
+            </a:r>
+            <a:r>
+              <a:rPr sz="1875" b="0">
+                <a:solidFill>
+                  <a:srgbClr val="B84E00"/>
+                </a:solidFill>
+                <a:latin typeface="Consolas"/>
+                <a:ea typeface="Consolas"/>
+                <a:cs typeface="Consolas"/>
+              </a:rPr>
+              <a:t>-d</a:t>
+            </a:r>
+            <a:r>
+              <a:rPr sz="1875" b="0">
+                <a:solidFill>
+                  <a:srgbClr val="29263B"/>
+                </a:solidFill>
+                <a:latin typeface="Consolas"/>
+                <a:ea typeface="Consolas"/>
+                <a:cs typeface="Consolas"/>
+              </a:rPr>
+              <a:t> </a:t>
+            </a:r>
+            <a:r>
+              <a:rPr sz="1875" b="0">
+                <a:solidFill>
+                  <a:srgbClr val="0070C0"/>
+                </a:solidFill>
+                <a:latin typeface="Consolas"/>
+                <a:ea typeface="Consolas"/>
+                <a:cs typeface="Consolas"/>
+              </a:rPr>
+              <a:t>.git</a:t>
+            </a:r>
+            <a:r>
+              <a:rPr sz="1875" b="0">
+                <a:solidFill>
+                  <a:srgbClr val="29263B"/>
+                </a:solidFill>
+                <a:latin typeface="Consolas"/>
+                <a:ea typeface="Consolas"/>
+                <a:cs typeface="Consolas"/>
+              </a:rPr>
+              <a:t> ]; </a:t>
+            </a:r>
+            <a:r>
+              <a:rPr sz="1875" b="0">
+                <a:solidFill>
+                  <a:srgbClr val="A02B93"/>
+                </a:solidFill>
+                <a:latin typeface="Consolas"/>
+                <a:ea typeface="Consolas"/>
+                <a:cs typeface="Consolas"/>
+              </a:rPr>
+              <a:t>then</a:t>
+            </a:r>
+            <a:r>
+              <a:rPr sz="1875" b="0">
+                <a:solidFill>
+                  <a:srgbClr val="29263B"/>
+                </a:solidFill>
+                <a:latin typeface="Consolas"/>
+                <a:ea typeface="Consolas"/>
+                <a:cs typeface="Consolas"/>
+              </a:rPr>
+              <a:t> </a:t>
+            </a:r>
+            <a:r>
+              <a:rPr sz="1875" b="0">
+                <a:solidFill>
+                  <a:srgbClr val="A02B93"/>
+                </a:solidFill>
+                <a:latin typeface="Consolas"/>
+                <a:ea typeface="Consolas"/>
+                <a:cs typeface="Consolas"/>
+              </a:rPr>
+              <a:t>git</a:t>
+            </a:r>
+            <a:r>
+              <a:rPr sz="1875" b="0">
+                <a:solidFill>
+                  <a:srgbClr val="29263B"/>
+                </a:solidFill>
+                <a:latin typeface="Consolas"/>
+                <a:ea typeface="Consolas"/>
+                <a:cs typeface="Consolas"/>
+              </a:rPr>
+              <a:t> rev-parse HEAD; </a:t>
+            </a:r>
+            <a:r>
+              <a:rPr sz="1875" b="0">
+                <a:solidFill>
+                  <a:srgbClr val="A02B93"/>
+                </a:solidFill>
+                <a:latin typeface="Consolas"/>
+                <a:ea typeface="Consolas"/>
+                <a:cs typeface="Consolas"/>
+              </a:rPr>
+              <a:t>else</a:t>
+            </a:r>
+            <a:r>
+              <a:rPr sz="1875" b="0">
+                <a:solidFill>
+                  <a:srgbClr val="29263B"/>
+                </a:solidFill>
+                <a:latin typeface="Consolas"/>
+                <a:ea typeface="Consolas"/>
+                <a:cs typeface="Consolas"/>
+              </a:rPr>
+              <a:t> </a:t>
+            </a:r>
+            <a:r>
+              <a:rPr sz="1875" b="0">
+                <a:solidFill>
+                  <a:srgbClr val="A02B93"/>
+                </a:solidFill>
+                <a:latin typeface="Consolas"/>
+                <a:ea typeface="Consolas"/>
+                <a:cs typeface="Consolas"/>
+              </a:rPr>
+              <a:t>printf</a:t>
+            </a:r>
+            <a:r>
+              <a:rPr sz="1875" b="0">
+                <a:solidFill>
+                  <a:srgbClr val="29263B"/>
+                </a:solidFill>
+                <a:latin typeface="Consolas"/>
+                <a:ea typeface="Consolas"/>
+                <a:cs typeface="Consolas"/>
+              </a:rPr>
+              <a:t> 'ZIP snapshot: no Git metadata\n'; </a:t>
+            </a:r>
+            <a:r>
+              <a:rPr sz="1875" b="0">
+                <a:solidFill>
+                  <a:srgbClr val="A02B93"/>
+                </a:solidFill>
+                <a:latin typeface="Consolas"/>
+                <a:ea typeface="Consolas"/>
+                <a:cs typeface="Consolas"/>
+              </a:rPr>
+              <a:t>fi</a:t>
             </a:r>
           </a:p>
         </p:txBody>
@@ -14401,13 +15402,46 @@
             <a:r>
               <a:rPr sz="1875" b="0">
                 <a:solidFill>
+                  <a:srgbClr val="0070C0"/>
+                </a:solidFill>
+                <a:latin typeface="Microsoft YaHei"/>
+                <a:ea typeface="Microsoft YaHei"/>
+                <a:cs typeface="Microsoft YaHei"/>
+              </a:rPr>
+              <a:t>VERSION</a:t>
+            </a:r>
+            <a:r>
+              <a:rPr sz="1875" b="0">
+                <a:solidFill>
                   <a:srgbClr val="29263B"/>
                 </a:solidFill>
                 <a:latin typeface="Microsoft YaHei"/>
                 <a:ea typeface="Microsoft YaHei"/>
                 <a:cs typeface="Microsoft YaHei"/>
               </a:rPr>
-              <a:t>VERSION、west.yml、boards、samples 来自官方 ZIP；没有 UYUP 属正常起点。</a:t>
+              <a:t>、</a:t>
+            </a:r>
+            <a:r>
+              <a:rPr sz="1875" b="0">
+                <a:solidFill>
+                  <a:srgbClr val="0070C0"/>
+                </a:solidFill>
+                <a:latin typeface="Microsoft YaHei"/>
+                <a:ea typeface="Microsoft YaHei"/>
+                <a:cs typeface="Microsoft YaHei"/>
+              </a:rPr>
+              <a:t>west.yml</a:t>
+            </a:r>
+            <a:r>
+              <a:rPr sz="1875" b="0">
+                <a:solidFill>
+                  <a:srgbClr val="29263B"/>
+                </a:solidFill>
+                <a:latin typeface="Microsoft YaHei"/>
+                <a:ea typeface="Microsoft YaHei"/>
+                <a:cs typeface="Microsoft YaHei"/>
+              </a:rPr>
+              <a:t>、boards、samples 来自官方 ZIP；没有 UYUP 属正常起点。</a:t>
             </a:r>
           </a:p>
         </p:txBody>
@@ -14852,13 +15886,24 @@
             <a:r>
               <a:rPr sz="2175" b="0">
                 <a:solidFill>
+                  <a:srgbClr val="0070C0"/>
+                </a:solidFill>
+                <a:latin typeface="Microsoft YaHei"/>
+                <a:ea typeface="Microsoft YaHei"/>
+                <a:cs typeface="Microsoft YaHei"/>
+              </a:rPr>
+              <a:t>git-meta</a:t>
+            </a:r>
+            <a:r>
+              <a:rPr sz="2175" b="0">
+                <a:solidFill>
                   <a:srgbClr val="29263B"/>
                 </a:solidFill>
                 <a:latin typeface="Microsoft YaHei"/>
                 <a:ea typeface="Microsoft YaHei"/>
                 <a:cs typeface="Microsoft YaHei"/>
               </a:rPr>
-              <a:t>git-meta 是本教程的临时名，不是官方工程固定目录。</a:t>
+              <a:t> 是本教程的临时名，不是官方工程固定目录。</a:t>
             </a:r>
           </a:p>
         </p:txBody>
@@ -15156,7 +16201,7 @@
             <a:r>
               <a:rPr sz="1875" b="0">
                 <a:solidFill>
-                  <a:srgbClr val="005968"/>
+                  <a:srgbClr val="646173"/>
                 </a:solidFill>
                 <a:latin typeface="Consolas"/>
                 <a:ea typeface="Consolas"/>
@@ -15182,7 +16227,7 @@
             <a:r>
               <a:rPr sz="1875" b="0">
                 <a:solidFill>
-                  <a:srgbClr val="005968"/>
+                  <a:srgbClr val="A02B93"/>
                 </a:solidFill>
                 <a:latin typeface="Consolas"/>
                 <a:ea typeface="Consolas"/>
@@ -15208,13 +16253,46 @@
             <a:r>
               <a:rPr sz="1875" b="0">
                 <a:solidFill>
-                  <a:srgbClr val="005968"/>
+                  <a:srgbClr val="A02B93"/>
                 </a:solidFill>
                 <a:latin typeface="Consolas"/>
                 <a:ea typeface="Consolas"/>
                 <a:cs typeface="Consolas"/>
               </a:rPr>
-              <a:t>ls -ald zephyr-main</a:t>
+              <a:t>ls</a:t>
+            </a:r>
+            <a:r>
+              <a:rPr sz="1875" b="0">
+                <a:solidFill>
+                  <a:srgbClr val="29263B"/>
+                </a:solidFill>
+                <a:latin typeface="Consolas"/>
+                <a:ea typeface="Consolas"/>
+                <a:cs typeface="Consolas"/>
+              </a:rPr>
+              <a:t> </a:t>
+            </a:r>
+            <a:r>
+              <a:rPr sz="1875" b="0">
+                <a:solidFill>
+                  <a:srgbClr val="B84E00"/>
+                </a:solidFill>
+                <a:latin typeface="Consolas"/>
+                <a:ea typeface="Consolas"/>
+                <a:cs typeface="Consolas"/>
+              </a:rPr>
+              <a:t>-ald</a:t>
+            </a:r>
+            <a:r>
+              <a:rPr sz="1875" b="0">
+                <a:solidFill>
+                  <a:srgbClr val="29263B"/>
+                </a:solidFill>
+                <a:latin typeface="Consolas"/>
+                <a:ea typeface="Consolas"/>
+                <a:cs typeface="Consolas"/>
+              </a:rPr>
+              <a:t> zephyr-main</a:t>
             </a:r>
           </a:p>
           <a:p xmlns:a="http://schemas.openxmlformats.org/drawingml/2006/main">
@@ -15234,13 +16312,123 @@
             <a:r>
               <a:rPr sz="1875" b="0">
                 <a:solidFill>
-                  <a:srgbClr val="005968"/>
+                  <a:srgbClr val="A02B93"/>
                 </a:solidFill>
                 <a:latin typeface="Consolas"/>
                 <a:ea typeface="Consolas"/>
                 <a:cs typeface="Consolas"/>
               </a:rPr>
-              <a:t>test ! -e git-meta &amp;&amp; test ! -e zephyr-main/.git</a:t>
+              <a:t>test</a:t>
+            </a:r>
+            <a:r>
+              <a:rPr sz="1875" b="0">
+                <a:solidFill>
+                  <a:srgbClr val="29263B"/>
+                </a:solidFill>
+                <a:latin typeface="Consolas"/>
+                <a:ea typeface="Consolas"/>
+                <a:cs typeface="Consolas"/>
+              </a:rPr>
+              <a:t> ! </a:t>
+            </a:r>
+            <a:r>
+              <a:rPr sz="1875" b="0">
+                <a:solidFill>
+                  <a:srgbClr val="B84E00"/>
+                </a:solidFill>
+                <a:latin typeface="Consolas"/>
+                <a:ea typeface="Consolas"/>
+                <a:cs typeface="Consolas"/>
+              </a:rPr>
+              <a:t>-e</a:t>
+            </a:r>
+            <a:r>
+              <a:rPr sz="1875" b="0">
+                <a:solidFill>
+                  <a:srgbClr val="29263B"/>
+                </a:solidFill>
+                <a:latin typeface="Consolas"/>
+                <a:ea typeface="Consolas"/>
+                <a:cs typeface="Consolas"/>
+              </a:rPr>
+              <a:t> </a:t>
+            </a:r>
+            <a:r>
+              <a:rPr sz="1875" b="0">
+                <a:solidFill>
+                  <a:srgbClr val="0070C0"/>
+                </a:solidFill>
+                <a:latin typeface="Consolas"/>
+                <a:ea typeface="Consolas"/>
+                <a:cs typeface="Consolas"/>
+              </a:rPr>
+              <a:t>git-meta</a:t>
+            </a:r>
+            <a:r>
+              <a:rPr sz="1875" b="0">
+                <a:solidFill>
+                  <a:srgbClr val="29263B"/>
+                </a:solidFill>
+                <a:latin typeface="Consolas"/>
+                <a:ea typeface="Consolas"/>
+                <a:cs typeface="Consolas"/>
+              </a:rPr>
+              <a:t> &amp;&amp; </a:t>
+            </a:r>
+            <a:r>
+              <a:rPr sz="1875" b="0">
+                <a:solidFill>
+                  <a:srgbClr val="A02B93"/>
+                </a:solidFill>
+                <a:latin typeface="Consolas"/>
+                <a:ea typeface="Consolas"/>
+                <a:cs typeface="Consolas"/>
+              </a:rPr>
+              <a:t>test</a:t>
+            </a:r>
+            <a:r>
+              <a:rPr sz="1875" b="0">
+                <a:solidFill>
+                  <a:srgbClr val="29263B"/>
+                </a:solidFill>
+                <a:latin typeface="Consolas"/>
+                <a:ea typeface="Consolas"/>
+                <a:cs typeface="Consolas"/>
+              </a:rPr>
+              <a:t> ! </a:t>
+            </a:r>
+            <a:r>
+              <a:rPr sz="1875" b="0">
+                <a:solidFill>
+                  <a:srgbClr val="B84E00"/>
+                </a:solidFill>
+                <a:latin typeface="Consolas"/>
+                <a:ea typeface="Consolas"/>
+                <a:cs typeface="Consolas"/>
+              </a:rPr>
+              <a:t>-e</a:t>
+            </a:r>
+            <a:r>
+              <a:rPr sz="1875" b="0">
+                <a:solidFill>
+                  <a:srgbClr val="29263B"/>
+                </a:solidFill>
+                <a:latin typeface="Consolas"/>
+                <a:ea typeface="Consolas"/>
+                <a:cs typeface="Consolas"/>
+              </a:rPr>
+              <a:t> </a:t>
+            </a:r>
+            <a:r>
+              <a:rPr sz="1875" b="0">
+                <a:solidFill>
+                  <a:srgbClr val="0070C0"/>
+                </a:solidFill>
+                <a:latin typeface="Consolas"/>
+                <a:ea typeface="Consolas"/>
+                <a:cs typeface="Consolas"/>
+              </a:rPr>
+              <a:t>zephyr-main/.git</a:t>
             </a:r>
           </a:p>
           <a:p xmlns:a="http://schemas.openxmlformats.org/drawingml/2006/main">
@@ -15260,13 +16448,24 @@
             <a:r>
               <a:rPr sz="1875" b="0">
                 <a:solidFill>
-                  <a:srgbClr val="005968"/>
+                  <a:srgbClr val="A02B93"/>
                 </a:solidFill>
                 <a:latin typeface="Consolas"/>
                 <a:ea typeface="Consolas"/>
                 <a:cs typeface="Consolas"/>
               </a:rPr>
-              <a:t>echo $?</a:t>
+              <a:t>echo</a:t>
+            </a:r>
+            <a:r>
+              <a:rPr sz="1875" b="0">
+                <a:solidFill>
+                  <a:srgbClr val="29263B"/>
+                </a:solidFill>
+                <a:latin typeface="Consolas"/>
+                <a:ea typeface="Consolas"/>
+                <a:cs typeface="Consolas"/>
+              </a:rPr>
+              <a:t> $?</a:t>
             </a:r>
           </a:p>
         </p:txBody>
@@ -15704,7 +16903,7 @@
             <a:r>
               <a:rPr sz="1875" b="0">
                 <a:solidFill>
-                  <a:srgbClr val="005968"/>
+                  <a:srgbClr val="646173"/>
                 </a:solidFill>
                 <a:latin typeface="Consolas"/>
                 <a:ea typeface="Consolas"/>
@@ -15730,13 +16929,24 @@
             <a:r>
               <a:rPr sz="1875" b="0">
                 <a:solidFill>
-                  <a:srgbClr val="005968"/>
+                  <a:srgbClr val="A02B93"/>
                 </a:solidFill>
                 <a:latin typeface="Consolas"/>
                 <a:ea typeface="Consolas"/>
                 <a:cs typeface="Consolas"/>
               </a:rPr>
-              <a:t>git clone \</a:t>
+              <a:t>git</a:t>
+            </a:r>
+            <a:r>
+              <a:rPr sz="1875" b="0">
+                <a:solidFill>
+                  <a:srgbClr val="29263B"/>
+                </a:solidFill>
+                <a:latin typeface="Consolas"/>
+                <a:ea typeface="Consolas"/>
+                <a:cs typeface="Consolas"/>
+              </a:rPr>
+              <a:t> clone \</a:t>
             </a:r>
           </a:p>
           <a:p xmlns:a="http://schemas.openxmlformats.org/drawingml/2006/main">
@@ -15756,13 +16966,35 @@
             <a:r>
               <a:rPr sz="1875" b="0">
                 <a:solidFill>
-                  <a:srgbClr val="005968"/>
+                  <a:srgbClr val="29263B"/>
                 </a:solidFill>
                 <a:latin typeface="Consolas"/>
                 <a:ea typeface="Consolas"/>
                 <a:cs typeface="Consolas"/>
               </a:rPr>
-              <a:t>    --filter=blob:none \</a:t>
+              <a:t>    </a:t>
+            </a:r>
+            <a:r>
+              <a:rPr sz="1875" b="0">
+                <a:solidFill>
+                  <a:srgbClr val="B84E00"/>
+                </a:solidFill>
+                <a:latin typeface="Consolas"/>
+                <a:ea typeface="Consolas"/>
+                <a:cs typeface="Consolas"/>
+              </a:rPr>
+              <a:t>--filter</a:t>
+            </a:r>
+            <a:r>
+              <a:rPr sz="1875" b="0">
+                <a:solidFill>
+                  <a:srgbClr val="29263B"/>
+                </a:solidFill>
+                <a:latin typeface="Consolas"/>
+                <a:ea typeface="Consolas"/>
+                <a:cs typeface="Consolas"/>
+              </a:rPr>
+              <a:t>=blob:none \</a:t>
             </a:r>
           </a:p>
           <a:p xmlns:a="http://schemas.openxmlformats.org/drawingml/2006/main">
@@ -15782,13 +17014,35 @@
             <a:r>
               <a:rPr sz="1875" b="0">
                 <a:solidFill>
-                  <a:srgbClr val="005968"/>
+                  <a:srgbClr val="29263B"/>
                 </a:solidFill>
                 <a:latin typeface="Consolas"/>
                 <a:ea typeface="Consolas"/>
                 <a:cs typeface="Consolas"/>
               </a:rPr>
-              <a:t>    --no-checkout \</a:t>
+              <a:t>    </a:t>
+            </a:r>
+            <a:r>
+              <a:rPr sz="1875" b="0">
+                <a:solidFill>
+                  <a:srgbClr val="B84E00"/>
+                </a:solidFill>
+                <a:latin typeface="Consolas"/>
+                <a:ea typeface="Consolas"/>
+                <a:cs typeface="Consolas"/>
+              </a:rPr>
+              <a:t>--no-checkout</a:t>
+            </a:r>
+            <a:r>
+              <a:rPr sz="1875" b="0">
+                <a:solidFill>
+                  <a:srgbClr val="29263B"/>
+                </a:solidFill>
+                <a:latin typeface="Consolas"/>
+                <a:ea typeface="Consolas"/>
+                <a:cs typeface="Consolas"/>
+              </a:rPr>
+              <a:t> \</a:t>
             </a:r>
           </a:p>
           <a:p xmlns:a="http://schemas.openxmlformats.org/drawingml/2006/main">
@@ -15808,13 +17062,35 @@
             <a:r>
               <a:rPr sz="1875" b="0">
                 <a:solidFill>
-                  <a:srgbClr val="005968"/>
+                  <a:srgbClr val="29263B"/>
                 </a:solidFill>
                 <a:latin typeface="Consolas"/>
                 <a:ea typeface="Consolas"/>
                 <a:cs typeface="Consolas"/>
               </a:rPr>
-              <a:t>    --depth=1 \</a:t>
+              <a:t>    </a:t>
+            </a:r>
+            <a:r>
+              <a:rPr sz="1875" b="0">
+                <a:solidFill>
+                  <a:srgbClr val="B84E00"/>
+                </a:solidFill>
+                <a:latin typeface="Consolas"/>
+                <a:ea typeface="Consolas"/>
+                <a:cs typeface="Consolas"/>
+              </a:rPr>
+              <a:t>--depth</a:t>
+            </a:r>
+            <a:r>
+              <a:rPr sz="1875" b="0">
+                <a:solidFill>
+                  <a:srgbClr val="29263B"/>
+                </a:solidFill>
+                <a:latin typeface="Consolas"/>
+                <a:ea typeface="Consolas"/>
+                <a:cs typeface="Consolas"/>
+              </a:rPr>
+              <a:t>=1 \</a:t>
             </a:r>
           </a:p>
           <a:p xmlns:a="http://schemas.openxmlformats.org/drawingml/2006/main">
@@ -15834,13 +17110,35 @@
             <a:r>
               <a:rPr sz="1875" b="0">
                 <a:solidFill>
-                  <a:srgbClr val="005968"/>
+                  <a:srgbClr val="29263B"/>
                 </a:solidFill>
                 <a:latin typeface="Consolas"/>
                 <a:ea typeface="Consolas"/>
                 <a:cs typeface="Consolas"/>
               </a:rPr>
-              <a:t>    --branch main \</a:t>
+              <a:t>    </a:t>
+            </a:r>
+            <a:r>
+              <a:rPr sz="1875" b="0">
+                <a:solidFill>
+                  <a:srgbClr val="B84E00"/>
+                </a:solidFill>
+                <a:latin typeface="Consolas"/>
+                <a:ea typeface="Consolas"/>
+                <a:cs typeface="Consolas"/>
+              </a:rPr>
+              <a:t>--branch</a:t>
+            </a:r>
+            <a:r>
+              <a:rPr sz="1875" b="0">
+                <a:solidFill>
+                  <a:srgbClr val="29263B"/>
+                </a:solidFill>
+                <a:latin typeface="Consolas"/>
+                <a:ea typeface="Consolas"/>
+                <a:cs typeface="Consolas"/>
+              </a:rPr>
+              <a:t> main \</a:t>
             </a:r>
           </a:p>
           <a:p xmlns:a="http://schemas.openxmlformats.org/drawingml/2006/main">
@@ -15860,13 +17158,35 @@
             <a:r>
               <a:rPr sz="1875" b="0">
                 <a:solidFill>
-                  <a:srgbClr val="005968"/>
+                  <a:srgbClr val="29263B"/>
                 </a:solidFill>
                 <a:latin typeface="Consolas"/>
                 <a:ea typeface="Consolas"/>
                 <a:cs typeface="Consolas"/>
               </a:rPr>
-              <a:t>    https://github.com/zephyrproject-rtos/zephyr.git \</a:t>
+              <a:t>    </a:t>
+            </a:r>
+            <a:r>
+              <a:rPr sz="1875" b="0">
+                <a:solidFill>
+                  <a:srgbClr val="0070C0"/>
+                </a:solidFill>
+                <a:latin typeface="Consolas"/>
+                <a:ea typeface="Consolas"/>
+                <a:cs typeface="Consolas"/>
+              </a:rPr>
+              <a:t>https://github.com/zephyrproject-rtos/zephyr.git</a:t>
+            </a:r>
+            <a:r>
+              <a:rPr sz="1875" b="0">
+                <a:solidFill>
+                  <a:srgbClr val="29263B"/>
+                </a:solidFill>
+                <a:latin typeface="Consolas"/>
+                <a:ea typeface="Consolas"/>
+                <a:cs typeface="Consolas"/>
+              </a:rPr>
+              <a:t> \</a:t>
             </a:r>
           </a:p>
           <a:p xmlns:a="http://schemas.openxmlformats.org/drawingml/2006/main">
@@ -15886,13 +17206,24 @@
             <a:r>
               <a:rPr sz="1875" b="0">
                 <a:solidFill>
-                  <a:srgbClr val="005968"/>
+                  <a:srgbClr val="29263B"/>
                 </a:solidFill>
                 <a:latin typeface="Consolas"/>
                 <a:ea typeface="Consolas"/>
                 <a:cs typeface="Consolas"/>
               </a:rPr>
-              <a:t>    git-meta</a:t>
+              <a:t>    </a:t>
+            </a:r>
+            <a:r>
+              <a:rPr sz="1875" b="0">
+                <a:solidFill>
+                  <a:srgbClr val="0070C0"/>
+                </a:solidFill>
+                <a:latin typeface="Consolas"/>
+                <a:ea typeface="Consolas"/>
+                <a:cs typeface="Consolas"/>
+              </a:rPr>
+              <a:t>git-meta</a:t>
             </a:r>
           </a:p>
         </p:txBody>
@@ -16336,7 +17667,29 @@
                 <a:ea typeface="Microsoft YaHei"/>
                 <a:cs typeface="Microsoft YaHei"/>
               </a:rPr>
-              <a:t>每个命令页链接到 commands/P001_Windows 下的纯文本操作单元。</a:t>
+              <a:t>每个命令页链接到 </a:t>
+            </a:r>
+            <a:r>
+              <a:rPr sz="2175" b="0">
+                <a:solidFill>
+                  <a:srgbClr val="0070C0"/>
+                </a:solidFill>
+                <a:latin typeface="Microsoft YaHei"/>
+                <a:ea typeface="Microsoft YaHei"/>
+                <a:cs typeface="Microsoft YaHei"/>
+              </a:rPr>
+              <a:t>commands/P001_Windows</a:t>
+            </a:r>
+            <a:r>
+              <a:rPr sz="2175" b="0">
+                <a:solidFill>
+                  <a:srgbClr val="29263B"/>
+                </a:solidFill>
+                <a:latin typeface="Microsoft YaHei"/>
+                <a:ea typeface="Microsoft YaHei"/>
+                <a:cs typeface="Microsoft YaHei"/>
+              </a:rPr>
+              <a:t> 下的纯文本操作单元。</a:t>
             </a:r>
           </a:p>
           <a:p xmlns:a="http://schemas.openxmlformats.org/drawingml/2006/main">
@@ -16484,6 +17837,107 @@
               </a:rPr>
               <a:t>5</a:t>
             </a:fld>
+          </a:p>
+        </p:txBody>
+      </p:sp>
+      <p:sp>
+        <p:nvSpPr>
+          <p:cNvPr id="9" name="Semantic color legend">
+            <a:extLst xmlns:a="http://schemas.openxmlformats.org/drawingml/2006/main">
+              <a:ext uri="{FF2B5EF4-FFF2-40B4-BE49-F238E27FC236}">
+                <a16:creationId xmlns:a16="http://schemas.microsoft.com/office/drawing/2014/main" id="{39154CEE-9E0E-4815-8A42-342F49989EDD}"/>
+              </a:ext>
+            </a:extLst>
+          </p:cNvPr>
+          <p:cNvSpPr>
+            <a:spLocks xmlns:a="http://schemas.openxmlformats.org/drawingml/2006/main" noGrp="1"/>
+          </p:cNvSpPr>
+          <p:nvPr/>
+        </p:nvSpPr>
+        <p:spPr>
+          <a:xfrm xmlns:a="http://schemas.openxmlformats.org/drawingml/2006/main">
+            <a:off x="609600" y="4953000"/>
+            <a:ext cx="10972800" cy="342900"/>
+          </a:xfrm>
+          <a:prstGeom xmlns:a="http://schemas.openxmlformats.org/drawingml/2006/main" prst="rect">
+            <a:avLst/>
+          </a:prstGeom>
+          <a:noFill xmlns:a="http://schemas.openxmlformats.org/drawingml/2006/main"/>
+          <a:ln xmlns:a="http://schemas.openxmlformats.org/drawingml/2006/main" w="0">
+            <a:noFill/>
+          </a:ln>
+        </p:spPr>
+        <p:txBody>
+          <a:bodyPr xmlns:a="http://schemas.openxmlformats.org/drawingml/2006/main">
+            <a:noAutofit/>
+          </a:bodyPr>
+          <a:lstStyle xmlns:a="http://schemas.openxmlformats.org/drawingml/2006/main">
+            <a:defPPr>
+              <a:defRPr sz="1575">
+                <a:solidFill>
+                  <a:srgbClr val="646173"/>
+                </a:solidFill>
+                <a:latin typeface="Microsoft YaHei"/>
+                <a:ea typeface="Microsoft YaHei"/>
+                <a:cs typeface="Microsoft YaHei"/>
+              </a:defRPr>
+            </a:defPPr>
+          </a:lstStyle>
+          <a:p xmlns:a="http://schemas.openxmlformats.org/drawingml/2006/main">
+            <a:pPr>
+              <a:defRPr sz="1575">
+                <a:solidFill>
+                  <a:srgbClr val="646173"/>
+                </a:solidFill>
+                <a:latin typeface="Microsoft YaHei"/>
+                <a:ea typeface="Microsoft YaHei"/>
+                <a:cs typeface="Microsoft YaHei"/>
+              </a:defRPr>
+            </a:pPr>
+            <a:r>
+              <a:t>阅读标色： </a:t>
+            </a:r>
+            <a:r>
+              <a:rPr>
+                <a:solidFill>
+                  <a:srgbClr val="B84E00"/>
+                </a:solidFill>
+              </a:rPr>
+              <a:t>变量 / 参数</a:t>
+            </a:r>
+            <a:r>
+              <a:t>     </a:t>
+            </a:r>
+            <a:r>
+              <a:rPr>
+                <a:solidFill>
+                  <a:srgbClr val="0070C0"/>
+                </a:solidFill>
+              </a:rPr>
+              <a:t>文件 / 路径</a:t>
+            </a:r>
+            <a:r>
+              <a:t>     </a:t>
+            </a:r>
+            <a:r>
+              <a:rPr>
+                <a:solidFill>
+                  <a:srgbClr val="087B3D"/>
+                </a:solidFill>
+              </a:rPr>
+              <a:t>接口函数</a:t>
+            </a:r>
+            <a:r>
+              <a:t>     </a:t>
+            </a:r>
+            <a:r>
+              <a:rPr>
+                <a:solidFill>
+                  <a:srgbClr val="A02B93"/>
+                </a:solidFill>
+              </a:rPr>
+              <a:t>终端命令</a:t>
+            </a:r>
           </a:p>
         </p:txBody>
       </p:sp>
@@ -16712,7 +18166,7 @@
             <a:r>
               <a:rPr sz="1875" b="0">
                 <a:solidFill>
-                  <a:srgbClr val="005968"/>
+                  <a:srgbClr val="646173"/>
                 </a:solidFill>
                 <a:latin typeface="Consolas"/>
                 <a:ea typeface="Consolas"/>
@@ -16738,13 +18192,79 @@
             <a:r>
               <a:rPr sz="1875" b="0">
                 <a:solidFill>
-                  <a:srgbClr val="005968"/>
+                  <a:srgbClr val="A02B93"/>
                 </a:solidFill>
                 <a:latin typeface="Consolas"/>
                 <a:ea typeface="Consolas"/>
                 <a:cs typeface="Consolas"/>
               </a:rPr>
-              <a:t>git -C git-meta log -1 --oneline</a:t>
+              <a:t>git</a:t>
+            </a:r>
+            <a:r>
+              <a:rPr sz="1875" b="0">
+                <a:solidFill>
+                  <a:srgbClr val="29263B"/>
+                </a:solidFill>
+                <a:latin typeface="Consolas"/>
+                <a:ea typeface="Consolas"/>
+                <a:cs typeface="Consolas"/>
+              </a:rPr>
+              <a:t> </a:t>
+            </a:r>
+            <a:r>
+              <a:rPr sz="1875" b="0">
+                <a:solidFill>
+                  <a:srgbClr val="B84E00"/>
+                </a:solidFill>
+                <a:latin typeface="Consolas"/>
+                <a:ea typeface="Consolas"/>
+                <a:cs typeface="Consolas"/>
+              </a:rPr>
+              <a:t>-C</a:t>
+            </a:r>
+            <a:r>
+              <a:rPr sz="1875" b="0">
+                <a:solidFill>
+                  <a:srgbClr val="29263B"/>
+                </a:solidFill>
+                <a:latin typeface="Consolas"/>
+                <a:ea typeface="Consolas"/>
+                <a:cs typeface="Consolas"/>
+              </a:rPr>
+              <a:t> </a:t>
+            </a:r>
+            <a:r>
+              <a:rPr sz="1875" b="0">
+                <a:solidFill>
+                  <a:srgbClr val="0070C0"/>
+                </a:solidFill>
+                <a:latin typeface="Consolas"/>
+                <a:ea typeface="Consolas"/>
+                <a:cs typeface="Consolas"/>
+              </a:rPr>
+              <a:t>git-meta</a:t>
+            </a:r>
+            <a:r>
+              <a:rPr sz="1875" b="0">
+                <a:solidFill>
+                  <a:srgbClr val="29263B"/>
+                </a:solidFill>
+                <a:latin typeface="Consolas"/>
+                <a:ea typeface="Consolas"/>
+                <a:cs typeface="Consolas"/>
+              </a:rPr>
+              <a:t> log -1 </a:t>
+            </a:r>
+            <a:r>
+              <a:rPr sz="1875" b="0">
+                <a:solidFill>
+                  <a:srgbClr val="B84E00"/>
+                </a:solidFill>
+                <a:latin typeface="Consolas"/>
+                <a:ea typeface="Consolas"/>
+                <a:cs typeface="Consolas"/>
+              </a:rPr>
+              <a:t>--oneline</a:t>
             </a:r>
           </a:p>
           <a:p xmlns:a="http://schemas.openxmlformats.org/drawingml/2006/main">
@@ -16764,13 +18284,68 @@
             <a:r>
               <a:rPr sz="1875" b="0">
                 <a:solidFill>
-                  <a:srgbClr val="005968"/>
+                  <a:srgbClr val="A02B93"/>
                 </a:solidFill>
                 <a:latin typeface="Consolas"/>
                 <a:ea typeface="Consolas"/>
                 <a:cs typeface="Consolas"/>
               </a:rPr>
-              <a:t>git -C git-meta rev-parse HEAD</a:t>
+              <a:t>git</a:t>
+            </a:r>
+            <a:r>
+              <a:rPr sz="1875" b="0">
+                <a:solidFill>
+                  <a:srgbClr val="29263B"/>
+                </a:solidFill>
+                <a:latin typeface="Consolas"/>
+                <a:ea typeface="Consolas"/>
+                <a:cs typeface="Consolas"/>
+              </a:rPr>
+              <a:t> </a:t>
+            </a:r>
+            <a:r>
+              <a:rPr sz="1875" b="0">
+                <a:solidFill>
+                  <a:srgbClr val="B84E00"/>
+                </a:solidFill>
+                <a:latin typeface="Consolas"/>
+                <a:ea typeface="Consolas"/>
+                <a:cs typeface="Consolas"/>
+              </a:rPr>
+              <a:t>-C</a:t>
+            </a:r>
+            <a:r>
+              <a:rPr sz="1875" b="0">
+                <a:solidFill>
+                  <a:srgbClr val="29263B"/>
+                </a:solidFill>
+                <a:latin typeface="Consolas"/>
+                <a:ea typeface="Consolas"/>
+                <a:cs typeface="Consolas"/>
+              </a:rPr>
+              <a:t> </a:t>
+            </a:r>
+            <a:r>
+              <a:rPr sz="1875" b="0">
+                <a:solidFill>
+                  <a:srgbClr val="0070C0"/>
+                </a:solidFill>
+                <a:latin typeface="Consolas"/>
+                <a:ea typeface="Consolas"/>
+                <a:cs typeface="Consolas"/>
+              </a:rPr>
+              <a:t>git-meta</a:t>
+            </a:r>
+            <a:r>
+              <a:rPr sz="1875" b="0">
+                <a:solidFill>
+                  <a:srgbClr val="29263B"/>
+                </a:solidFill>
+                <a:latin typeface="Consolas"/>
+                <a:ea typeface="Consolas"/>
+                <a:cs typeface="Consolas"/>
+              </a:rPr>
+              <a:t> rev-parse HEAD</a:t>
             </a:r>
           </a:p>
           <a:p xmlns:a="http://schemas.openxmlformats.org/drawingml/2006/main">
@@ -16790,13 +18365,79 @@
             <a:r>
               <a:rPr sz="1875" b="0">
                 <a:solidFill>
-                  <a:srgbClr val="005968"/>
+                  <a:srgbClr val="A02B93"/>
                 </a:solidFill>
                 <a:latin typeface="Consolas"/>
                 <a:ea typeface="Consolas"/>
                 <a:cs typeface="Consolas"/>
               </a:rPr>
-              <a:t>git -C git-meta remote -v</a:t>
+              <a:t>git</a:t>
+            </a:r>
+            <a:r>
+              <a:rPr sz="1875" b="0">
+                <a:solidFill>
+                  <a:srgbClr val="29263B"/>
+                </a:solidFill>
+                <a:latin typeface="Consolas"/>
+                <a:ea typeface="Consolas"/>
+                <a:cs typeface="Consolas"/>
+              </a:rPr>
+              <a:t> </a:t>
+            </a:r>
+            <a:r>
+              <a:rPr sz="1875" b="0">
+                <a:solidFill>
+                  <a:srgbClr val="B84E00"/>
+                </a:solidFill>
+                <a:latin typeface="Consolas"/>
+                <a:ea typeface="Consolas"/>
+                <a:cs typeface="Consolas"/>
+              </a:rPr>
+              <a:t>-C</a:t>
+            </a:r>
+            <a:r>
+              <a:rPr sz="1875" b="0">
+                <a:solidFill>
+                  <a:srgbClr val="29263B"/>
+                </a:solidFill>
+                <a:latin typeface="Consolas"/>
+                <a:ea typeface="Consolas"/>
+                <a:cs typeface="Consolas"/>
+              </a:rPr>
+              <a:t> </a:t>
+            </a:r>
+            <a:r>
+              <a:rPr sz="1875" b="0">
+                <a:solidFill>
+                  <a:srgbClr val="0070C0"/>
+                </a:solidFill>
+                <a:latin typeface="Consolas"/>
+                <a:ea typeface="Consolas"/>
+                <a:cs typeface="Consolas"/>
+              </a:rPr>
+              <a:t>git-meta</a:t>
+            </a:r>
+            <a:r>
+              <a:rPr sz="1875" b="0">
+                <a:solidFill>
+                  <a:srgbClr val="29263B"/>
+                </a:solidFill>
+                <a:latin typeface="Consolas"/>
+                <a:ea typeface="Consolas"/>
+                <a:cs typeface="Consolas"/>
+              </a:rPr>
+              <a:t> remote </a:t>
+            </a:r>
+            <a:r>
+              <a:rPr sz="1875" b="0">
+                <a:solidFill>
+                  <a:srgbClr val="B84E00"/>
+                </a:solidFill>
+                <a:latin typeface="Consolas"/>
+                <a:ea typeface="Consolas"/>
+                <a:cs typeface="Consolas"/>
+              </a:rPr>
+              <a:t>-v</a:t>
             </a:r>
           </a:p>
         </p:txBody>
@@ -17234,7 +18875,7 @@
             <a:r>
               <a:rPr sz="1875" b="0">
                 <a:solidFill>
-                  <a:srgbClr val="005968"/>
+                  <a:srgbClr val="646173"/>
                 </a:solidFill>
                 <a:latin typeface="Consolas"/>
                 <a:ea typeface="Consolas"/>
@@ -17260,13 +18901,79 @@
             <a:r>
               <a:rPr sz="1875" b="0">
                 <a:solidFill>
-                  <a:srgbClr val="005968"/>
+                  <a:srgbClr val="A02B93"/>
                 </a:solidFill>
                 <a:latin typeface="Consolas"/>
                 <a:ea typeface="Consolas"/>
                 <a:cs typeface="Consolas"/>
               </a:rPr>
-              <a:t>mv git-meta/.git zephyr-main/.git</a:t>
+              <a:t>mv</a:t>
+            </a:r>
+            <a:r>
+              <a:rPr sz="1875" b="0">
+                <a:solidFill>
+                  <a:srgbClr val="29263B"/>
+                </a:solidFill>
+                <a:latin typeface="Consolas"/>
+                <a:ea typeface="Consolas"/>
+                <a:cs typeface="Consolas"/>
+              </a:rPr>
+              <a:t> </a:t>
+            </a:r>
+            <a:r>
+              <a:rPr sz="1875" b="0">
+                <a:solidFill>
+                  <a:srgbClr val="0070C0"/>
+                </a:solidFill>
+                <a:latin typeface="Consolas"/>
+                <a:ea typeface="Consolas"/>
+                <a:cs typeface="Consolas"/>
+              </a:rPr>
+              <a:t>git-meta</a:t>
+            </a:r>
+            <a:r>
+              <a:rPr sz="1875" b="0">
+                <a:solidFill>
+                  <a:srgbClr val="29263B"/>
+                </a:solidFill>
+                <a:latin typeface="Consolas"/>
+                <a:ea typeface="Consolas"/>
+                <a:cs typeface="Consolas"/>
+              </a:rPr>
+              <a:t>/</a:t>
+            </a:r>
+            <a:r>
+              <a:rPr sz="1875" b="0">
+                <a:solidFill>
+                  <a:srgbClr val="0070C0"/>
+                </a:solidFill>
+                <a:latin typeface="Consolas"/>
+                <a:ea typeface="Consolas"/>
+                <a:cs typeface="Consolas"/>
+              </a:rPr>
+              <a:t>.git</a:t>
+            </a:r>
+            <a:r>
+              <a:rPr sz="1875" b="0">
+                <a:solidFill>
+                  <a:srgbClr val="29263B"/>
+                </a:solidFill>
+                <a:latin typeface="Consolas"/>
+                <a:ea typeface="Consolas"/>
+                <a:cs typeface="Consolas"/>
+              </a:rPr>
+              <a:t> </a:t>
+            </a:r>
+            <a:r>
+              <a:rPr sz="1875" b="0">
+                <a:solidFill>
+                  <a:srgbClr val="0070C0"/>
+                </a:solidFill>
+                <a:latin typeface="Consolas"/>
+                <a:ea typeface="Consolas"/>
+                <a:cs typeface="Consolas"/>
+              </a:rPr>
+              <a:t>zephyr-main/.git</a:t>
             </a:r>
           </a:p>
           <a:p xmlns:a="http://schemas.openxmlformats.org/drawingml/2006/main">
@@ -17286,13 +18993,35 @@
             <a:r>
               <a:rPr sz="1875" b="0">
                 <a:solidFill>
-                  <a:srgbClr val="005968"/>
+                  <a:srgbClr val="A02B93"/>
                 </a:solidFill>
                 <a:latin typeface="Consolas"/>
                 <a:ea typeface="Consolas"/>
                 <a:cs typeface="Consolas"/>
               </a:rPr>
-              <a:t>rmdir git-meta</a:t>
+              <a:t>rmdir</a:t>
+            </a:r>
+            <a:r>
+              <a:rPr sz="1875" b="0">
+                <a:solidFill>
+                  <a:srgbClr val="29263B"/>
+                </a:solidFill>
+                <a:latin typeface="Consolas"/>
+                <a:ea typeface="Consolas"/>
+                <a:cs typeface="Consolas"/>
+              </a:rPr>
+              <a:t> </a:t>
+            </a:r>
+            <a:r>
+              <a:rPr sz="1875" b="0">
+                <a:solidFill>
+                  <a:srgbClr val="0070C0"/>
+                </a:solidFill>
+                <a:latin typeface="Consolas"/>
+                <a:ea typeface="Consolas"/>
+                <a:cs typeface="Consolas"/>
+              </a:rPr>
+              <a:t>git-meta</a:t>
             </a:r>
           </a:p>
           <a:p xmlns:a="http://schemas.openxmlformats.org/drawingml/2006/main">
@@ -17312,13 +19041,24 @@
             <a:r>
               <a:rPr sz="1875" b="0">
                 <a:solidFill>
-                  <a:srgbClr val="005968"/>
+                  <a:srgbClr val="A02B93"/>
                 </a:solidFill>
                 <a:latin typeface="Consolas"/>
                 <a:ea typeface="Consolas"/>
                 <a:cs typeface="Consolas"/>
               </a:rPr>
-              <a:t>cd zephyr-main</a:t>
+              <a:t>cd</a:t>
+            </a:r>
+            <a:r>
+              <a:rPr sz="1875" b="0">
+                <a:solidFill>
+                  <a:srgbClr val="29263B"/>
+                </a:solidFill>
+                <a:latin typeface="Consolas"/>
+                <a:ea typeface="Consolas"/>
+                <a:cs typeface="Consolas"/>
+              </a:rPr>
+              <a:t> zephyr-main</a:t>
             </a:r>
           </a:p>
         </p:txBody>
@@ -17756,7 +19496,7 @@
             <a:r>
               <a:rPr sz="1875" b="0">
                 <a:solidFill>
-                  <a:srgbClr val="005968"/>
+                  <a:srgbClr val="646173"/>
                 </a:solidFill>
                 <a:latin typeface="Consolas"/>
                 <a:ea typeface="Consolas"/>
@@ -17782,13 +19522,46 @@
             <a:r>
               <a:rPr sz="1875" b="0">
                 <a:solidFill>
-                  <a:srgbClr val="005968"/>
+                  <a:srgbClr val="A02B93"/>
                 </a:solidFill>
                 <a:latin typeface="Consolas"/>
                 <a:ea typeface="Consolas"/>
                 <a:cs typeface="Consolas"/>
               </a:rPr>
-              <a:t>git read-tree --reset HEAD</a:t>
+              <a:t>git</a:t>
+            </a:r>
+            <a:r>
+              <a:rPr sz="1875" b="0">
+                <a:solidFill>
+                  <a:srgbClr val="29263B"/>
+                </a:solidFill>
+                <a:latin typeface="Consolas"/>
+                <a:ea typeface="Consolas"/>
+                <a:cs typeface="Consolas"/>
+              </a:rPr>
+              <a:t> read-tree </a:t>
+            </a:r>
+            <a:r>
+              <a:rPr sz="1875" b="0">
+                <a:solidFill>
+                  <a:srgbClr val="B84E00"/>
+                </a:solidFill>
+                <a:latin typeface="Consolas"/>
+                <a:ea typeface="Consolas"/>
+                <a:cs typeface="Consolas"/>
+              </a:rPr>
+              <a:t>--reset</a:t>
+            </a:r>
+            <a:r>
+              <a:rPr sz="1875" b="0">
+                <a:solidFill>
+                  <a:srgbClr val="29263B"/>
+                </a:solidFill>
+                <a:latin typeface="Consolas"/>
+                <a:ea typeface="Consolas"/>
+                <a:cs typeface="Consolas"/>
+              </a:rPr>
+              <a:t> HEAD</a:t>
             </a:r>
           </a:p>
         </p:txBody>
@@ -17859,7 +19632,29 @@
                 <a:ea typeface="Microsoft YaHei"/>
                 <a:cs typeface="Microsoft YaHei"/>
               </a:rPr>
-              <a:t>read-tree 更新索引，不替换工作区源码；随后 git status 检查差异。</a:t>
+              <a:t>read-tree 更新索引，不替换工作区源码；随后 </a:t>
+            </a:r>
+            <a:r>
+              <a:rPr sz="1875" b="0">
+                <a:solidFill>
+                  <a:srgbClr val="A02B93"/>
+                </a:solidFill>
+                <a:latin typeface="Microsoft YaHei"/>
+                <a:ea typeface="Microsoft YaHei"/>
+                <a:cs typeface="Microsoft YaHei"/>
+              </a:rPr>
+              <a:t>git</a:t>
+            </a:r>
+            <a:r>
+              <a:rPr sz="1875" b="0">
+                <a:solidFill>
+                  <a:srgbClr val="29263B"/>
+                </a:solidFill>
+                <a:latin typeface="Microsoft YaHei"/>
+                <a:ea typeface="Microsoft YaHei"/>
+                <a:cs typeface="Microsoft YaHei"/>
+              </a:rPr>
+              <a:t> status 检查差异。</a:t>
             </a:r>
           </a:p>
         </p:txBody>
@@ -18226,7 +20021,7 @@
             <a:r>
               <a:rPr sz="1875" b="0">
                 <a:solidFill>
-                  <a:srgbClr val="005968"/>
+                  <a:srgbClr val="646173"/>
                 </a:solidFill>
                 <a:latin typeface="Consolas"/>
                 <a:ea typeface="Consolas"/>
@@ -18252,13 +20047,68 @@
             <a:r>
               <a:rPr sz="1875" b="0">
                 <a:solidFill>
-                  <a:srgbClr val="005968"/>
+                  <a:srgbClr val="A02B93"/>
                 </a:solidFill>
                 <a:latin typeface="Consolas"/>
                 <a:ea typeface="Consolas"/>
                 <a:cs typeface="Consolas"/>
               </a:rPr>
-              <a:t>git fetch --unshallow --filter=blob:none origin main</a:t>
+              <a:t>git</a:t>
+            </a:r>
+            <a:r>
+              <a:rPr sz="1875" b="0">
+                <a:solidFill>
+                  <a:srgbClr val="29263B"/>
+                </a:solidFill>
+                <a:latin typeface="Consolas"/>
+                <a:ea typeface="Consolas"/>
+                <a:cs typeface="Consolas"/>
+              </a:rPr>
+              <a:t> fetch </a:t>
+            </a:r>
+            <a:r>
+              <a:rPr sz="1875" b="0">
+                <a:solidFill>
+                  <a:srgbClr val="B84E00"/>
+                </a:solidFill>
+                <a:latin typeface="Consolas"/>
+                <a:ea typeface="Consolas"/>
+                <a:cs typeface="Consolas"/>
+              </a:rPr>
+              <a:t>--unshallow</a:t>
+            </a:r>
+            <a:r>
+              <a:rPr sz="1875" b="0">
+                <a:solidFill>
+                  <a:srgbClr val="29263B"/>
+                </a:solidFill>
+                <a:latin typeface="Consolas"/>
+                <a:ea typeface="Consolas"/>
+                <a:cs typeface="Consolas"/>
+              </a:rPr>
+              <a:t> </a:t>
+            </a:r>
+            <a:r>
+              <a:rPr sz="1875" b="0">
+                <a:solidFill>
+                  <a:srgbClr val="B84E00"/>
+                </a:solidFill>
+                <a:latin typeface="Consolas"/>
+                <a:ea typeface="Consolas"/>
+                <a:cs typeface="Consolas"/>
+              </a:rPr>
+              <a:t>--filter</a:t>
+            </a:r>
+            <a:r>
+              <a:rPr sz="1875" b="0">
+                <a:solidFill>
+                  <a:srgbClr val="29263B"/>
+                </a:solidFill>
+                <a:latin typeface="Consolas"/>
+                <a:ea typeface="Consolas"/>
+                <a:cs typeface="Consolas"/>
+              </a:rPr>
+              <a:t>=blob:none origin main</a:t>
             </a:r>
           </a:p>
         </p:txBody>
@@ -18329,7 +20179,51 @@
                 <a:ea typeface="Microsoft YaHei"/>
                 <a:cs typeface="Microsoft YaHei"/>
               </a:rPr>
-              <a:t>先用 git rev-parse --is-shallow-repository 确认是 true；非浅仓库跳过。</a:t>
+              <a:t>先用 </a:t>
+            </a:r>
+            <a:r>
+              <a:rPr sz="1875" b="0">
+                <a:solidFill>
+                  <a:srgbClr val="A02B93"/>
+                </a:solidFill>
+                <a:latin typeface="Microsoft YaHei"/>
+                <a:ea typeface="Microsoft YaHei"/>
+                <a:cs typeface="Microsoft YaHei"/>
+              </a:rPr>
+              <a:t>git</a:t>
+            </a:r>
+            <a:r>
+              <a:rPr sz="1875" b="0">
+                <a:solidFill>
+                  <a:srgbClr val="29263B"/>
+                </a:solidFill>
+                <a:latin typeface="Microsoft YaHei"/>
+                <a:ea typeface="Microsoft YaHei"/>
+                <a:cs typeface="Microsoft YaHei"/>
+              </a:rPr>
+              <a:t> rev-parse </a:t>
+            </a:r>
+            <a:r>
+              <a:rPr sz="1875" b="0">
+                <a:solidFill>
+                  <a:srgbClr val="B84E00"/>
+                </a:solidFill>
+                <a:latin typeface="Microsoft YaHei"/>
+                <a:ea typeface="Microsoft YaHei"/>
+                <a:cs typeface="Microsoft YaHei"/>
+              </a:rPr>
+              <a:t>--is-shallow-repository</a:t>
+            </a:r>
+            <a:r>
+              <a:rPr sz="1875" b="0">
+                <a:solidFill>
+                  <a:srgbClr val="29263B"/>
+                </a:solidFill>
+                <a:latin typeface="Microsoft YaHei"/>
+                <a:ea typeface="Microsoft YaHei"/>
+                <a:cs typeface="Microsoft YaHei"/>
+              </a:rPr>
+              <a:t> 确认是 true；非浅仓库跳过。</a:t>
             </a:r>
           </a:p>
         </p:txBody>
@@ -18696,7 +20590,7 @@
             <a:r>
               <a:rPr sz="1875" b="0">
                 <a:solidFill>
-                  <a:srgbClr val="005968"/>
+                  <a:srgbClr val="646173"/>
                 </a:solidFill>
                 <a:latin typeface="Consolas"/>
                 <a:ea typeface="Consolas"/>
@@ -18722,13 +20616,24 @@
             <a:r>
               <a:rPr sz="1875" b="0">
                 <a:solidFill>
-                  <a:srgbClr val="005968"/>
+                  <a:srgbClr val="A02B93"/>
                 </a:solidFill>
                 <a:latin typeface="Consolas"/>
                 <a:ea typeface="Consolas"/>
                 <a:cs typeface="Consolas"/>
               </a:rPr>
-              <a:t>git config remote.origin.fetch "+refs/heads/*:refs/remotes/origin/*"</a:t>
+              <a:t>git</a:t>
+            </a:r>
+            <a:r>
+              <a:rPr sz="1875" b="0">
+                <a:solidFill>
+                  <a:srgbClr val="29263B"/>
+                </a:solidFill>
+                <a:latin typeface="Consolas"/>
+                <a:ea typeface="Consolas"/>
+                <a:cs typeface="Consolas"/>
+              </a:rPr>
+              <a:t> config remote.origin.fetch "+refs/heads/*:refs/remotes/origin/*"</a:t>
             </a:r>
           </a:p>
           <a:p xmlns:a="http://schemas.openxmlformats.org/drawingml/2006/main">
@@ -18748,13 +20653,46 @@
             <a:r>
               <a:rPr sz="1875" b="0">
                 <a:solidFill>
-                  <a:srgbClr val="005968"/>
+                  <a:srgbClr val="A02B93"/>
                 </a:solidFill>
                 <a:latin typeface="Consolas"/>
                 <a:ea typeface="Consolas"/>
                 <a:cs typeface="Consolas"/>
               </a:rPr>
-              <a:t>git fetch --filter=blob:none origin</a:t>
+              <a:t>git</a:t>
+            </a:r>
+            <a:r>
+              <a:rPr sz="1875" b="0">
+                <a:solidFill>
+                  <a:srgbClr val="29263B"/>
+                </a:solidFill>
+                <a:latin typeface="Consolas"/>
+                <a:ea typeface="Consolas"/>
+                <a:cs typeface="Consolas"/>
+              </a:rPr>
+              <a:t> fetch </a:t>
+            </a:r>
+            <a:r>
+              <a:rPr sz="1875" b="0">
+                <a:solidFill>
+                  <a:srgbClr val="B84E00"/>
+                </a:solidFill>
+                <a:latin typeface="Consolas"/>
+                <a:ea typeface="Consolas"/>
+                <a:cs typeface="Consolas"/>
+              </a:rPr>
+              <a:t>--filter</a:t>
+            </a:r>
+            <a:r>
+              <a:rPr sz="1875" b="0">
+                <a:solidFill>
+                  <a:srgbClr val="29263B"/>
+                </a:solidFill>
+                <a:latin typeface="Consolas"/>
+                <a:ea typeface="Consolas"/>
+                <a:cs typeface="Consolas"/>
+              </a:rPr>
+              <a:t>=blob:none origin</a:t>
             </a:r>
           </a:p>
           <a:p xmlns:a="http://schemas.openxmlformats.org/drawingml/2006/main">
@@ -18774,13 +20712,35 @@
             <a:r>
               <a:rPr sz="1875" b="0">
                 <a:solidFill>
-                  <a:srgbClr val="005968"/>
+                  <a:srgbClr val="A02B93"/>
                 </a:solidFill>
                 <a:latin typeface="Consolas"/>
                 <a:ea typeface="Consolas"/>
                 <a:cs typeface="Consolas"/>
               </a:rPr>
-              <a:t>git branch -r</a:t>
+              <a:t>git</a:t>
+            </a:r>
+            <a:r>
+              <a:rPr sz="1875" b="0">
+                <a:solidFill>
+                  <a:srgbClr val="29263B"/>
+                </a:solidFill>
+                <a:latin typeface="Consolas"/>
+                <a:ea typeface="Consolas"/>
+                <a:cs typeface="Consolas"/>
+              </a:rPr>
+              <a:t> branch </a:t>
+            </a:r>
+            <a:r>
+              <a:rPr sz="1875" b="0">
+                <a:solidFill>
+                  <a:srgbClr val="B84E00"/>
+                </a:solidFill>
+                <a:latin typeface="Consolas"/>
+                <a:ea typeface="Consolas"/>
+                <a:cs typeface="Consolas"/>
+              </a:rPr>
+              <a:t>-r</a:t>
             </a:r>
           </a:p>
         </p:txBody>
@@ -19218,7 +21178,7 @@
             <a:r>
               <a:rPr sz="1875" b="0">
                 <a:solidFill>
-                  <a:srgbClr val="005968"/>
+                  <a:srgbClr val="646173"/>
                 </a:solidFill>
                 <a:latin typeface="Consolas"/>
                 <a:ea typeface="Consolas"/>
@@ -19244,13 +21204,68 @@
             <a:r>
               <a:rPr sz="1875" b="0">
                 <a:solidFill>
-                  <a:srgbClr val="005968"/>
+                  <a:srgbClr val="A02B93"/>
                 </a:solidFill>
                 <a:latin typeface="Consolas"/>
                 <a:ea typeface="Consolas"/>
                 <a:cs typeface="Consolas"/>
               </a:rPr>
-              <a:t>git fetch --tags --filter=blob:none origin</a:t>
+              <a:t>git</a:t>
+            </a:r>
+            <a:r>
+              <a:rPr sz="1875" b="0">
+                <a:solidFill>
+                  <a:srgbClr val="29263B"/>
+                </a:solidFill>
+                <a:latin typeface="Consolas"/>
+                <a:ea typeface="Consolas"/>
+                <a:cs typeface="Consolas"/>
+              </a:rPr>
+              <a:t> fetch </a:t>
+            </a:r>
+            <a:r>
+              <a:rPr sz="1875" b="0">
+                <a:solidFill>
+                  <a:srgbClr val="B84E00"/>
+                </a:solidFill>
+                <a:latin typeface="Consolas"/>
+                <a:ea typeface="Consolas"/>
+                <a:cs typeface="Consolas"/>
+              </a:rPr>
+              <a:t>--tags</a:t>
+            </a:r>
+            <a:r>
+              <a:rPr sz="1875" b="0">
+                <a:solidFill>
+                  <a:srgbClr val="29263B"/>
+                </a:solidFill>
+                <a:latin typeface="Consolas"/>
+                <a:ea typeface="Consolas"/>
+                <a:cs typeface="Consolas"/>
+              </a:rPr>
+              <a:t> </a:t>
+            </a:r>
+            <a:r>
+              <a:rPr sz="1875" b="0">
+                <a:solidFill>
+                  <a:srgbClr val="B84E00"/>
+                </a:solidFill>
+                <a:latin typeface="Consolas"/>
+                <a:ea typeface="Consolas"/>
+                <a:cs typeface="Consolas"/>
+              </a:rPr>
+              <a:t>--filter</a:t>
+            </a:r>
+            <a:r>
+              <a:rPr sz="1875" b="0">
+                <a:solidFill>
+                  <a:srgbClr val="29263B"/>
+                </a:solidFill>
+                <a:latin typeface="Consolas"/>
+                <a:ea typeface="Consolas"/>
+                <a:cs typeface="Consolas"/>
+              </a:rPr>
+              <a:t>=blob:none origin</a:t>
             </a:r>
           </a:p>
           <a:p xmlns:a="http://schemas.openxmlformats.org/drawingml/2006/main">
@@ -19270,13 +21285,35 @@
             <a:r>
               <a:rPr sz="1875" b="0">
                 <a:solidFill>
-                  <a:srgbClr val="005968"/>
+                  <a:srgbClr val="A02B93"/>
                 </a:solidFill>
                 <a:latin typeface="Consolas"/>
                 <a:ea typeface="Consolas"/>
                 <a:cs typeface="Consolas"/>
               </a:rPr>
-              <a:t>git tag -l</a:t>
+              <a:t>git</a:t>
+            </a:r>
+            <a:r>
+              <a:rPr sz="1875" b="0">
+                <a:solidFill>
+                  <a:srgbClr val="29263B"/>
+                </a:solidFill>
+                <a:latin typeface="Consolas"/>
+                <a:ea typeface="Consolas"/>
+                <a:cs typeface="Consolas"/>
+              </a:rPr>
+              <a:t> tag </a:t>
+            </a:r>
+            <a:r>
+              <a:rPr sz="1875" b="0">
+                <a:solidFill>
+                  <a:srgbClr val="B84E00"/>
+                </a:solidFill>
+                <a:latin typeface="Consolas"/>
+                <a:ea typeface="Consolas"/>
+                <a:cs typeface="Consolas"/>
+              </a:rPr>
+              <a:t>-l</a:t>
             </a:r>
           </a:p>
         </p:txBody>
@@ -19714,7 +21751,7 @@
             <a:r>
               <a:rPr sz="1875" b="0">
                 <a:solidFill>
-                  <a:srgbClr val="005968"/>
+                  <a:srgbClr val="646173"/>
                 </a:solidFill>
                 <a:latin typeface="Consolas"/>
                 <a:ea typeface="Consolas"/>
@@ -19740,13 +21777,35 @@
             <a:r>
               <a:rPr sz="1875" b="0">
                 <a:solidFill>
-                  <a:srgbClr val="005968"/>
+                  <a:srgbClr val="A02B93"/>
                 </a:solidFill>
                 <a:latin typeface="Consolas"/>
                 <a:ea typeface="Consolas"/>
                 <a:cs typeface="Consolas"/>
               </a:rPr>
-              <a:t>git rev-parse --show-toplevel</a:t>
+              <a:t>git</a:t>
+            </a:r>
+            <a:r>
+              <a:rPr sz="1875" b="0">
+                <a:solidFill>
+                  <a:srgbClr val="29263B"/>
+                </a:solidFill>
+                <a:latin typeface="Consolas"/>
+                <a:ea typeface="Consolas"/>
+                <a:cs typeface="Consolas"/>
+              </a:rPr>
+              <a:t> rev-parse </a:t>
+            </a:r>
+            <a:r>
+              <a:rPr sz="1875" b="0">
+                <a:solidFill>
+                  <a:srgbClr val="B84E00"/>
+                </a:solidFill>
+                <a:latin typeface="Consolas"/>
+                <a:ea typeface="Consolas"/>
+                <a:cs typeface="Consolas"/>
+              </a:rPr>
+              <a:t>--show-toplevel</a:t>
             </a:r>
           </a:p>
           <a:p xmlns:a="http://schemas.openxmlformats.org/drawingml/2006/main">
@@ -19766,13 +21825,46 @@
             <a:r>
               <a:rPr sz="1875" b="0">
                 <a:solidFill>
-                  <a:srgbClr val="005968"/>
+                  <a:srgbClr val="A02B93"/>
                 </a:solidFill>
                 <a:latin typeface="Consolas"/>
                 <a:ea typeface="Consolas"/>
                 <a:cs typeface="Consolas"/>
               </a:rPr>
-              <a:t>git config --local user.email "xxx@yy.com"</a:t>
+              <a:t>git</a:t>
+            </a:r>
+            <a:r>
+              <a:rPr sz="1875" b="0">
+                <a:solidFill>
+                  <a:srgbClr val="29263B"/>
+                </a:solidFill>
+                <a:latin typeface="Consolas"/>
+                <a:ea typeface="Consolas"/>
+                <a:cs typeface="Consolas"/>
+              </a:rPr>
+              <a:t> config </a:t>
+            </a:r>
+            <a:r>
+              <a:rPr sz="1875" b="0">
+                <a:solidFill>
+                  <a:srgbClr val="B84E00"/>
+                </a:solidFill>
+                <a:latin typeface="Consolas"/>
+                <a:ea typeface="Consolas"/>
+                <a:cs typeface="Consolas"/>
+              </a:rPr>
+              <a:t>--local</a:t>
+            </a:r>
+            <a:r>
+              <a:rPr sz="1875" b="0">
+                <a:solidFill>
+                  <a:srgbClr val="29263B"/>
+                </a:solidFill>
+                <a:latin typeface="Consolas"/>
+                <a:ea typeface="Consolas"/>
+                <a:cs typeface="Consolas"/>
+              </a:rPr>
+              <a:t> user.email "xxx@yy.com"</a:t>
             </a:r>
           </a:p>
           <a:p xmlns:a="http://schemas.openxmlformats.org/drawingml/2006/main">
@@ -19792,13 +21884,46 @@
             <a:r>
               <a:rPr sz="1875" b="0">
                 <a:solidFill>
-                  <a:srgbClr val="005968"/>
+                  <a:srgbClr val="A02B93"/>
                 </a:solidFill>
                 <a:latin typeface="Consolas"/>
                 <a:ea typeface="Consolas"/>
                 <a:cs typeface="Consolas"/>
               </a:rPr>
-              <a:t>git config --local user.name "xxx"</a:t>
+              <a:t>git</a:t>
+            </a:r>
+            <a:r>
+              <a:rPr sz="1875" b="0">
+                <a:solidFill>
+                  <a:srgbClr val="29263B"/>
+                </a:solidFill>
+                <a:latin typeface="Consolas"/>
+                <a:ea typeface="Consolas"/>
+                <a:cs typeface="Consolas"/>
+              </a:rPr>
+              <a:t> config </a:t>
+            </a:r>
+            <a:r>
+              <a:rPr sz="1875" b="0">
+                <a:solidFill>
+                  <a:srgbClr val="B84E00"/>
+                </a:solidFill>
+                <a:latin typeface="Consolas"/>
+                <a:ea typeface="Consolas"/>
+                <a:cs typeface="Consolas"/>
+              </a:rPr>
+              <a:t>--local</a:t>
+            </a:r>
+            <a:r>
+              <a:rPr sz="1875" b="0">
+                <a:solidFill>
+                  <a:srgbClr val="29263B"/>
+                </a:solidFill>
+                <a:latin typeface="Consolas"/>
+                <a:ea typeface="Consolas"/>
+                <a:cs typeface="Consolas"/>
+              </a:rPr>
+              <a:t> user.name "xxx"</a:t>
             </a:r>
           </a:p>
           <a:p xmlns:a="http://schemas.openxmlformats.org/drawingml/2006/main">
@@ -19818,13 +21943,68 @@
             <a:r>
               <a:rPr sz="1875" b="0">
                 <a:solidFill>
-                  <a:srgbClr val="005968"/>
+                  <a:srgbClr val="A02B93"/>
                 </a:solidFill>
                 <a:latin typeface="Consolas"/>
                 <a:ea typeface="Consolas"/>
                 <a:cs typeface="Consolas"/>
               </a:rPr>
-              <a:t>git config --local --get user.email</a:t>
+              <a:t>git</a:t>
+            </a:r>
+            <a:r>
+              <a:rPr sz="1875" b="0">
+                <a:solidFill>
+                  <a:srgbClr val="29263B"/>
+                </a:solidFill>
+                <a:latin typeface="Consolas"/>
+                <a:ea typeface="Consolas"/>
+                <a:cs typeface="Consolas"/>
+              </a:rPr>
+              <a:t> config </a:t>
+            </a:r>
+            <a:r>
+              <a:rPr sz="1875" b="0">
+                <a:solidFill>
+                  <a:srgbClr val="B84E00"/>
+                </a:solidFill>
+                <a:latin typeface="Consolas"/>
+                <a:ea typeface="Consolas"/>
+                <a:cs typeface="Consolas"/>
+              </a:rPr>
+              <a:t>--local</a:t>
+            </a:r>
+            <a:r>
+              <a:rPr sz="1875" b="0">
+                <a:solidFill>
+                  <a:srgbClr val="29263B"/>
+                </a:solidFill>
+                <a:latin typeface="Consolas"/>
+                <a:ea typeface="Consolas"/>
+                <a:cs typeface="Consolas"/>
+              </a:rPr>
+              <a:t> </a:t>
+            </a:r>
+            <a:r>
+              <a:rPr sz="1875" b="0">
+                <a:solidFill>
+                  <a:srgbClr val="B84E00"/>
+                </a:solidFill>
+                <a:latin typeface="Consolas"/>
+                <a:ea typeface="Consolas"/>
+                <a:cs typeface="Consolas"/>
+              </a:rPr>
+              <a:t>--get</a:t>
+            </a:r>
+            <a:r>
+              <a:rPr sz="1875" b="0">
+                <a:solidFill>
+                  <a:srgbClr val="29263B"/>
+                </a:solidFill>
+                <a:latin typeface="Consolas"/>
+                <a:ea typeface="Consolas"/>
+                <a:cs typeface="Consolas"/>
+              </a:rPr>
+              <a:t> user.email</a:t>
             </a:r>
           </a:p>
           <a:p xmlns:a="http://schemas.openxmlformats.org/drawingml/2006/main">
@@ -19844,13 +22024,68 @@
             <a:r>
               <a:rPr sz="1875" b="0">
                 <a:solidFill>
-                  <a:srgbClr val="005968"/>
+                  <a:srgbClr val="A02B93"/>
                 </a:solidFill>
                 <a:latin typeface="Consolas"/>
                 <a:ea typeface="Consolas"/>
                 <a:cs typeface="Consolas"/>
               </a:rPr>
-              <a:t>git config --local --get user.name</a:t>
+              <a:t>git</a:t>
+            </a:r>
+            <a:r>
+              <a:rPr sz="1875" b="0">
+                <a:solidFill>
+                  <a:srgbClr val="29263B"/>
+                </a:solidFill>
+                <a:latin typeface="Consolas"/>
+                <a:ea typeface="Consolas"/>
+                <a:cs typeface="Consolas"/>
+              </a:rPr>
+              <a:t> config </a:t>
+            </a:r>
+            <a:r>
+              <a:rPr sz="1875" b="0">
+                <a:solidFill>
+                  <a:srgbClr val="B84E00"/>
+                </a:solidFill>
+                <a:latin typeface="Consolas"/>
+                <a:ea typeface="Consolas"/>
+                <a:cs typeface="Consolas"/>
+              </a:rPr>
+              <a:t>--local</a:t>
+            </a:r>
+            <a:r>
+              <a:rPr sz="1875" b="0">
+                <a:solidFill>
+                  <a:srgbClr val="29263B"/>
+                </a:solidFill>
+                <a:latin typeface="Consolas"/>
+                <a:ea typeface="Consolas"/>
+                <a:cs typeface="Consolas"/>
+              </a:rPr>
+              <a:t> </a:t>
+            </a:r>
+            <a:r>
+              <a:rPr sz="1875" b="0">
+                <a:solidFill>
+                  <a:srgbClr val="B84E00"/>
+                </a:solidFill>
+                <a:latin typeface="Consolas"/>
+                <a:ea typeface="Consolas"/>
+                <a:cs typeface="Consolas"/>
+              </a:rPr>
+              <a:t>--get</a:t>
+            </a:r>
+            <a:r>
+              <a:rPr sz="1875" b="0">
+                <a:solidFill>
+                  <a:srgbClr val="29263B"/>
+                </a:solidFill>
+                <a:latin typeface="Consolas"/>
+                <a:ea typeface="Consolas"/>
+                <a:cs typeface="Consolas"/>
+              </a:rPr>
+              <a:t> user.name</a:t>
             </a:r>
           </a:p>
         </p:txBody>
@@ -19921,7 +22156,51 @@
                 <a:ea typeface="Microsoft YaHei"/>
                 <a:cs typeface="Microsoft YaHei"/>
               </a:rPr>
-              <a:t>把示例姓名和邮箱改成自己的；--local 只写当前 .git/config。</a:t>
+              <a:t>把示例姓名和邮箱改成自己的；</a:t>
+            </a:r>
+            <a:r>
+              <a:rPr sz="1875" b="0">
+                <a:solidFill>
+                  <a:srgbClr val="B84E00"/>
+                </a:solidFill>
+                <a:latin typeface="Microsoft YaHei"/>
+                <a:ea typeface="Microsoft YaHei"/>
+                <a:cs typeface="Microsoft YaHei"/>
+              </a:rPr>
+              <a:t>--local</a:t>
+            </a:r>
+            <a:r>
+              <a:rPr sz="1875" b="0">
+                <a:solidFill>
+                  <a:srgbClr val="29263B"/>
+                </a:solidFill>
+                <a:latin typeface="Microsoft YaHei"/>
+                <a:ea typeface="Microsoft YaHei"/>
+                <a:cs typeface="Microsoft YaHei"/>
+              </a:rPr>
+              <a:t> 只写当前 </a:t>
+            </a:r>
+            <a:r>
+              <a:rPr sz="1875" b="0">
+                <a:solidFill>
+                  <a:srgbClr val="0070C0"/>
+                </a:solidFill>
+                <a:latin typeface="Microsoft YaHei"/>
+                <a:ea typeface="Microsoft YaHei"/>
+                <a:cs typeface="Microsoft YaHei"/>
+              </a:rPr>
+              <a:t>.git/config</a:t>
+            </a:r>
+            <a:r>
+              <a:rPr sz="1875" b="0">
+                <a:solidFill>
+                  <a:srgbClr val="29263B"/>
+                </a:solidFill>
+                <a:latin typeface="Microsoft YaHei"/>
+                <a:ea typeface="Microsoft YaHei"/>
+                <a:cs typeface="Microsoft YaHei"/>
+              </a:rPr>
+              <a:t>。</a:t>
             </a:r>
           </a:p>
         </p:txBody>
@@ -20288,7 +22567,7 @@
             <a:r>
               <a:rPr sz="1875" b="0">
                 <a:solidFill>
-                  <a:srgbClr val="005968"/>
+                  <a:srgbClr val="646173"/>
                 </a:solidFill>
                 <a:latin typeface="Consolas"/>
                 <a:ea typeface="Consolas"/>
@@ -20314,13 +22593,68 @@
             <a:r>
               <a:rPr sz="1875" b="0">
                 <a:solidFill>
-                  <a:srgbClr val="005968"/>
+                  <a:srgbClr val="A02B93"/>
                 </a:solidFill>
                 <a:latin typeface="Consolas"/>
                 <a:ea typeface="Consolas"/>
                 <a:cs typeface="Consolas"/>
               </a:rPr>
-              <a:t>git config --show-origin --get-regexp '^(http|https)\..*proxy$'</a:t>
+              <a:t>git</a:t>
+            </a:r>
+            <a:r>
+              <a:rPr sz="1875" b="0">
+                <a:solidFill>
+                  <a:srgbClr val="29263B"/>
+                </a:solidFill>
+                <a:latin typeface="Consolas"/>
+                <a:ea typeface="Consolas"/>
+                <a:cs typeface="Consolas"/>
+              </a:rPr>
+              <a:t> config </a:t>
+            </a:r>
+            <a:r>
+              <a:rPr sz="1875" b="0">
+                <a:solidFill>
+                  <a:srgbClr val="B84E00"/>
+                </a:solidFill>
+                <a:latin typeface="Consolas"/>
+                <a:ea typeface="Consolas"/>
+                <a:cs typeface="Consolas"/>
+              </a:rPr>
+              <a:t>--show-origin</a:t>
+            </a:r>
+            <a:r>
+              <a:rPr sz="1875" b="0">
+                <a:solidFill>
+                  <a:srgbClr val="29263B"/>
+                </a:solidFill>
+                <a:latin typeface="Consolas"/>
+                <a:ea typeface="Consolas"/>
+                <a:cs typeface="Consolas"/>
+              </a:rPr>
+              <a:t> </a:t>
+            </a:r>
+            <a:r>
+              <a:rPr sz="1875" b="0">
+                <a:solidFill>
+                  <a:srgbClr val="B84E00"/>
+                </a:solidFill>
+                <a:latin typeface="Consolas"/>
+                <a:ea typeface="Consolas"/>
+                <a:cs typeface="Consolas"/>
+              </a:rPr>
+              <a:t>--get-regexp</a:t>
+            </a:r>
+            <a:r>
+              <a:rPr sz="1875" b="0">
+                <a:solidFill>
+                  <a:srgbClr val="29263B"/>
+                </a:solidFill>
+                <a:latin typeface="Consolas"/>
+                <a:ea typeface="Consolas"/>
+                <a:cs typeface="Consolas"/>
+              </a:rPr>
+              <a:t> '^(http|https)\..*proxy$'</a:t>
             </a:r>
           </a:p>
           <a:p xmlns:a="http://schemas.openxmlformats.org/drawingml/2006/main">
@@ -20340,13 +22674,68 @@
             <a:r>
               <a:rPr sz="1875" b="0">
                 <a:solidFill>
-                  <a:srgbClr val="005968"/>
+                  <a:srgbClr val="A02B93"/>
                 </a:solidFill>
                 <a:latin typeface="Consolas"/>
                 <a:ea typeface="Consolas"/>
                 <a:cs typeface="Consolas"/>
               </a:rPr>
-              <a:t>env | grep -i proxy</a:t>
+              <a:t>env</a:t>
+            </a:r>
+            <a:r>
+              <a:rPr sz="1875" b="0">
+                <a:solidFill>
+                  <a:srgbClr val="29263B"/>
+                </a:solidFill>
+                <a:latin typeface="Consolas"/>
+                <a:ea typeface="Consolas"/>
+                <a:cs typeface="Consolas"/>
+              </a:rPr>
+              <a:t> | </a:t>
+            </a:r>
+            <a:r>
+              <a:rPr sz="1875" b="0">
+                <a:solidFill>
+                  <a:srgbClr val="A02B93"/>
+                </a:solidFill>
+                <a:latin typeface="Consolas"/>
+                <a:ea typeface="Consolas"/>
+                <a:cs typeface="Consolas"/>
+              </a:rPr>
+              <a:t>grep</a:t>
+            </a:r>
+            <a:r>
+              <a:rPr sz="1875" b="0">
+                <a:solidFill>
+                  <a:srgbClr val="29263B"/>
+                </a:solidFill>
+                <a:latin typeface="Consolas"/>
+                <a:ea typeface="Consolas"/>
+                <a:cs typeface="Consolas"/>
+              </a:rPr>
+              <a:t> </a:t>
+            </a:r>
+            <a:r>
+              <a:rPr sz="1875" b="0">
+                <a:solidFill>
+                  <a:srgbClr val="B84E00"/>
+                </a:solidFill>
+                <a:latin typeface="Consolas"/>
+                <a:ea typeface="Consolas"/>
+                <a:cs typeface="Consolas"/>
+              </a:rPr>
+              <a:t>-i</a:t>
+            </a:r>
+            <a:r>
+              <a:rPr sz="1875" b="0">
+                <a:solidFill>
+                  <a:srgbClr val="29263B"/>
+                </a:solidFill>
+                <a:latin typeface="Consolas"/>
+                <a:ea typeface="Consolas"/>
+                <a:cs typeface="Consolas"/>
+              </a:rPr>
+              <a:t> proxy</a:t>
             </a:r>
           </a:p>
         </p:txBody>
@@ -20784,7 +23173,7 @@
             <a:r>
               <a:rPr sz="1875" b="0">
                 <a:solidFill>
-                  <a:srgbClr val="005968"/>
+                  <a:srgbClr val="646173"/>
                 </a:solidFill>
                 <a:latin typeface="Consolas"/>
                 <a:ea typeface="Consolas"/>
@@ -20810,13 +23199,46 @@
             <a:r>
               <a:rPr sz="1875" b="0">
                 <a:solidFill>
-                  <a:srgbClr val="005968"/>
+                  <a:srgbClr val="A02B93"/>
                 </a:solidFill>
                 <a:latin typeface="Consolas"/>
                 <a:ea typeface="Consolas"/>
                 <a:cs typeface="Consolas"/>
               </a:rPr>
-              <a:t>echo "$MSYSTEM"</a:t>
+              <a:t>echo</a:t>
+            </a:r>
+            <a:r>
+              <a:rPr sz="1875" b="0">
+                <a:solidFill>
+                  <a:srgbClr val="29263B"/>
+                </a:solidFill>
+                <a:latin typeface="Consolas"/>
+                <a:ea typeface="Consolas"/>
+                <a:cs typeface="Consolas"/>
+              </a:rPr>
+              <a:t> "</a:t>
+            </a:r>
+            <a:r>
+              <a:rPr sz="1875" b="0">
+                <a:solidFill>
+                  <a:srgbClr val="B84E00"/>
+                </a:solidFill>
+                <a:latin typeface="Consolas"/>
+                <a:ea typeface="Consolas"/>
+                <a:cs typeface="Consolas"/>
+              </a:rPr>
+              <a:t>$MSYSTEM</a:t>
+            </a:r>
+            <a:r>
+              <a:rPr sz="1875" b="0">
+                <a:solidFill>
+                  <a:srgbClr val="29263B"/>
+                </a:solidFill>
+                <a:latin typeface="Consolas"/>
+                <a:ea typeface="Consolas"/>
+                <a:cs typeface="Consolas"/>
+              </a:rPr>
+              <a:t>"</a:t>
             </a:r>
           </a:p>
           <a:p xmlns:a="http://schemas.openxmlformats.org/drawingml/2006/main">
@@ -20836,13 +23258,46 @@
             <a:r>
               <a:rPr sz="1875" b="0">
                 <a:solidFill>
-                  <a:srgbClr val="005968"/>
+                  <a:srgbClr val="A02B93"/>
                 </a:solidFill>
                 <a:latin typeface="Consolas"/>
                 <a:ea typeface="Consolas"/>
                 <a:cs typeface="Consolas"/>
               </a:rPr>
-              <a:t>echo "$MINGW_PREFIX"</a:t>
+              <a:t>echo</a:t>
+            </a:r>
+            <a:r>
+              <a:rPr sz="1875" b="0">
+                <a:solidFill>
+                  <a:srgbClr val="29263B"/>
+                </a:solidFill>
+                <a:latin typeface="Consolas"/>
+                <a:ea typeface="Consolas"/>
+                <a:cs typeface="Consolas"/>
+              </a:rPr>
+              <a:t> "</a:t>
+            </a:r>
+            <a:r>
+              <a:rPr sz="1875" b="0">
+                <a:solidFill>
+                  <a:srgbClr val="B84E00"/>
+                </a:solidFill>
+                <a:latin typeface="Consolas"/>
+                <a:ea typeface="Consolas"/>
+                <a:cs typeface="Consolas"/>
+              </a:rPr>
+              <a:t>$MINGW_PREFIX</a:t>
+            </a:r>
+            <a:r>
+              <a:rPr sz="1875" b="0">
+                <a:solidFill>
+                  <a:srgbClr val="29263B"/>
+                </a:solidFill>
+                <a:latin typeface="Consolas"/>
+                <a:ea typeface="Consolas"/>
+                <a:cs typeface="Consolas"/>
+              </a:rPr>
+              <a:t>"</a:t>
             </a:r>
           </a:p>
         </p:txBody>
@@ -21280,7 +23735,7 @@
             <a:r>
               <a:rPr sz="1875" b="0">
                 <a:solidFill>
-                  <a:srgbClr val="005968"/>
+                  <a:srgbClr val="646173"/>
                 </a:solidFill>
                 <a:latin typeface="Consolas"/>
                 <a:ea typeface="Consolas"/>
@@ -21306,13 +23761,79 @@
             <a:r>
               <a:rPr sz="1875" b="0">
                 <a:solidFill>
-                  <a:srgbClr val="005968"/>
+                  <a:srgbClr val="A02B93"/>
                 </a:solidFill>
                 <a:latin typeface="Consolas"/>
                 <a:ea typeface="Consolas"/>
                 <a:cs typeface="Consolas"/>
               </a:rPr>
-              <a:t>if [ ! -e /etc/pacman.d/mirrorlist.msys.before-cn ]; then</a:t>
+              <a:t>if</a:t>
+            </a:r>
+            <a:r>
+              <a:rPr sz="1875" b="0">
+                <a:solidFill>
+                  <a:srgbClr val="29263B"/>
+                </a:solidFill>
+                <a:latin typeface="Consolas"/>
+                <a:ea typeface="Consolas"/>
+                <a:cs typeface="Consolas"/>
+              </a:rPr>
+              <a:t> [ ! </a:t>
+            </a:r>
+            <a:r>
+              <a:rPr sz="1875" b="0">
+                <a:solidFill>
+                  <a:srgbClr val="B84E00"/>
+                </a:solidFill>
+                <a:latin typeface="Consolas"/>
+                <a:ea typeface="Consolas"/>
+                <a:cs typeface="Consolas"/>
+              </a:rPr>
+              <a:t>-e</a:t>
+            </a:r>
+            <a:r>
+              <a:rPr sz="1875" b="0">
+                <a:solidFill>
+                  <a:srgbClr val="29263B"/>
+                </a:solidFill>
+                <a:latin typeface="Consolas"/>
+                <a:ea typeface="Consolas"/>
+                <a:cs typeface="Consolas"/>
+              </a:rPr>
+              <a:t> </a:t>
+            </a:r>
+            <a:r>
+              <a:rPr sz="1875" b="0">
+                <a:solidFill>
+                  <a:srgbClr val="0070C0"/>
+                </a:solidFill>
+                <a:latin typeface="Consolas"/>
+                <a:ea typeface="Consolas"/>
+                <a:cs typeface="Consolas"/>
+              </a:rPr>
+              <a:t>/etc/pacman.d/mirrorlist.msys.before-cn</a:t>
+            </a:r>
+            <a:r>
+              <a:rPr sz="1875" b="0">
+                <a:solidFill>
+                  <a:srgbClr val="29263B"/>
+                </a:solidFill>
+                <a:latin typeface="Consolas"/>
+                <a:ea typeface="Consolas"/>
+                <a:cs typeface="Consolas"/>
+              </a:rPr>
+              <a:t> ]; </a:t>
+            </a:r>
+            <a:r>
+              <a:rPr sz="1875" b="0">
+                <a:solidFill>
+                  <a:srgbClr val="A02B93"/>
+                </a:solidFill>
+                <a:latin typeface="Consolas"/>
+                <a:ea typeface="Consolas"/>
+                <a:cs typeface="Consolas"/>
+              </a:rPr>
+              <a:t>then</a:t>
             </a:r>
           </a:p>
           <a:p xmlns:a="http://schemas.openxmlformats.org/drawingml/2006/main">
@@ -21332,13 +23853,68 @@
             <a:r>
               <a:rPr sz="1875" b="0">
                 <a:solidFill>
-                  <a:srgbClr val="005968"/>
+                  <a:srgbClr val="29263B"/>
                 </a:solidFill>
                 <a:latin typeface="Consolas"/>
                 <a:ea typeface="Consolas"/>
                 <a:cs typeface="Consolas"/>
               </a:rPr>
-              <a:t>    cp /etc/pacman.d/mirrorlist.msys /etc/pacman.d/mirrorlist.msys.before-cn</a:t>
+              <a:t>    </a:t>
+            </a:r>
+            <a:r>
+              <a:rPr sz="1875" b="0">
+                <a:solidFill>
+                  <a:srgbClr val="A02B93"/>
+                </a:solidFill>
+                <a:latin typeface="Consolas"/>
+                <a:ea typeface="Consolas"/>
+                <a:cs typeface="Consolas"/>
+              </a:rPr>
+              <a:t>cp</a:t>
+            </a:r>
+            <a:r>
+              <a:rPr sz="1875" b="0">
+                <a:solidFill>
+                  <a:srgbClr val="29263B"/>
+                </a:solidFill>
+                <a:latin typeface="Consolas"/>
+                <a:ea typeface="Consolas"/>
+                <a:cs typeface="Consolas"/>
+              </a:rPr>
+              <a:t> </a:t>
+            </a:r>
+            <a:r>
+              <a:rPr sz="1875" b="0">
+                <a:solidFill>
+                  <a:srgbClr val="0070C0"/>
+                </a:solidFill>
+                <a:latin typeface="Consolas"/>
+                <a:ea typeface="Consolas"/>
+                <a:cs typeface="Consolas"/>
+              </a:rPr>
+              <a:t>/etc/pacman.d/mirrorlist.msys</a:t>
+            </a:r>
+            <a:r>
+              <a:rPr sz="1875" b="0">
+                <a:solidFill>
+                  <a:srgbClr val="29263B"/>
+                </a:solidFill>
+                <a:latin typeface="Consolas"/>
+                <a:ea typeface="Consolas"/>
+                <a:cs typeface="Consolas"/>
+              </a:rPr>
+              <a:t> </a:t>
+            </a:r>
+            <a:r>
+              <a:rPr sz="1875" b="0">
+                <a:solidFill>
+                  <a:srgbClr val="0070C0"/>
+                </a:solidFill>
+                <a:latin typeface="Consolas"/>
+                <a:ea typeface="Consolas"/>
+                <a:cs typeface="Consolas"/>
+              </a:rPr>
+              <a:t>/etc/pacman.d/mirrorlist.msys.before-cn</a:t>
             </a:r>
           </a:p>
           <a:p xmlns:a="http://schemas.openxmlformats.org/drawingml/2006/main">
@@ -21358,7 +23934,7 @@
             <a:r>
               <a:rPr sz="1875" b="0">
                 <a:solidFill>
-                  <a:srgbClr val="005968"/>
+                  <a:srgbClr val="A02B93"/>
                 </a:solidFill>
                 <a:latin typeface="Consolas"/>
                 <a:ea typeface="Consolas"/>
@@ -21384,13 +23960,79 @@
             <a:r>
               <a:rPr sz="1875" b="0">
                 <a:solidFill>
-                  <a:srgbClr val="005968"/>
+                  <a:srgbClr val="A02B93"/>
                 </a:solidFill>
                 <a:latin typeface="Consolas"/>
                 <a:ea typeface="Consolas"/>
                 <a:cs typeface="Consolas"/>
               </a:rPr>
-              <a:t>if [ ! -e /etc/pacman.d/mirrorlist.mingw.before-cn ]; then</a:t>
+              <a:t>if</a:t>
+            </a:r>
+            <a:r>
+              <a:rPr sz="1875" b="0">
+                <a:solidFill>
+                  <a:srgbClr val="29263B"/>
+                </a:solidFill>
+                <a:latin typeface="Consolas"/>
+                <a:ea typeface="Consolas"/>
+                <a:cs typeface="Consolas"/>
+              </a:rPr>
+              <a:t> [ ! </a:t>
+            </a:r>
+            <a:r>
+              <a:rPr sz="1875" b="0">
+                <a:solidFill>
+                  <a:srgbClr val="B84E00"/>
+                </a:solidFill>
+                <a:latin typeface="Consolas"/>
+                <a:ea typeface="Consolas"/>
+                <a:cs typeface="Consolas"/>
+              </a:rPr>
+              <a:t>-e</a:t>
+            </a:r>
+            <a:r>
+              <a:rPr sz="1875" b="0">
+                <a:solidFill>
+                  <a:srgbClr val="29263B"/>
+                </a:solidFill>
+                <a:latin typeface="Consolas"/>
+                <a:ea typeface="Consolas"/>
+                <a:cs typeface="Consolas"/>
+              </a:rPr>
+              <a:t> </a:t>
+            </a:r>
+            <a:r>
+              <a:rPr sz="1875" b="0">
+                <a:solidFill>
+                  <a:srgbClr val="0070C0"/>
+                </a:solidFill>
+                <a:latin typeface="Consolas"/>
+                <a:ea typeface="Consolas"/>
+                <a:cs typeface="Consolas"/>
+              </a:rPr>
+              <a:t>/etc/pacman.d/mirrorlist.mingw.before-cn</a:t>
+            </a:r>
+            <a:r>
+              <a:rPr sz="1875" b="0">
+                <a:solidFill>
+                  <a:srgbClr val="29263B"/>
+                </a:solidFill>
+                <a:latin typeface="Consolas"/>
+                <a:ea typeface="Consolas"/>
+                <a:cs typeface="Consolas"/>
+              </a:rPr>
+              <a:t> ]; </a:t>
+            </a:r>
+            <a:r>
+              <a:rPr sz="1875" b="0">
+                <a:solidFill>
+                  <a:srgbClr val="A02B93"/>
+                </a:solidFill>
+                <a:latin typeface="Consolas"/>
+                <a:ea typeface="Consolas"/>
+                <a:cs typeface="Consolas"/>
+              </a:rPr>
+              <a:t>then</a:t>
             </a:r>
           </a:p>
           <a:p xmlns:a="http://schemas.openxmlformats.org/drawingml/2006/main">
@@ -21410,13 +24052,68 @@
             <a:r>
               <a:rPr sz="1875" b="0">
                 <a:solidFill>
-                  <a:srgbClr val="005968"/>
+                  <a:srgbClr val="29263B"/>
                 </a:solidFill>
                 <a:latin typeface="Consolas"/>
                 <a:ea typeface="Consolas"/>
                 <a:cs typeface="Consolas"/>
               </a:rPr>
-              <a:t>    cp /etc/pacman.d/mirrorlist.mingw /etc/pacman.d/mirrorlist.mingw.before-cn</a:t>
+              <a:t>    </a:t>
+            </a:r>
+            <a:r>
+              <a:rPr sz="1875" b="0">
+                <a:solidFill>
+                  <a:srgbClr val="A02B93"/>
+                </a:solidFill>
+                <a:latin typeface="Consolas"/>
+                <a:ea typeface="Consolas"/>
+                <a:cs typeface="Consolas"/>
+              </a:rPr>
+              <a:t>cp</a:t>
+            </a:r>
+            <a:r>
+              <a:rPr sz="1875" b="0">
+                <a:solidFill>
+                  <a:srgbClr val="29263B"/>
+                </a:solidFill>
+                <a:latin typeface="Consolas"/>
+                <a:ea typeface="Consolas"/>
+                <a:cs typeface="Consolas"/>
+              </a:rPr>
+              <a:t> </a:t>
+            </a:r>
+            <a:r>
+              <a:rPr sz="1875" b="0">
+                <a:solidFill>
+                  <a:srgbClr val="0070C0"/>
+                </a:solidFill>
+                <a:latin typeface="Consolas"/>
+                <a:ea typeface="Consolas"/>
+                <a:cs typeface="Consolas"/>
+              </a:rPr>
+              <a:t>/etc/pacman.d/mirrorlist.mingw</a:t>
+            </a:r>
+            <a:r>
+              <a:rPr sz="1875" b="0">
+                <a:solidFill>
+                  <a:srgbClr val="29263B"/>
+                </a:solidFill>
+                <a:latin typeface="Consolas"/>
+                <a:ea typeface="Consolas"/>
+                <a:cs typeface="Consolas"/>
+              </a:rPr>
+              <a:t> </a:t>
+            </a:r>
+            <a:r>
+              <a:rPr sz="1875" b="0">
+                <a:solidFill>
+                  <a:srgbClr val="0070C0"/>
+                </a:solidFill>
+                <a:latin typeface="Consolas"/>
+                <a:ea typeface="Consolas"/>
+                <a:cs typeface="Consolas"/>
+              </a:rPr>
+              <a:t>/etc/pacman.d/mirrorlist.mingw.before-cn</a:t>
             </a:r>
           </a:p>
           <a:p xmlns:a="http://schemas.openxmlformats.org/drawingml/2006/main">
@@ -21436,7 +24133,7 @@
             <a:r>
               <a:rPr sz="1875" b="0">
                 <a:solidFill>
-                  <a:srgbClr val="005968"/>
+                  <a:srgbClr val="A02B93"/>
                 </a:solidFill>
                 <a:latin typeface="Consolas"/>
                 <a:ea typeface="Consolas"/>
@@ -21880,7 +24577,7 @@
             <a:r>
               <a:rPr sz="1875" b="0">
                 <a:solidFill>
-                  <a:srgbClr val="005968"/>
+                  <a:srgbClr val="646173"/>
                 </a:solidFill>
                 <a:latin typeface="Consolas"/>
                 <a:ea typeface="Consolas"/>
@@ -21906,13 +24603,46 @@
             <a:r>
               <a:rPr sz="1875" b="0">
                 <a:solidFill>
-                  <a:srgbClr val="005968"/>
+                  <a:srgbClr val="A02B93"/>
                 </a:solidFill>
                 <a:latin typeface="Consolas"/>
                 <a:ea typeface="Consolas"/>
                 <a:cs typeface="Consolas"/>
               </a:rPr>
-              <a:t>cat &gt; /etc/pacman.d/mirrorlist.msys &lt;&lt;'EOF'</a:t>
+              <a:t>cat</a:t>
+            </a:r>
+            <a:r>
+              <a:rPr sz="1875" b="0">
+                <a:solidFill>
+                  <a:srgbClr val="29263B"/>
+                </a:solidFill>
+                <a:latin typeface="Consolas"/>
+                <a:ea typeface="Consolas"/>
+                <a:cs typeface="Consolas"/>
+              </a:rPr>
+              <a:t> &gt; </a:t>
+            </a:r>
+            <a:r>
+              <a:rPr sz="1875" b="0">
+                <a:solidFill>
+                  <a:srgbClr val="0070C0"/>
+                </a:solidFill>
+                <a:latin typeface="Consolas"/>
+                <a:ea typeface="Consolas"/>
+                <a:cs typeface="Consolas"/>
+              </a:rPr>
+              <a:t>/etc/pacman.d/mirrorlist.msys</a:t>
+            </a:r>
+            <a:r>
+              <a:rPr sz="1875" b="0">
+                <a:solidFill>
+                  <a:srgbClr val="29263B"/>
+                </a:solidFill>
+                <a:latin typeface="Consolas"/>
+                <a:ea typeface="Consolas"/>
+                <a:cs typeface="Consolas"/>
+              </a:rPr>
+              <a:t> &lt;&lt;'EOF'</a:t>
             </a:r>
           </a:p>
           <a:p xmlns:a="http://schemas.openxmlformats.org/drawingml/2006/main">
@@ -21932,13 +24662,46 @@
             <a:r>
               <a:rPr sz="1875" b="0">
                 <a:solidFill>
-                  <a:srgbClr val="005968"/>
+                  <a:srgbClr val="29263B"/>
                 </a:solidFill>
                 <a:latin typeface="Consolas"/>
                 <a:ea typeface="Consolas"/>
                 <a:cs typeface="Consolas"/>
               </a:rPr>
-              <a:t>Server = https://mirrors.ustc.edu.cn/msys2/msys/$arch/</a:t>
+              <a:t>Server = </a:t>
+            </a:r>
+            <a:r>
+              <a:rPr sz="1875" b="0">
+                <a:solidFill>
+                  <a:srgbClr val="0070C0"/>
+                </a:solidFill>
+                <a:latin typeface="Consolas"/>
+                <a:ea typeface="Consolas"/>
+                <a:cs typeface="Consolas"/>
+              </a:rPr>
+              <a:t>https://mirrors.ustc.edu.cn/msys2/msys/</a:t>
+            </a:r>
+            <a:r>
+              <a:rPr sz="1875" b="0">
+                <a:solidFill>
+                  <a:srgbClr val="B84E00"/>
+                </a:solidFill>
+                <a:latin typeface="Consolas"/>
+                <a:ea typeface="Consolas"/>
+                <a:cs typeface="Consolas"/>
+              </a:rPr>
+              <a:t>$arch</a:t>
+            </a:r>
+            <a:r>
+              <a:rPr sz="1875" b="0">
+                <a:solidFill>
+                  <a:srgbClr val="0070C0"/>
+                </a:solidFill>
+                <a:latin typeface="Consolas"/>
+                <a:ea typeface="Consolas"/>
+                <a:cs typeface="Consolas"/>
+              </a:rPr>
+              <a:t>/</a:t>
             </a:r>
           </a:p>
           <a:p xmlns:a="http://schemas.openxmlformats.org/drawingml/2006/main">
@@ -21958,13 +24721,46 @@
             <a:r>
               <a:rPr sz="1875" b="0">
                 <a:solidFill>
-                  <a:srgbClr val="005968"/>
+                  <a:srgbClr val="29263B"/>
                 </a:solidFill>
                 <a:latin typeface="Consolas"/>
                 <a:ea typeface="Consolas"/>
                 <a:cs typeface="Consolas"/>
               </a:rPr>
-              <a:t>Server = https://mirrors.tuna.tsinghua.edu.cn/msys2/msys/$arch/</a:t>
+              <a:t>Server = </a:t>
+            </a:r>
+            <a:r>
+              <a:rPr sz="1875" b="0">
+                <a:solidFill>
+                  <a:srgbClr val="0070C0"/>
+                </a:solidFill>
+                <a:latin typeface="Consolas"/>
+                <a:ea typeface="Consolas"/>
+                <a:cs typeface="Consolas"/>
+              </a:rPr>
+              <a:t>https://mirrors.tuna.tsinghua.edu.cn/msys2/msys/</a:t>
+            </a:r>
+            <a:r>
+              <a:rPr sz="1875" b="0">
+                <a:solidFill>
+                  <a:srgbClr val="B84E00"/>
+                </a:solidFill>
+                <a:latin typeface="Consolas"/>
+                <a:ea typeface="Consolas"/>
+                <a:cs typeface="Consolas"/>
+              </a:rPr>
+              <a:t>$arch</a:t>
+            </a:r>
+            <a:r>
+              <a:rPr sz="1875" b="0">
+                <a:solidFill>
+                  <a:srgbClr val="0070C0"/>
+                </a:solidFill>
+                <a:latin typeface="Consolas"/>
+                <a:ea typeface="Consolas"/>
+                <a:cs typeface="Consolas"/>
+              </a:rPr>
+              <a:t>/</a:t>
             </a:r>
           </a:p>
           <a:p xmlns:a="http://schemas.openxmlformats.org/drawingml/2006/main">
@@ -21984,7 +24780,7 @@
             <a:r>
               <a:rPr sz="1875" b="0">
                 <a:solidFill>
-                  <a:srgbClr val="005968"/>
+                  <a:srgbClr val="29263B"/>
                 </a:solidFill>
                 <a:latin typeface="Consolas"/>
                 <a:ea typeface="Consolas"/>
@@ -22055,13 +24851,68 @@
             <a:r>
               <a:rPr sz="1875" b="0">
                 <a:solidFill>
+                  <a:srgbClr val="A02B93"/>
+                </a:solidFill>
+                <a:latin typeface="Microsoft YaHei"/>
+                <a:ea typeface="Microsoft YaHei"/>
+                <a:cs typeface="Microsoft YaHei"/>
+              </a:rPr>
+              <a:t>cat</a:t>
+            </a:r>
+            <a:r>
+              <a:rPr sz="1875" b="0">
+                <a:solidFill>
                   <a:srgbClr val="29263B"/>
                 </a:solidFill>
                 <a:latin typeface="Microsoft YaHei"/>
                 <a:ea typeface="Microsoft YaHei"/>
                 <a:cs typeface="Microsoft YaHei"/>
               </a:rPr>
-              <a:t>cat 写入原有配置；单引号 EOF 保留字面量 $arch，由 pacman 展开。</a:t>
+              <a:t> 写入原有配置；单引号 EOF 保留字面量 </a:t>
+            </a:r>
+            <a:r>
+              <a:rPr sz="1875" b="0">
+                <a:solidFill>
+                  <a:srgbClr val="B84E00"/>
+                </a:solidFill>
+                <a:latin typeface="Microsoft YaHei"/>
+                <a:ea typeface="Microsoft YaHei"/>
+                <a:cs typeface="Microsoft YaHei"/>
+              </a:rPr>
+              <a:t>$arch</a:t>
+            </a:r>
+            <a:r>
+              <a:rPr sz="1875" b="0">
+                <a:solidFill>
+                  <a:srgbClr val="29263B"/>
+                </a:solidFill>
+                <a:latin typeface="Microsoft YaHei"/>
+                <a:ea typeface="Microsoft YaHei"/>
+                <a:cs typeface="Microsoft YaHei"/>
+              </a:rPr>
+              <a:t>，由 </a:t>
+            </a:r>
+            <a:r>
+              <a:rPr sz="1875" b="0">
+                <a:solidFill>
+                  <a:srgbClr val="A02B93"/>
+                </a:solidFill>
+                <a:latin typeface="Microsoft YaHei"/>
+                <a:ea typeface="Microsoft YaHei"/>
+                <a:cs typeface="Microsoft YaHei"/>
+              </a:rPr>
+              <a:t>pacman</a:t>
+            </a:r>
+            <a:r>
+              <a:rPr sz="1875" b="0">
+                <a:solidFill>
+                  <a:srgbClr val="29263B"/>
+                </a:solidFill>
+                <a:latin typeface="Microsoft YaHei"/>
+                <a:ea typeface="Microsoft YaHei"/>
+                <a:cs typeface="Microsoft YaHei"/>
+              </a:rPr>
+              <a:t> 展开。</a:t>
             </a:r>
           </a:p>
         </p:txBody>
@@ -22428,7 +25279,7 @@
             <a:r>
               <a:rPr sz="1875" b="0">
                 <a:solidFill>
-                  <a:srgbClr val="005968"/>
+                  <a:srgbClr val="646173"/>
                 </a:solidFill>
                 <a:latin typeface="Consolas"/>
                 <a:ea typeface="Consolas"/>
@@ -22454,13 +25305,46 @@
             <a:r>
               <a:rPr sz="1875" b="0">
                 <a:solidFill>
-                  <a:srgbClr val="005968"/>
+                  <a:srgbClr val="A02B93"/>
                 </a:solidFill>
                 <a:latin typeface="Consolas"/>
                 <a:ea typeface="Consolas"/>
                 <a:cs typeface="Consolas"/>
               </a:rPr>
-              <a:t>cat &gt; /etc/pacman.d/mirrorlist.mingw &lt;&lt;'EOF'</a:t>
+              <a:t>cat</a:t>
+            </a:r>
+            <a:r>
+              <a:rPr sz="1875" b="0">
+                <a:solidFill>
+                  <a:srgbClr val="29263B"/>
+                </a:solidFill>
+                <a:latin typeface="Consolas"/>
+                <a:ea typeface="Consolas"/>
+                <a:cs typeface="Consolas"/>
+              </a:rPr>
+              <a:t> &gt; </a:t>
+            </a:r>
+            <a:r>
+              <a:rPr sz="1875" b="0">
+                <a:solidFill>
+                  <a:srgbClr val="0070C0"/>
+                </a:solidFill>
+                <a:latin typeface="Consolas"/>
+                <a:ea typeface="Consolas"/>
+                <a:cs typeface="Consolas"/>
+              </a:rPr>
+              <a:t>/etc/pacman.d/mirrorlist.mingw</a:t>
+            </a:r>
+            <a:r>
+              <a:rPr sz="1875" b="0">
+                <a:solidFill>
+                  <a:srgbClr val="29263B"/>
+                </a:solidFill>
+                <a:latin typeface="Consolas"/>
+                <a:ea typeface="Consolas"/>
+                <a:cs typeface="Consolas"/>
+              </a:rPr>
+              <a:t> &lt;&lt;'EOF'</a:t>
             </a:r>
           </a:p>
           <a:p xmlns:a="http://schemas.openxmlformats.org/drawingml/2006/main">
@@ -22480,13 +25364,46 @@
             <a:r>
               <a:rPr sz="1875" b="0">
                 <a:solidFill>
-                  <a:srgbClr val="005968"/>
+                  <a:srgbClr val="29263B"/>
                 </a:solidFill>
                 <a:latin typeface="Consolas"/>
                 <a:ea typeface="Consolas"/>
                 <a:cs typeface="Consolas"/>
               </a:rPr>
-              <a:t>Server = https://mirrors.ustc.edu.cn/msys2/mingw/$repo/</a:t>
+              <a:t>Server = </a:t>
+            </a:r>
+            <a:r>
+              <a:rPr sz="1875" b="0">
+                <a:solidFill>
+                  <a:srgbClr val="0070C0"/>
+                </a:solidFill>
+                <a:latin typeface="Consolas"/>
+                <a:ea typeface="Consolas"/>
+                <a:cs typeface="Consolas"/>
+              </a:rPr>
+              <a:t>https://mirrors.ustc.edu.cn/msys2/mingw/</a:t>
+            </a:r>
+            <a:r>
+              <a:rPr sz="1875" b="0">
+                <a:solidFill>
+                  <a:srgbClr val="B84E00"/>
+                </a:solidFill>
+                <a:latin typeface="Consolas"/>
+                <a:ea typeface="Consolas"/>
+                <a:cs typeface="Consolas"/>
+              </a:rPr>
+              <a:t>$repo</a:t>
+            </a:r>
+            <a:r>
+              <a:rPr sz="1875" b="0">
+                <a:solidFill>
+                  <a:srgbClr val="0070C0"/>
+                </a:solidFill>
+                <a:latin typeface="Consolas"/>
+                <a:ea typeface="Consolas"/>
+                <a:cs typeface="Consolas"/>
+              </a:rPr>
+              <a:t>/</a:t>
             </a:r>
           </a:p>
           <a:p xmlns:a="http://schemas.openxmlformats.org/drawingml/2006/main">
@@ -22506,13 +25423,46 @@
             <a:r>
               <a:rPr sz="1875" b="0">
                 <a:solidFill>
-                  <a:srgbClr val="005968"/>
+                  <a:srgbClr val="29263B"/>
                 </a:solidFill>
                 <a:latin typeface="Consolas"/>
                 <a:ea typeface="Consolas"/>
                 <a:cs typeface="Consolas"/>
               </a:rPr>
-              <a:t>Server = https://mirrors.tuna.tsinghua.edu.cn/msys2/mingw/$repo/</a:t>
+              <a:t>Server = </a:t>
+            </a:r>
+            <a:r>
+              <a:rPr sz="1875" b="0">
+                <a:solidFill>
+                  <a:srgbClr val="0070C0"/>
+                </a:solidFill>
+                <a:latin typeface="Consolas"/>
+                <a:ea typeface="Consolas"/>
+                <a:cs typeface="Consolas"/>
+              </a:rPr>
+              <a:t>https://mirrors.tuna.tsinghua.edu.cn/msys2/mingw/</a:t>
+            </a:r>
+            <a:r>
+              <a:rPr sz="1875" b="0">
+                <a:solidFill>
+                  <a:srgbClr val="B84E00"/>
+                </a:solidFill>
+                <a:latin typeface="Consolas"/>
+                <a:ea typeface="Consolas"/>
+                <a:cs typeface="Consolas"/>
+              </a:rPr>
+              <a:t>$repo</a:t>
+            </a:r>
+            <a:r>
+              <a:rPr sz="1875" b="0">
+                <a:solidFill>
+                  <a:srgbClr val="0070C0"/>
+                </a:solidFill>
+                <a:latin typeface="Consolas"/>
+                <a:ea typeface="Consolas"/>
+                <a:cs typeface="Consolas"/>
+              </a:rPr>
+              <a:t>/</a:t>
             </a:r>
           </a:p>
           <a:p xmlns:a="http://schemas.openxmlformats.org/drawingml/2006/main">
@@ -22532,7 +25482,7 @@
             <a:r>
               <a:rPr sz="1875" b="0">
                 <a:solidFill>
-                  <a:srgbClr val="005968"/>
+                  <a:srgbClr val="29263B"/>
                 </a:solidFill>
                 <a:latin typeface="Consolas"/>
                 <a:ea typeface="Consolas"/>
@@ -22609,7 +25559,29 @@
                 <a:ea typeface="Microsoft YaHei"/>
                 <a:cs typeface="Microsoft YaHei"/>
               </a:rPr>
-              <a:t>这里必须是 $repo；ucrt64、clangarm64 等仓库共享这份配置。</a:t>
+              <a:t>这里必须是 </a:t>
+            </a:r>
+            <a:r>
+              <a:rPr sz="1875" b="0">
+                <a:solidFill>
+                  <a:srgbClr val="B84E00"/>
+                </a:solidFill>
+                <a:latin typeface="Microsoft YaHei"/>
+                <a:ea typeface="Microsoft YaHei"/>
+                <a:cs typeface="Microsoft YaHei"/>
+              </a:rPr>
+              <a:t>$repo</a:t>
+            </a:r>
+            <a:r>
+              <a:rPr sz="1875" b="0">
+                <a:solidFill>
+                  <a:srgbClr val="29263B"/>
+                </a:solidFill>
+                <a:latin typeface="Microsoft YaHei"/>
+                <a:ea typeface="Microsoft YaHei"/>
+                <a:cs typeface="Microsoft YaHei"/>
+              </a:rPr>
+              <a:t>；ucrt64、clangarm64 等仓库共享这份配置。</a:t>
             </a:r>
           </a:p>
         </p:txBody>
@@ -22976,7 +25948,7 @@
             <a:r>
               <a:rPr sz="1875" b="0">
                 <a:solidFill>
-                  <a:srgbClr val="005968"/>
+                  <a:srgbClr val="646173"/>
                 </a:solidFill>
                 <a:latin typeface="Consolas"/>
                 <a:ea typeface="Consolas"/>
@@ -23002,13 +25974,46 @@
             <a:r>
               <a:rPr sz="1875" b="0">
                 <a:solidFill>
-                  <a:srgbClr val="005968"/>
+                  <a:srgbClr val="A02B93"/>
                 </a:solidFill>
                 <a:latin typeface="Consolas"/>
                 <a:ea typeface="Consolas"/>
                 <a:cs typeface="Consolas"/>
               </a:rPr>
-              <a:t>pacman-conf --repo msys Server</a:t>
+              <a:t>pacman-conf</a:t>
+            </a:r>
+            <a:r>
+              <a:rPr sz="1875" b="0">
+                <a:solidFill>
+                  <a:srgbClr val="29263B"/>
+                </a:solidFill>
+                <a:latin typeface="Consolas"/>
+                <a:ea typeface="Consolas"/>
+                <a:cs typeface="Consolas"/>
+              </a:rPr>
+              <a:t> </a:t>
+            </a:r>
+            <a:r>
+              <a:rPr sz="1875" b="0">
+                <a:solidFill>
+                  <a:srgbClr val="B84E00"/>
+                </a:solidFill>
+                <a:latin typeface="Consolas"/>
+                <a:ea typeface="Consolas"/>
+                <a:cs typeface="Consolas"/>
+              </a:rPr>
+              <a:t>--repo</a:t>
+            </a:r>
+            <a:r>
+              <a:rPr sz="1875" b="0">
+                <a:solidFill>
+                  <a:srgbClr val="29263B"/>
+                </a:solidFill>
+                <a:latin typeface="Consolas"/>
+                <a:ea typeface="Consolas"/>
+                <a:cs typeface="Consolas"/>
+              </a:rPr>
+              <a:t> msys Server</a:t>
             </a:r>
           </a:p>
           <a:p xmlns:a="http://schemas.openxmlformats.org/drawingml/2006/main">
@@ -23028,13 +26033,46 @@
             <a:r>
               <a:rPr sz="1875" b="0">
                 <a:solidFill>
-                  <a:srgbClr val="005968"/>
+                  <a:srgbClr val="A02B93"/>
                 </a:solidFill>
                 <a:latin typeface="Consolas"/>
                 <a:ea typeface="Consolas"/>
                 <a:cs typeface="Consolas"/>
               </a:rPr>
-              <a:t>pacman-conf --repo ucrt64 Server</a:t>
+              <a:t>pacman-conf</a:t>
+            </a:r>
+            <a:r>
+              <a:rPr sz="1875" b="0">
+                <a:solidFill>
+                  <a:srgbClr val="29263B"/>
+                </a:solidFill>
+                <a:latin typeface="Consolas"/>
+                <a:ea typeface="Consolas"/>
+                <a:cs typeface="Consolas"/>
+              </a:rPr>
+              <a:t> </a:t>
+            </a:r>
+            <a:r>
+              <a:rPr sz="1875" b="0">
+                <a:solidFill>
+                  <a:srgbClr val="B84E00"/>
+                </a:solidFill>
+                <a:latin typeface="Consolas"/>
+                <a:ea typeface="Consolas"/>
+                <a:cs typeface="Consolas"/>
+              </a:rPr>
+              <a:t>--repo</a:t>
+            </a:r>
+            <a:r>
+              <a:rPr sz="1875" b="0">
+                <a:solidFill>
+                  <a:srgbClr val="29263B"/>
+                </a:solidFill>
+                <a:latin typeface="Consolas"/>
+                <a:ea typeface="Consolas"/>
+                <a:cs typeface="Consolas"/>
+              </a:rPr>
+              <a:t> ucrt64 Server</a:t>
             </a:r>
           </a:p>
           <a:p xmlns:a="http://schemas.openxmlformats.org/drawingml/2006/main">
@@ -23054,13 +26092,46 @@
             <a:r>
               <a:rPr sz="1875" b="0">
                 <a:solidFill>
-                  <a:srgbClr val="005968"/>
+                  <a:srgbClr val="A02B93"/>
                 </a:solidFill>
                 <a:latin typeface="Consolas"/>
                 <a:ea typeface="Consolas"/>
                 <a:cs typeface="Consolas"/>
               </a:rPr>
-              <a:t>pacman-conf --repo clangarm64 Server</a:t>
+              <a:t>pacman-conf</a:t>
+            </a:r>
+            <a:r>
+              <a:rPr sz="1875" b="0">
+                <a:solidFill>
+                  <a:srgbClr val="29263B"/>
+                </a:solidFill>
+                <a:latin typeface="Consolas"/>
+                <a:ea typeface="Consolas"/>
+                <a:cs typeface="Consolas"/>
+              </a:rPr>
+              <a:t> </a:t>
+            </a:r>
+            <a:r>
+              <a:rPr sz="1875" b="0">
+                <a:solidFill>
+                  <a:srgbClr val="B84E00"/>
+                </a:solidFill>
+                <a:latin typeface="Consolas"/>
+                <a:ea typeface="Consolas"/>
+                <a:cs typeface="Consolas"/>
+              </a:rPr>
+              <a:t>--repo</a:t>
+            </a:r>
+            <a:r>
+              <a:rPr sz="1875" b="0">
+                <a:solidFill>
+                  <a:srgbClr val="29263B"/>
+                </a:solidFill>
+                <a:latin typeface="Consolas"/>
+                <a:ea typeface="Consolas"/>
+                <a:cs typeface="Consolas"/>
+              </a:rPr>
+              <a:t> clangarm64 Server</a:t>
             </a:r>
           </a:p>
         </p:txBody>
@@ -23131,7 +26202,51 @@
                 <a:ea typeface="Microsoft YaHei"/>
                 <a:cs typeface="Microsoft YaHei"/>
               </a:rPr>
-              <a:t>查看 msys/x86_64 与 mingw/ucrt64；不是查看开发板 CPU 的架构。</a:t>
+              <a:t>查看 </a:t>
+            </a:r>
+            <a:r>
+              <a:rPr sz="1875" b="0">
+                <a:solidFill>
+                  <a:srgbClr val="0070C0"/>
+                </a:solidFill>
+                <a:latin typeface="Microsoft YaHei"/>
+                <a:ea typeface="Microsoft YaHei"/>
+                <a:cs typeface="Microsoft YaHei"/>
+              </a:rPr>
+              <a:t>msys/x86_64</a:t>
+            </a:r>
+            <a:r>
+              <a:rPr sz="1875" b="0">
+                <a:solidFill>
+                  <a:srgbClr val="29263B"/>
+                </a:solidFill>
+                <a:latin typeface="Microsoft YaHei"/>
+                <a:ea typeface="Microsoft YaHei"/>
+                <a:cs typeface="Microsoft YaHei"/>
+              </a:rPr>
+              <a:t> 与 </a:t>
+            </a:r>
+            <a:r>
+              <a:rPr sz="1875" b="0">
+                <a:solidFill>
+                  <a:srgbClr val="0070C0"/>
+                </a:solidFill>
+                <a:latin typeface="Microsoft YaHei"/>
+                <a:ea typeface="Microsoft YaHei"/>
+                <a:cs typeface="Microsoft YaHei"/>
+              </a:rPr>
+              <a:t>mingw/ucrt64</a:t>
+            </a:r>
+            <a:r>
+              <a:rPr sz="1875" b="0">
+                <a:solidFill>
+                  <a:srgbClr val="29263B"/>
+                </a:solidFill>
+                <a:latin typeface="Microsoft YaHei"/>
+                <a:ea typeface="Microsoft YaHei"/>
+                <a:cs typeface="Microsoft YaHei"/>
+              </a:rPr>
+              <a:t>；不是查看开发板 CPU 的架构。</a:t>
             </a:r>
           </a:p>
         </p:txBody>
@@ -23498,7 +26613,7 @@
             <a:r>
               <a:rPr sz="1875" b="0">
                 <a:solidFill>
-                  <a:srgbClr val="005968"/>
+                  <a:srgbClr val="646173"/>
                 </a:solidFill>
                 <a:latin typeface="Consolas"/>
                 <a:ea typeface="Consolas"/>
@@ -23524,13 +26639,35 @@
             <a:r>
               <a:rPr sz="1875" b="0">
                 <a:solidFill>
-                  <a:srgbClr val="005968"/>
+                  <a:srgbClr val="A02B93"/>
                 </a:solidFill>
                 <a:latin typeface="Consolas"/>
                 <a:ea typeface="Consolas"/>
                 <a:cs typeface="Consolas"/>
               </a:rPr>
-              <a:t>pacman -Syyu</a:t>
+              <a:t>pacman</a:t>
+            </a:r>
+            <a:r>
+              <a:rPr sz="1875" b="0">
+                <a:solidFill>
+                  <a:srgbClr val="29263B"/>
+                </a:solidFill>
+                <a:latin typeface="Consolas"/>
+                <a:ea typeface="Consolas"/>
+                <a:cs typeface="Consolas"/>
+              </a:rPr>
+              <a:t> </a:t>
+            </a:r>
+            <a:r>
+              <a:rPr sz="1875" b="0">
+                <a:solidFill>
+                  <a:srgbClr val="B84E00"/>
+                </a:solidFill>
+                <a:latin typeface="Consolas"/>
+                <a:ea typeface="Consolas"/>
+                <a:cs typeface="Consolas"/>
+              </a:rPr>
+              <a:t>-Syyu</a:t>
             </a:r>
           </a:p>
         </p:txBody>
@@ -23968,7 +27105,7 @@
             <a:r>
               <a:rPr sz="1875" b="0">
                 <a:solidFill>
-                  <a:srgbClr val="005968"/>
+                  <a:srgbClr val="646173"/>
                 </a:solidFill>
                 <a:latin typeface="Consolas"/>
                 <a:ea typeface="Consolas"/>
@@ -23994,13 +27131,35 @@
             <a:r>
               <a:rPr sz="1875" b="0">
                 <a:solidFill>
-                  <a:srgbClr val="005968"/>
+                  <a:srgbClr val="A02B93"/>
                 </a:solidFill>
                 <a:latin typeface="Consolas"/>
                 <a:ea typeface="Consolas"/>
                 <a:cs typeface="Consolas"/>
               </a:rPr>
-              <a:t>pacman -Syu</a:t>
+              <a:t>pacman</a:t>
+            </a:r>
+            <a:r>
+              <a:rPr sz="1875" b="0">
+                <a:solidFill>
+                  <a:srgbClr val="29263B"/>
+                </a:solidFill>
+                <a:latin typeface="Consolas"/>
+                <a:ea typeface="Consolas"/>
+                <a:cs typeface="Consolas"/>
+              </a:rPr>
+              <a:t> </a:t>
+            </a:r>
+            <a:r>
+              <a:rPr sz="1875" b="0">
+                <a:solidFill>
+                  <a:srgbClr val="B84E00"/>
+                </a:solidFill>
+                <a:latin typeface="Consolas"/>
+                <a:ea typeface="Consolas"/>
+                <a:cs typeface="Consolas"/>
+              </a:rPr>
+              <a:t>-Syu</a:t>
             </a:r>
           </a:p>
         </p:txBody>
@@ -25684,34 +28843,45 @@
                 <a:ea typeface="Consolas" panose="020B0609020204030204"/>
                 <a:cs typeface="Consolas" panose="020B0609020204030204"/>
               </a:rPr>
-              <a:t> 通用工具：msys</a:t>
+              <a:t> 通用工具：</a:t>
             </a:r>
             <a:r>
               <a:rPr sz="2100" b="1">
                 <a:solidFill>
-                  <a:srgbClr val="006C78"/>
+                  <a:srgbClr val="0070C0"/>
                 </a:solidFill>
                 <a:latin typeface="Consolas" panose="020B0609020204030204"/>
                 <a:ea typeface="Consolas" panose="020B0609020204030204"/>
                 <a:cs typeface="Consolas" panose="020B0609020204030204"/>
               </a:rPr>
-              <a:t>/</a:t>
+              <a:t>msys</a:t>
             </a:r>
             <a:r>
               <a:rPr sz="2100" b="1">
                 <a:solidFill>
-                  <a:srgbClr val="A54800"/>
+                  <a:srgbClr val="0070C0"/>
                 </a:solidFill>
                 <a:latin typeface="Consolas" panose="020B0609020204030204"/>
                 <a:ea typeface="Consolas" panose="020B0609020204030204"/>
                 <a:cs typeface="Consolas" panose="020B0609020204030204"/>
               </a:rPr>
+              <a:t>/</a:t>
+            </a:r>
+            <a:r>
+              <a:rPr sz="2100" b="1">
+                <a:solidFill>
+                  <a:srgbClr val="B84E00"/>
+                </a:solidFill>
+                <a:latin typeface="Consolas" panose="020B0609020204030204"/>
+                <a:ea typeface="Consolas" panose="020B0609020204030204"/>
+                <a:cs typeface="Consolas" panose="020B0609020204030204"/>
+              </a:rPr>
               <a:t>$arch</a:t>
             </a:r>
             <a:r>
               <a:rPr sz="2100" b="1">
                 <a:solidFill>
-                  <a:srgbClr val="006C78"/>
+                  <a:srgbClr val="0070C0"/>
                 </a:solidFill>
                 <a:latin typeface="Consolas" panose="020B0609020204030204"/>
                 <a:ea typeface="Consolas" panose="020B0609020204030204"/>
@@ -25811,12 +28981,23 @@
                 <a:ea typeface="Consolas" panose="020B0609020204030204"/>
                 <a:cs typeface="Consolas" panose="020B0609020204030204"/>
               </a:rPr>
-              <a:t> x86_64，因此使用 msys</a:t>
+              <a:t> x86_64，因此使用 </a:t>
             </a:r>
             <a:r>
               <a:rPr sz="1950" b="0">
                 <a:solidFill>
-                  <a:srgbClr val="006C78"/>
+                  <a:srgbClr val="0070C0"/>
+                </a:solidFill>
+                <a:latin typeface="Consolas" panose="020B0609020204030204"/>
+                <a:ea typeface="Consolas" panose="020B0609020204030204"/>
+                <a:cs typeface="Consolas" panose="020B0609020204030204"/>
+              </a:rPr>
+              <a:t>msys</a:t>
+            </a:r>
+            <a:r>
+              <a:rPr sz="1950" b="0">
+                <a:solidFill>
+                  <a:srgbClr val="0070C0"/>
                 </a:solidFill>
                 <a:latin typeface="Consolas" panose="020B0609020204030204"/>
                 <a:ea typeface="Consolas" panose="020B0609020204030204"/>
@@ -25894,34 +29075,45 @@
                 <a:ea typeface="Consolas" panose="020B0609020204030204"/>
                 <a:cs typeface="Consolas" panose="020B0609020204030204"/>
               </a:rPr>
-              <a:t>原生工具仓库：mingw</a:t>
+              <a:t>原生工具仓库：</a:t>
             </a:r>
             <a:r>
               <a:rPr sz="2100" b="1">
                 <a:solidFill>
-                  <a:srgbClr val="006C78"/>
+                  <a:srgbClr val="0070C0"/>
                 </a:solidFill>
                 <a:latin typeface="Consolas" panose="020B0609020204030204"/>
                 <a:ea typeface="Consolas" panose="020B0609020204030204"/>
                 <a:cs typeface="Consolas" panose="020B0609020204030204"/>
               </a:rPr>
-              <a:t>/</a:t>
+              <a:t>mingw</a:t>
             </a:r>
             <a:r>
               <a:rPr sz="2100" b="1">
                 <a:solidFill>
-                  <a:srgbClr val="A54800"/>
+                  <a:srgbClr val="0070C0"/>
                 </a:solidFill>
                 <a:latin typeface="Consolas" panose="020B0609020204030204"/>
                 <a:ea typeface="Consolas" panose="020B0609020204030204"/>
                 <a:cs typeface="Consolas" panose="020B0609020204030204"/>
               </a:rPr>
+              <a:t>/</a:t>
+            </a:r>
+            <a:r>
+              <a:rPr sz="2100" b="1">
+                <a:solidFill>
+                  <a:srgbClr val="B84E00"/>
+                </a:solidFill>
+                <a:latin typeface="Consolas" panose="020B0609020204030204"/>
+                <a:ea typeface="Consolas" panose="020B0609020204030204"/>
+                <a:cs typeface="Consolas" panose="020B0609020204030204"/>
+              </a:rPr>
               <a:t>$repo</a:t>
             </a:r>
             <a:r>
               <a:rPr sz="2100" b="1">
                 <a:solidFill>
-                  <a:srgbClr val="006C78"/>
+                  <a:srgbClr val="0070C0"/>
                 </a:solidFill>
                 <a:latin typeface="Consolas" panose="020B0609020204030204"/>
                 <a:ea typeface="Consolas" panose="020B0609020204030204"/>
@@ -26032,12 +29224,23 @@
                 <a:ea typeface="Consolas" panose="020B0609020204030204"/>
                 <a:cs typeface="Consolas" panose="020B0609020204030204"/>
               </a:rPr>
-              <a:t>       使用 mingw</a:t>
+              <a:t>       使用 </a:t>
             </a:r>
             <a:r>
               <a:rPr sz="1950" b="0">
                 <a:solidFill>
-                  <a:srgbClr val="006C78"/>
+                  <a:srgbClr val="0070C0"/>
+                </a:solidFill>
+                <a:latin typeface="Consolas" panose="020B0609020204030204"/>
+                <a:ea typeface="Consolas" panose="020B0609020204030204"/>
+                <a:cs typeface="Consolas" panose="020B0609020204030204"/>
+              </a:rPr>
+              <a:t>mingw</a:t>
+            </a:r>
+            <a:r>
+              <a:rPr sz="1950" b="0">
+                <a:solidFill>
+                  <a:srgbClr val="0070C0"/>
                 </a:solidFill>
                 <a:latin typeface="Consolas" panose="020B0609020204030204"/>
                 <a:ea typeface="Consolas" panose="020B0609020204030204"/>
@@ -26109,12 +29312,23 @@
                 <a:ea typeface="Consolas" panose="020B0609020204030204"/>
                 <a:cs typeface="Consolas" panose="020B0609020204030204"/>
               </a:rPr>
-              <a:t>   使用 mingw</a:t>
+              <a:t>   使用 </a:t>
             </a:r>
             <a:r>
               <a:rPr sz="1950" b="0">
                 <a:solidFill>
-                  <a:srgbClr val="006C78"/>
+                  <a:srgbClr val="0070C0"/>
+                </a:solidFill>
+                <a:latin typeface="Consolas" panose="020B0609020204030204"/>
+                <a:ea typeface="Consolas" panose="020B0609020204030204"/>
+                <a:cs typeface="Consolas" panose="020B0609020204030204"/>
+              </a:rPr>
+              <a:t>mingw</a:t>
+            </a:r>
+            <a:r>
+              <a:rPr sz="1950" b="0">
+                <a:solidFill>
+                  <a:srgbClr val="0070C0"/>
                 </a:solidFill>
                 <a:latin typeface="Consolas" panose="020B0609020204030204"/>
                 <a:ea typeface="Consolas" panose="020B0609020204030204"/>
@@ -28641,13 +31855,35 @@
                       <a:r>
                         <a:rPr sz="1875" b="0">
                           <a:solidFill>
+                            <a:srgbClr val="A02B93"/>
+                          </a:solidFill>
+                          <a:latin typeface="Noto Sans SC" panose="020B0200000000000000" charset="-122"/>
+                          <a:ea typeface="Noto Sans SC" panose="020B0200000000000000" charset="-122"/>
+                          <a:cs typeface="Noto Sans SC" panose="020B0200000000000000" charset="-122"/>
+                        </a:rPr>
+                        <a:t>cmake</a:t>
+                      </a:r>
+                      <a:r>
+                        <a:rPr sz="1875" b="0">
+                          <a:solidFill>
                             <a:srgbClr val="252035"/>
                           </a:solidFill>
                           <a:latin typeface="Noto Sans SC" panose="020B0200000000000000" charset="-122"/>
                           <a:ea typeface="Noto Sans SC" panose="020B0200000000000000" charset="-122"/>
                           <a:cs typeface="Noto Sans SC" panose="020B0200000000000000" charset="-122"/>
                         </a:rPr>
-                        <a:t>cmake --version</a:t>
+                        <a:t> </a:t>
+                      </a:r>
+                      <a:r>
+                        <a:rPr sz="1875" b="0">
+                          <a:solidFill>
+                            <a:srgbClr val="B84E00"/>
+                          </a:solidFill>
+                          <a:latin typeface="Noto Sans SC" panose="020B0200000000000000" charset="-122"/>
+                          <a:ea typeface="Noto Sans SC" panose="020B0200000000000000" charset="-122"/>
+                          <a:cs typeface="Noto Sans SC" panose="020B0200000000000000" charset="-122"/>
+                        </a:rPr>
+                        <a:t>--version</a:t>
                       </a:r>
                     </a:p>
                   </a:txBody>
@@ -28735,13 +31971,35 @@
                       <a:r>
                         <a:rPr sz="1875" b="0">
                           <a:solidFill>
+                            <a:srgbClr val="A02B93"/>
+                          </a:solidFill>
+                          <a:latin typeface="Noto Sans SC" panose="020B0200000000000000" charset="-122"/>
+                          <a:ea typeface="Noto Sans SC" panose="020B0200000000000000" charset="-122"/>
+                          <a:cs typeface="Noto Sans SC" panose="020B0200000000000000" charset="-122"/>
+                        </a:rPr>
+                        <a:t>ninja</a:t>
+                      </a:r>
+                      <a:r>
+                        <a:rPr sz="1875" b="0">
+                          <a:solidFill>
                             <a:srgbClr val="252035"/>
                           </a:solidFill>
                           <a:latin typeface="Noto Sans SC" panose="020B0200000000000000" charset="-122"/>
                           <a:ea typeface="Noto Sans SC" panose="020B0200000000000000" charset="-122"/>
                           <a:cs typeface="Noto Sans SC" panose="020B0200000000000000" charset="-122"/>
                         </a:rPr>
-                        <a:t>ninja --version</a:t>
+                        <a:t> </a:t>
+                      </a:r>
+                      <a:r>
+                        <a:rPr sz="1875" b="0">
+                          <a:solidFill>
+                            <a:srgbClr val="B84E00"/>
+                          </a:solidFill>
+                          <a:latin typeface="Noto Sans SC" panose="020B0200000000000000" charset="-122"/>
+                          <a:ea typeface="Noto Sans SC" panose="020B0200000000000000" charset="-122"/>
+                          <a:cs typeface="Noto Sans SC" panose="020B0200000000000000" charset="-122"/>
+                        </a:rPr>
+                        <a:t>--version</a:t>
                       </a:r>
                     </a:p>
                   </a:txBody>
@@ -28771,7 +32029,7 @@
                       <a:r>
                         <a:rPr sz="1875" b="0">
                           <a:solidFill>
-                            <a:srgbClr val="252035"/>
+                            <a:srgbClr val="A02B93"/>
                           </a:solidFill>
                           <a:latin typeface="Noto Sans SC" panose="020B0200000000000000" charset="-122"/>
                           <a:ea typeface="Noto Sans SC" panose="020B0200000000000000" charset="-122"/>
@@ -28829,13 +32087,35 @@
                       <a:r>
                         <a:rPr sz="1875" b="0">
                           <a:solidFill>
+                            <a:srgbClr val="A02B93"/>
+                          </a:solidFill>
+                          <a:latin typeface="Noto Sans SC" panose="020B0200000000000000" charset="-122"/>
+                          <a:ea typeface="Noto Sans SC" panose="020B0200000000000000" charset="-122"/>
+                          <a:cs typeface="Noto Sans SC" panose="020B0200000000000000" charset="-122"/>
+                        </a:rPr>
+                        <a:t>dtc</a:t>
+                      </a:r>
+                      <a:r>
+                        <a:rPr sz="1875" b="0">
+                          <a:solidFill>
                             <a:srgbClr val="252035"/>
                           </a:solidFill>
                           <a:latin typeface="Noto Sans SC" panose="020B0200000000000000" charset="-122"/>
                           <a:ea typeface="Noto Sans SC" panose="020B0200000000000000" charset="-122"/>
                           <a:cs typeface="Noto Sans SC" panose="020B0200000000000000" charset="-122"/>
                         </a:rPr>
-                        <a:t>dtc --version</a:t>
+                        <a:t> </a:t>
+                      </a:r>
+                      <a:r>
+                        <a:rPr sz="1875" b="0">
+                          <a:solidFill>
+                            <a:srgbClr val="B84E00"/>
+                          </a:solidFill>
+                          <a:latin typeface="Noto Sans SC" panose="020B0200000000000000" charset="-122"/>
+                          <a:ea typeface="Noto Sans SC" panose="020B0200000000000000" charset="-122"/>
+                          <a:cs typeface="Noto Sans SC" panose="020B0200000000000000" charset="-122"/>
+                        </a:rPr>
+                        <a:t>--version</a:t>
                       </a:r>
                     </a:p>
                   </a:txBody>
@@ -28865,7 +32145,7 @@
                       <a:r>
                         <a:rPr sz="1875" b="0">
                           <a:solidFill>
-                            <a:srgbClr val="252035"/>
+                            <a:srgbClr val="A02B93"/>
                           </a:solidFill>
                           <a:latin typeface="Noto Sans SC" panose="020B0200000000000000" charset="-122"/>
                           <a:ea typeface="Noto Sans SC" panose="020B0200000000000000" charset="-122"/>
@@ -28923,13 +32203,35 @@
                       <a:r>
                         <a:rPr sz="1875" b="0">
                           <a:solidFill>
+                            <a:srgbClr val="A02B93"/>
+                          </a:solidFill>
+                          <a:latin typeface="Noto Sans SC" panose="020B0200000000000000" charset="-122"/>
+                          <a:ea typeface="Noto Sans SC" panose="020B0200000000000000" charset="-122"/>
+                          <a:cs typeface="Noto Sans SC" panose="020B0200000000000000" charset="-122"/>
+                        </a:rPr>
+                        <a:t>gperf</a:t>
+                      </a:r>
+                      <a:r>
+                        <a:rPr sz="1875" b="0">
+                          <a:solidFill>
                             <a:srgbClr val="252035"/>
                           </a:solidFill>
                           <a:latin typeface="Noto Sans SC" panose="020B0200000000000000" charset="-122"/>
                           <a:ea typeface="Noto Sans SC" panose="020B0200000000000000" charset="-122"/>
                           <a:cs typeface="Noto Sans SC" panose="020B0200000000000000" charset="-122"/>
                         </a:rPr>
-                        <a:t>gperf --version</a:t>
+                        <a:t> </a:t>
+                      </a:r>
+                      <a:r>
+                        <a:rPr sz="1875" b="0">
+                          <a:solidFill>
+                            <a:srgbClr val="B84E00"/>
+                          </a:solidFill>
+                          <a:latin typeface="Noto Sans SC" panose="020B0200000000000000" charset="-122"/>
+                          <a:ea typeface="Noto Sans SC" panose="020B0200000000000000" charset="-122"/>
+                          <a:cs typeface="Noto Sans SC" panose="020B0200000000000000" charset="-122"/>
+                        </a:rPr>
+                        <a:t>--version</a:t>
                       </a:r>
                     </a:p>
                   </a:txBody>
@@ -29016,7 +32318,29 @@
                 <a:ea typeface="Consolas" panose="020B0609020204030204"/>
                 <a:cs typeface="Consolas" panose="020B0609020204030204"/>
               </a:rPr>
-              <a:t>官方安装来源：Windows 用 winget；详见 Windows P002—P005</a:t>
+              <a:t>官方安装来源：Windows 用 </a:t>
+            </a:r>
+            <a:r>
+              <a:rPr sz="1900" b="1">
+                <a:solidFill>
+                  <a:srgbClr val="A02B93"/>
+                </a:solidFill>
+                <a:latin typeface="Consolas" panose="020B0609020204030204"/>
+                <a:ea typeface="Consolas" panose="020B0609020204030204"/>
+                <a:cs typeface="Consolas" panose="020B0609020204030204"/>
+              </a:rPr>
+              <a:t>winget</a:t>
+            </a:r>
+            <a:r>
+              <a:rPr sz="1900" b="1">
+                <a:solidFill>
+                  <a:srgbClr val="24292F"/>
+                </a:solidFill>
+                <a:latin typeface="Consolas" panose="020B0609020204030204"/>
+                <a:ea typeface="Consolas" panose="020B0609020204030204"/>
+                <a:cs typeface="Consolas" panose="020B0609020204030204"/>
+              </a:rPr>
+              <a:t>；详见 Windows P002—P005</a:t>
             </a:r>
           </a:p>
         </p:txBody>
@@ -29465,7 +32789,18 @@
                 <a:ea typeface="Noto Sans SC" panose="020B0200000000000000" charset="-122"/>
                 <a:cs typeface="Noto Sans SC" panose="020B0200000000000000" charset="-122"/>
               </a:rPr>
-              <a:t>Windows 源码根：G:\zephyr_practice\zephyr-main</a:t>
+              <a:t>Windows 源码根：</a:t>
+            </a:r>
+            <a:r>
+              <a:rPr sz="1875" b="1">
+                <a:solidFill>
+                  <a:srgbClr val="0070C0"/>
+                </a:solidFill>
+                <a:latin typeface="Noto Sans SC" panose="020B0200000000000000" charset="-122"/>
+                <a:ea typeface="Noto Sans SC" panose="020B0200000000000000" charset="-122"/>
+                <a:cs typeface="Noto Sans SC" panose="020B0200000000000000" charset="-122"/>
+              </a:rPr>
+              <a:t>G:\zephyr_practice\zephyr-main</a:t>
             </a:r>
           </a:p>
         </p:txBody>
@@ -29524,7 +32859,40 @@
                 <a:ea typeface="Consolas" panose="020B0609020204030204"/>
                 <a:cs typeface="Consolas" panose="020B0609020204030204"/>
               </a:rPr>
-              <a:t>UCRT64：先 cd /g/zephyr_practice</a:t>
+              <a:t>UCRT64：先 </a:t>
+            </a:r>
+            <a:r>
+              <a:rPr sz="2025">
+                <a:solidFill>
+                  <a:srgbClr val="A02B93"/>
+                </a:solidFill>
+                <a:latin typeface="Consolas" panose="020B0609020204030204"/>
+                <a:ea typeface="Consolas" panose="020B0609020204030204"/>
+                <a:cs typeface="Consolas" panose="020B0609020204030204"/>
+              </a:rPr>
+              <a:t>cd</a:t>
+            </a:r>
+            <a:r>
+              <a:rPr sz="2025">
+                <a:solidFill>
+                  <a:srgbClr val="252035"/>
+                </a:solidFill>
+                <a:latin typeface="Consolas" panose="020B0609020204030204"/>
+                <a:ea typeface="Consolas" panose="020B0609020204030204"/>
+                <a:cs typeface="Consolas" panose="020B0609020204030204"/>
+              </a:rPr>
+              <a:t> </a:t>
+            </a:r>
+            <a:r>
+              <a:rPr sz="2025">
+                <a:solidFill>
+                  <a:srgbClr val="0070C0"/>
+                </a:solidFill>
+                <a:latin typeface="Consolas" panose="020B0609020204030204"/>
+                <a:ea typeface="Consolas" panose="020B0609020204030204"/>
+                <a:cs typeface="Consolas" panose="020B0609020204030204"/>
+              </a:rPr>
+              <a:t>/g/zephyr_practice</a:t>
             </a:r>
           </a:p>
           <a:p>
@@ -29547,7 +32915,7 @@
             <a:r>
               <a:rPr sz="2025">
                 <a:solidFill>
-                  <a:srgbClr val="005CC5"/>
+                  <a:srgbClr val="A02B93"/>
                 </a:solidFill>
                 <a:latin typeface="Consolas" panose="020B0609020204030204"/>
                 <a:ea typeface="Consolas" panose="020B0609020204030204"/>
@@ -29604,18 +32972,29 @@
                 <a:ea typeface="Consolas" panose="020B0609020204030204"/>
                 <a:cs typeface="Consolas" panose="020B0609020204030204"/>
               </a:rPr>
-              <a:t>  https://github.com/zephyrproject-rtos/zephyr.git zephyr-main</a:t>
+              <a:t>  </a:t>
             </a:r>
             <a:r>
               <a:rPr sz="2025">
                 <a:solidFill>
-                  <a:srgbClr val="006C78"/>
+                  <a:srgbClr val="0070C0"/>
                 </a:solidFill>
                 <a:latin typeface="Consolas" panose="020B0609020204030204"/>
                 <a:ea typeface="Consolas" panose="020B0609020204030204"/>
                 <a:cs typeface="Consolas" panose="020B0609020204030204"/>
               </a:rPr>
-              <a:t/>
+              <a:t>https://github.com/zephyrproject-rtos/zephyr.git</a:t>
+            </a:r>
+            <a:r>
+              <a:rPr sz="2025">
+                <a:solidFill>
+                  <a:srgbClr val="24292F"/>
+                </a:solidFill>
+                <a:latin typeface="Consolas" panose="020B0609020204030204"/>
+                <a:ea typeface="Consolas" panose="020B0609020204030204"/>
+                <a:cs typeface="Consolas" panose="020B0609020204030204"/>
+              </a:rPr>
+              <a:t> zephyr-main</a:t>
             </a:r>
           </a:p>
         </p:txBody>
@@ -30561,7 +33940,7 @@
             <a:r>
               <a:rPr sz="2100" b="0">
                 <a:solidFill>
-                  <a:srgbClr val="252035"/>
+                  <a:srgbClr val="0070C0"/>
                 </a:solidFill>
                 <a:latin typeface="Noto Sans SC" panose="020B0200000000000000" charset="-122"/>
                 <a:ea typeface="Noto Sans SC" panose="020B0200000000000000" charset="-122"/>
@@ -30594,7 +33973,29 @@
                 <a:ea typeface="Noto Sans SC" panose="020B0200000000000000" charset="-122"/>
                 <a:cs typeface="Noto Sans SC" panose="020B0200000000000000" charset="-122"/>
               </a:rPr>
-              <a:t>根目录直接包含 VERSION、boards、samples</a:t>
+              <a:t>根目录直接包含 </a:t>
+            </a:r>
+            <a:r>
+              <a:rPr sz="2100" b="0">
+                <a:solidFill>
+                  <a:srgbClr val="0070C0"/>
+                </a:solidFill>
+                <a:latin typeface="Noto Sans SC" panose="020B0200000000000000" charset="-122"/>
+                <a:ea typeface="Noto Sans SC" panose="020B0200000000000000" charset="-122"/>
+                <a:cs typeface="Noto Sans SC" panose="020B0200000000000000" charset="-122"/>
+              </a:rPr>
+              <a:t>VERSION</a:t>
+            </a:r>
+            <a:r>
+              <a:rPr sz="2100" b="0">
+                <a:solidFill>
+                  <a:srgbClr val="252035"/>
+                </a:solidFill>
+                <a:latin typeface="Noto Sans SC" panose="020B0200000000000000" charset="-122"/>
+                <a:ea typeface="Noto Sans SC" panose="020B0200000000000000" charset="-122"/>
+                <a:cs typeface="Noto Sans SC" panose="020B0200000000000000" charset="-122"/>
+              </a:rPr>
+              <a:t>、boards、samples</a:t>
             </a:r>
           </a:p>
           <a:p>
@@ -31054,13 +34455,24 @@
                       <a:r>
                         <a:rPr sz="1875" b="0">
                           <a:solidFill>
+                            <a:srgbClr val="0070C0"/>
+                          </a:solidFill>
+                          <a:latin typeface="Noto Sans SC" panose="020B0200000000000000" charset="-122"/>
+                          <a:ea typeface="Noto Sans SC" panose="020B0200000000000000" charset="-122"/>
+                          <a:cs typeface="Noto Sans SC" panose="020B0200000000000000" charset="-122"/>
+                        </a:rPr>
+                        <a:t>.git</a:t>
+                      </a:r>
+                      <a:r>
+                        <a:rPr sz="1875" b="0">
+                          <a:solidFill>
                             <a:srgbClr val="252035"/>
                           </a:solidFill>
                           <a:latin typeface="Noto Sans SC" panose="020B0200000000000000" charset="-122"/>
                           <a:ea typeface="Noto Sans SC" panose="020B0200000000000000" charset="-122"/>
                           <a:cs typeface="Noto Sans SC" panose="020B0200000000000000" charset="-122"/>
                         </a:rPr>
-                        <a:t>.git/</a:t>
+                        <a:t>/</a:t>
                       </a:r>
                     </a:p>
                   </a:txBody>
@@ -31235,7 +34647,18 @@
                 <a:ea typeface="Noto Sans SC" panose="020B0200000000000000" charset="-122"/>
                 <a:cs typeface="Noto Sans SC" panose="020B0200000000000000" charset="-122"/>
               </a:rPr>
-              <a:t>操作前保留原 ZIP，确认目标目录没有已有的 .git</a:t>
+              <a:t>操作前保留原 ZIP，确认目标目录没有已有的 </a:t>
+            </a:r>
+            <a:r>
+              <a:rPr sz="2100" b="1">
+                <a:solidFill>
+                  <a:srgbClr val="0070C0"/>
+                </a:solidFill>
+                <a:latin typeface="Noto Sans SC" panose="020B0200000000000000" charset="-122"/>
+                <a:ea typeface="Noto Sans SC" panose="020B0200000000000000" charset="-122"/>
+                <a:cs typeface="Noto Sans SC" panose="020B0200000000000000" charset="-122"/>
+              </a:rPr>
+              <a:t>.git</a:t>
             </a:r>
           </a:p>
         </p:txBody>
@@ -34819,13 +38242,35 @@
                       <a:r>
                         <a:rPr sz="1875" b="0">
                           <a:solidFill>
+                            <a:srgbClr val="B84E00"/>
+                          </a:solidFill>
+                          <a:latin typeface="Noto Sans SC" panose="020B0200000000000000" charset="-122"/>
+                          <a:ea typeface="Noto Sans SC" panose="020B0200000000000000" charset="-122"/>
+                          <a:cs typeface="Noto Sans SC" panose="020B0200000000000000" charset="-122"/>
+                        </a:rPr>
+                        <a:t>--depth</a:t>
+                      </a:r>
+                      <a:r>
+                        <a:rPr sz="1875" b="0">
+                          <a:solidFill>
                             <a:srgbClr val="252035"/>
                           </a:solidFill>
                           <a:latin typeface="Noto Sans SC" panose="020B0200000000000000" charset="-122"/>
                           <a:ea typeface="Noto Sans SC" panose="020B0200000000000000" charset="-122"/>
                           <a:cs typeface="Noto Sans SC" panose="020B0200000000000000" charset="-122"/>
                         </a:rPr>
-                        <a:t>--depth / --unshallow</a:t>
+                        <a:t> / </a:t>
+                      </a:r>
+                      <a:r>
+                        <a:rPr sz="1875" b="0">
+                          <a:solidFill>
+                            <a:srgbClr val="B84E00"/>
+                          </a:solidFill>
+                          <a:latin typeface="Noto Sans SC" panose="020B0200000000000000" charset="-122"/>
+                          <a:ea typeface="Noto Sans SC" panose="020B0200000000000000" charset="-122"/>
+                          <a:cs typeface="Noto Sans SC" panose="020B0200000000000000" charset="-122"/>
+                        </a:rPr>
+                        <a:t>--unshallow</a:t>
                       </a:r>
                     </a:p>
                   </a:txBody>
@@ -34913,13 +38358,24 @@
                       <a:r>
                         <a:rPr sz="1875" b="0">
                           <a:solidFill>
+                            <a:srgbClr val="B84E00"/>
+                          </a:solidFill>
+                          <a:latin typeface="Noto Sans SC" panose="020B0200000000000000" charset="-122"/>
+                          <a:ea typeface="Noto Sans SC" panose="020B0200000000000000" charset="-122"/>
+                          <a:cs typeface="Noto Sans SC" panose="020B0200000000000000" charset="-122"/>
+                        </a:rPr>
+                        <a:t>--filter</a:t>
+                      </a:r>
+                      <a:r>
+                        <a:rPr sz="1875" b="0">
+                          <a:solidFill>
                             <a:srgbClr val="252035"/>
                           </a:solidFill>
                           <a:latin typeface="Noto Sans SC" panose="020B0200000000000000" charset="-122"/>
                           <a:ea typeface="Noto Sans SC" panose="020B0200000000000000" charset="-122"/>
                           <a:cs typeface="Noto Sans SC" panose="020B0200000000000000" charset="-122"/>
                         </a:rPr>
-                        <a:t>--filter=blob:none</a:t>
+                        <a:t>=blob:none</a:t>
                       </a:r>
                     </a:p>
                   </a:txBody>
@@ -35013,7 +38469,18 @@
                           <a:ea typeface="Noto Sans SC" panose="020B0200000000000000" charset="-122"/>
                           <a:cs typeface="Noto Sans SC" panose="020B0200000000000000" charset="-122"/>
                         </a:rPr>
-                        <a:t>fetch 范围 / --tags</a:t>
+                        <a:t>fetch 范围 / </a:t>
+                      </a:r>
+                      <a:r>
+                        <a:rPr sz="1875" b="0">
+                          <a:solidFill>
+                            <a:srgbClr val="B84E00"/>
+                          </a:solidFill>
+                          <a:latin typeface="Noto Sans SC" panose="020B0200000000000000" charset="-122"/>
+                          <a:ea typeface="Noto Sans SC" panose="020B0200000000000000" charset="-122"/>
+                          <a:cs typeface="Noto Sans SC" panose="020B0200000000000000" charset="-122"/>
+                        </a:rPr>
+                        <a:t>--tags</a:t>
                       </a:r>
                     </a:p>
                   </a:txBody>
@@ -37459,13 +40926,24 @@
             <a:r>
               <a:rPr sz="2025" b="0">
                 <a:solidFill>
-                  <a:srgbClr val="252035"/>
+                  <a:srgbClr val="B84E00"/>
                 </a:solidFill>
                 <a:latin typeface="Noto Sans SC" panose="020B0200000000000000" charset="-122"/>
                 <a:ea typeface="Noto Sans SC" panose="020B0200000000000000" charset="-122"/>
                 <a:cs typeface="Noto Sans SC" panose="020B0200000000000000" charset="-122"/>
               </a:rPr>
-              <a:t>MSYSTEM 为 UCRT64，工具版本命令可执行</a:t>
+              <a:t>MSYSTEM</a:t>
+            </a:r>
+            <a:r>
+              <a:rPr sz="2025" b="0">
+                <a:solidFill>
+                  <a:srgbClr val="252035"/>
+                </a:solidFill>
+                <a:latin typeface="Noto Sans SC" panose="020B0200000000000000" charset="-122"/>
+                <a:ea typeface="Noto Sans SC" panose="020B0200000000000000" charset="-122"/>
+                <a:cs typeface="Noto Sans SC" panose="020B0200000000000000" charset="-122"/>
+              </a:rPr>
+              <a:t> 为 UCRT64，工具版本命令可执行</a:t>
             </a:r>
           </a:p>
         </p:txBody>
@@ -37597,7 +41075,40 @@
                 <a:ea typeface="Noto Sans SC" panose="020B0200000000000000" charset="-122"/>
                 <a:cs typeface="Noto Sans SC" panose="020B0200000000000000" charset="-122"/>
               </a:rPr>
-              <a:t>UCRT64：/g/zephyr_practice/zephyr-main，检查 VERSION</a:t>
+              <a:t>UCRT64：</a:t>
+            </a:r>
+            <a:r>
+              <a:rPr sz="2025" b="0">
+                <a:solidFill>
+                  <a:srgbClr val="0070C0"/>
+                </a:solidFill>
+                <a:latin typeface="Noto Sans SC" panose="020B0200000000000000" charset="-122"/>
+                <a:ea typeface="Noto Sans SC" panose="020B0200000000000000" charset="-122"/>
+                <a:cs typeface="Noto Sans SC" panose="020B0200000000000000" charset="-122"/>
+              </a:rPr>
+              <a:t>/g/zephyr_practice/zephyr-main</a:t>
+            </a:r>
+            <a:r>
+              <a:rPr sz="2025" b="0">
+                <a:solidFill>
+                  <a:srgbClr val="252035"/>
+                </a:solidFill>
+                <a:latin typeface="Noto Sans SC" panose="020B0200000000000000" charset="-122"/>
+                <a:ea typeface="Noto Sans SC" panose="020B0200000000000000" charset="-122"/>
+                <a:cs typeface="Noto Sans SC" panose="020B0200000000000000" charset="-122"/>
+              </a:rPr>
+              <a:t>，检查 </a:t>
+            </a:r>
+            <a:r>
+              <a:rPr sz="2025" b="0">
+                <a:solidFill>
+                  <a:srgbClr val="0070C0"/>
+                </a:solidFill>
+                <a:latin typeface="Noto Sans SC" panose="020B0200000000000000" charset="-122"/>
+                <a:ea typeface="Noto Sans SC" panose="020B0200000000000000" charset="-122"/>
+                <a:cs typeface="Noto Sans SC" panose="020B0200000000000000" charset="-122"/>
+              </a:rPr>
+              <a:t>VERSION</a:t>
             </a:r>
           </a:p>
         </p:txBody>
@@ -37795,7 +41306,29 @@
                 <a:ea typeface="Noto Sans SC" panose="020B0200000000000000" charset="-122"/>
                 <a:cs typeface="Noto Sans SC" panose="020B0200000000000000" charset="-122"/>
               </a:rPr>
-              <a:t>下一步：Python 虚拟环境、west 配套模块与 Zephyr SDK</a:t>
+              <a:t>下一步：Python 虚拟环境、</a:t>
+            </a:r>
+            <a:r>
+              <a:rPr sz="2250" b="1">
+                <a:solidFill>
+                  <a:srgbClr val="A02B93"/>
+                </a:solidFill>
+                <a:latin typeface="Noto Sans SC" panose="020B0200000000000000" charset="-122"/>
+                <a:ea typeface="Noto Sans SC" panose="020B0200000000000000" charset="-122"/>
+                <a:cs typeface="Noto Sans SC" panose="020B0200000000000000" charset="-122"/>
+              </a:rPr>
+              <a:t>west</a:t>
+            </a:r>
+            <a:r>
+              <a:rPr sz="2250" b="1">
+                <a:solidFill>
+                  <a:srgbClr val="252035"/>
+                </a:solidFill>
+                <a:latin typeface="Noto Sans SC" panose="020B0200000000000000" charset="-122"/>
+                <a:ea typeface="Noto Sans SC" panose="020B0200000000000000" charset="-122"/>
+                <a:cs typeface="Noto Sans SC" panose="020B0200000000000000" charset="-122"/>
+              </a:rPr>
+              <a:t> 配套模块与 Zephyr SDK</a:t>
             </a:r>
           </a:p>
         </p:txBody>
@@ -39760,7 +43293,7 @@
             <a:r>
               <a:rPr sz="2250" b="0">
                 <a:solidFill>
-                  <a:srgbClr val="24292F"/>
+                  <a:srgbClr val="0070C0"/>
                 </a:solidFill>
                 <a:latin typeface="Consolas" panose="020B0609020204030204"/>
                 <a:ea typeface="Consolas" panose="020B0609020204030204"/>
@@ -39898,7 +43431,7 @@
             <a:r>
               <a:rPr sz="2250" b="0">
                 <a:solidFill>
-                  <a:srgbClr val="24292F"/>
+                  <a:srgbClr val="0070C0"/>
                 </a:solidFill>
                 <a:latin typeface="Consolas" panose="020B0609020204030204"/>
                 <a:ea typeface="Consolas" panose="020B0609020204030204"/>

--- a/learning/P01_zephyr_make_project/slides/P001_准备UCRT64环境与下载Zephyr_Windows.pptx
+++ b/learning/P01_zephyr_make_project/slides/P001_准备UCRT64环境与下载Zephyr_Windows.pptx
@@ -10,47 +10,50 @@
     <p:notesMasterId r:id="rId30"/>
   </p:notesMasterIdLst>
   <p:sldIdLst>
-    <p:sldId id="256" r:id="rIdBeginnerPage1"/>
-    <p:sldId id="257" r:id="rIdBeginnerPage2"/>
-    <p:sldId id="258" r:id="rIdBeginnerPage3"/>
-    <p:sldId id="259" r:id="rIdBeginnerPage4"/>
-    <p:sldId id="260" r:id="rIdBeginnerPage5"/>
-    <p:sldId id="261" r:id="rIdBeginnerPage6"/>
-    <p:sldId id="262" r:id="rIdBeginnerPage7"/>
-    <p:sldId id="263" r:id="rIdBeginnerPage8"/>
-    <p:sldId id="264" r:id="rIdBeginnerPage9"/>
-    <p:sldId id="265" r:id="rIdBeginnerPage10"/>
-    <p:sldId id="266" r:id="rIdBeginnerPage11"/>
-    <p:sldId id="267" r:id="rIdBeginnerPage12"/>
-    <p:sldId id="268" r:id="rIdBeginnerPage13"/>
-    <p:sldId id="269" r:id="rIdBeginnerPage14"/>
-    <p:sldId id="270" r:id="rIdBeginnerPage15"/>
-    <p:sldId id="271" r:id="rIdBeginnerPage16"/>
-    <p:sldId id="272" r:id="rIdBeginnerPage17"/>
-    <p:sldId id="273" r:id="rIdBeginnerPage18"/>
-    <p:sldId id="274" r:id="rIdBeginnerPage19"/>
-    <p:sldId id="275" r:id="rIdBeginnerPage20"/>
-    <p:sldId id="276" r:id="rIdBeginnerPage21"/>
-    <p:sldId id="277" r:id="rIdBeginnerPage22"/>
-    <p:sldId id="278" r:id="rIdBeginnerPage23"/>
-    <p:sldId id="279" r:id="rIdBeginnerPage24"/>
-    <p:sldId id="280" r:id="rIdBeginnerPage25"/>
-    <p:sldId id="281" r:id="rIdBeginnerPage26"/>
-    <p:sldId id="282" r:id="rIdBeginnerPage27"/>
-    <p:sldId id="283" r:id="rIdBeginnerPage28"/>
-    <p:sldId id="284" r:id="rIdBeginnerPage29"/>
-    <p:sldId id="285" r:id="rIdBeginnerPage30"/>
-    <p:sldId id="286" r:id="rIdBeginnerPage31"/>
-    <p:sldId id="287" r:id="rIdBeginnerPage32"/>
-    <p:sldId id="288" r:id="rIdBeginnerPage33"/>
-    <p:sldId id="289" r:id="rIdBeginnerPage34"/>
-    <p:sldId id="290" r:id="rIdBeginnerPage35"/>
-    <p:sldId id="291" r:id="rIdBeginnerPage36"/>
-    <p:sldId id="292" r:id="rIdBeginnerPage37"/>
-    <p:sldId id="293" r:id="rIdBeginnerPage38"/>
-    <p:sldId id="294" r:id="rIdBeginnerPage39"/>
-    <p:sldId id="295" r:id="rIdBeginnerPage40"/>
-    <p:sldId id="296" r:id="rIdBeginnerPage41"/>
+    <p:sldId id="801" r:id="rIdGuideOrder1"/>
+    <p:sldId id="802" r:id="rIdGuideOrder2"/>
+    <p:sldId id="803" r:id="rIdGuideOrder3"/>
+    <p:sldId id="804" r:id="rIdGuideOrder4"/>
+    <p:sldId id="805" r:id="rIdGuideOrder5"/>
+    <p:sldId id="806" r:id="rIdGuideOrder6"/>
+    <p:sldId id="807" r:id="rIdGuideOrder7"/>
+    <p:sldId id="808" r:id="rIdGuideOrder8"/>
+    <p:sldId id="809" r:id="rIdGuideOrder9"/>
+    <p:sldId id="810" r:id="rIdGuideOrder10"/>
+    <p:sldId id="811" r:id="rIdGuideOrder11"/>
+    <p:sldId id="812" r:id="rIdGuideOrder12"/>
+    <p:sldId id="813" r:id="rIdGuideOrder13"/>
+    <p:sldId id="814" r:id="rIdGuideOrder14"/>
+    <p:sldId id="815" r:id="rIdGuideOrder15"/>
+    <p:sldId id="816" r:id="rIdGuideOrder16"/>
+    <p:sldId id="817" r:id="rIdGuideOrder17"/>
+    <p:sldId id="818" r:id="rIdGuideOrder18"/>
+    <p:sldId id="819" r:id="rIdGuideOrder19"/>
+    <p:sldId id="844" r:id="rGitEnv2"/>
+    <p:sldId id="820" r:id="rIdGuideOrder20"/>
+    <p:sldId id="821" r:id="rIdGuideOrder21"/>
+    <p:sldId id="822" r:id="rIdGuideOrder22"/>
+    <p:sldId id="823" r:id="rIdGuideOrder23"/>
+    <p:sldId id="824" r:id="rIdGuideOrder24"/>
+    <p:sldId id="825" r:id="rIdGuideOrder25"/>
+    <p:sldId id="826" r:id="rIdGuideOrder26"/>
+    <p:sldId id="827" r:id="rIdGuideOrder27"/>
+    <p:sldId id="828" r:id="rIdGuideOrder28"/>
+    <p:sldId id="829" r:id="rIdGuideOrder29"/>
+    <p:sldId id="830" r:id="rIdGuideOrder30"/>
+    <p:sldId id="831" r:id="rIdGuideOrder31"/>
+    <p:sldId id="832" r:id="rIdGuideOrder32"/>
+    <p:sldId id="833" r:id="rIdGuideOrder33"/>
+    <p:sldId id="834" r:id="rIdGuideOrder34"/>
+    <p:sldId id="835" r:id="rIdGuideOrder35"/>
+    <p:sldId id="836" r:id="rIdGuideOrder36"/>
+    <p:sldId id="837" r:id="rIdGuideOrder37"/>
+    <p:sldId id="838" r:id="rIdGuideOrder38"/>
+    <p:sldId id="839" r:id="rIdGuideOrder39"/>
+    <p:sldId id="840" r:id="rIdGuideOrder40"/>
+    <p:sldId id="841" r:id="rIdGuideOrder41"/>
+    <p:sldId id="842" r:id="rIdGuideOrder42"/>
+    <p:sldId id="843" r:id="rIdGuideOrder43"/>
   </p:sldIdLst>
   <p:sldSz cx="12192000" cy="6858000"/>
   <p:notesSz cx="6858000" cy="9144000"/>
@@ -286,31 +289,61 @@
         <p:txBody>
           <a:bodyPr xmlns:a="http://schemas.openxmlformats.org/drawingml/2006/main"/>
           <a:lstStyle xmlns:a="http://schemas.openxmlformats.org/drawingml/2006/main"/>
-          <a:p xmlns:a="http://schemas.openxmlformats.org/drawingml/2006/main">
-            <a:r>
-              <a:t>对应正文：P001_Windows，1.3.1_安装_Git_与下载解压工具</a:t>
-            </a:r>
-          </a:p>
-          <a:p xmlns:a="http://schemas.openxmlformats.org/drawingml/2006/main">
-            <a:r>
-              <a:t># 当前位置：任意目录；终端：UCRT64。此前已完成系统更新。</a:t>
-            </a:r>
-          </a:p>
-          <a:p xmlns:a="http://schemas.openxmlformats.org/drawingml/2006/main">
-            <a:r>
-              <a:t>pacman -S --needed git curl wget unzip tar xz</a:t>
-            </a:r>
-          </a:p>
-          <a:p xmlns:a="http://schemas.openxmlformats.org/drawingml/2006/main">
-            <a:r>
-              <a:t>完整操作单元：../commands/P001_Windows/1.3.1-01.txt</a:t>
-            </a:r>
-          </a:p>
-          <a:p xmlns:a="http://schemas.openxmlformats.org/drawingml/2006/main">
-            <a:r>
-              <a:t>官方文件、教程自建文件与生成产物按本页说明区分。</a:t>
-            </a:r>
-          </a:p>
+          <ns0:p xmlns:ns0="http://schemas.openxmlformats.org/drawingml/2006/main">
+            <ns0:r>
+              <ns0:t>先准备 UCRT64 原生 Git 与下载工具</ns0:t>
+            </ns0:r>
+          </ns0:p>
+          <ns1:p xmlns:ns1="http://schemas.openxmlformats.org/drawingml/2006/main">
+            <ns1:r>
+              <ns1:t># Windows UCRT64；任意目录；先完成系统更新。</ns1:t>
+            </ns1:r>
+          </ns1:p>
+          <ns2:p xmlns:ns2="http://schemas.openxmlformats.org/drawingml/2006/main">
+            <ns2:r>
+              <ns2:t>pacman -S --needed curl wget unzip tar xz &amp;&amp;</ns2:t>
+            </ns2:r>
+          </ns2:p>
+          <ns3:p xmlns:ns3="http://schemas.openxmlformats.org/drawingml/2006/main">
+            <ns3:r>
+              <ns3:t>if ! test -x /ucrt64/bin/git.exe; then</ns3:t>
+            </ns3:r>
+          </ns3:p>
+          <ns4:p xmlns:ns4="http://schemas.openxmlformats.org/drawingml/2006/main">
+            <ns4:r>
+              <ns4:t>  pacman -S --needed mingw-w64-ucrt-x86_64-git</ns4:t>
+            </ns4:r>
+          </ns4:p>
+          <ns5:p xmlns:ns5="http://schemas.openxmlformats.org/drawingml/2006/main">
+            <ns5:r>
+              <ns5:t>fi</ns5:t>
+            </ns5:r>
+          </ns5:p>
+          <ns6:p xmlns:ns6="http://schemas.openxmlformats.org/drawingml/2006/main">
+            <ns6:r>
+              <ns6:t>Git 管源码与版本；curl / wget 下载，unzip / tar / xz 解压。</ns6:t>
+            </ns6:r>
+          </ns6:p>
+          <ns7:p xmlns:ns7="http://schemas.openxmlformats.org/drawingml/2006/main">
+            <ns7:r>
+              <ns7:t>原生 Git 已存在就跳过安装；这里不安装普通 git 包。</ns7:t>
+            </ns7:r>
+          </ns7:p>
+          <ns8:p xmlns:ns8="http://schemas.openxmlformats.org/drawingml/2006/main">
+            <ns8:r>
+              <ns8:t>数据库过旧时，返回 1.2.4 完成系统更新。</ns8:t>
+            </ns8:r>
+          </ns8:p>
+          <ns9:p xmlns:ns9="http://schemas.openxmlformats.org/drawingml/2006/main">
+            <ns9:r>
+              <ns9:t>不要单独 pacman -Sy 后继续混装软件。</ns9:t>
+            </ns9:r>
+          </ns9:p>
+          <ns10:p xmlns:ns10="http://schemas.openxmlformats.org/drawingml/2006/main">
+            <ns10:r>
+              <ns10:t>本教程后续使用 Windows CPython 运行 west，因此从环境准备阶段选择 UCRT64 原生 Git。mingw-w64-ucrt-x86_64-git 提供 /ucrt64/bin/git.exe；MSYS2 的普通 git 包是另一套运行时版本，通常位于 /usr/bin。已有原生 Git 时复用。依据：https://www.msys2.org/docs/git/ 和 https://packages.msys2.org/packages/mingw-w64-ucrt-x86_64-git 。只在本页前提成立后执行对应命令，不把整个 commands 目录批量执行。</ns10:t>
+            </ns10:r>
+          </ns10:p>
         </p:txBody>
       </p:sp>
       <p:sp>
@@ -5311,6 +5344,320 @@
 </p:notesMaster>
 </file>
 
+<file path=ppt/notesSlides/git_env2.xml><?xml version="1.0" encoding="utf-8"?>
+<p:notes xmlns:p="http://schemas.openxmlformats.org/presentationml/2006/main">
+  <p:cSld>
+    <p:spTree>
+      <p:nvGrpSpPr>
+        <p:cNvPr id="1" name=""/>
+        <p:cNvGrpSpPr/>
+        <p:nvPr/>
+      </p:nvGrpSpPr>
+      <p:grpSpPr>
+        <a:xfrm xmlns:a="http://schemas.openxmlformats.org/drawingml/2006/main"/>
+      </p:grpSpPr>
+      <p:sp>
+        <p:nvSpPr>
+          <p:cNvPr id="2" name="Slide Image Placeholder 1"/>
+          <p:cNvSpPr>
+            <a:spLocks xmlns:a="http://schemas.openxmlformats.org/drawingml/2006/main" noGrp="1"/>
+          </p:cNvSpPr>
+          <p:nvPr>
+            <p:ph type="sldImg" idx="0"/>
+          </p:nvPr>
+        </p:nvSpPr>
+        <p:spPr/>
+      </p:sp>
+      <p:sp>
+        <p:nvSpPr>
+          <p:cNvPr id="3" name="Notes Placeholder 2"/>
+          <p:cNvSpPr>
+            <a:spLocks xmlns:a="http://schemas.openxmlformats.org/drawingml/2006/main" noGrp="1"/>
+          </p:cNvSpPr>
+          <p:nvPr>
+            <p:ph type="body" idx="1"/>
+          </p:nvPr>
+        </p:nvSpPr>
+        <p:spPr/>
+        <p:txBody>
+          <a:bodyPr xmlns:a="http://schemas.openxmlformats.org/drawingml/2006/main"/>
+          <a:lstStyle xmlns:a="http://schemas.openxmlformats.org/drawingml/2006/main"/>
+          <ns0:p xmlns:ns0="http://schemas.openxmlformats.org/drawingml/2006/main">
+            <ns0:r>
+              <ns0:t>安装后，确认 Bash 真正选中了哪套 Git</ns0:t>
+            </ns0:r>
+          </ns0:p>
+          <ns1:p xmlns:ns1="http://schemas.openxmlformats.org/drawingml/2006/main">
+            <ns1:r>
+              <ns1:t># Windows UCRT64；任意目录。</ns1:t>
+            </ns1:r>
+          </ns1:p>
+          <ns2:p xmlns:ns2="http://schemas.openxmlformats.org/drawingml/2006/main">
+            <ns2:r>
+              <ns2:t>type -a git</ns2:t>
+            </ns2:r>
+          </ns2:p>
+          <ns3:p xmlns:ns3="http://schemas.openxmlformats.org/drawingml/2006/main">
+            <ns3:r>
+              <ns3:t>command -v git</ns3:t>
+            </ns3:r>
+          </ns3:p>
+          <ns4:p xmlns:ns4="http://schemas.openxmlformats.org/drawingml/2006/main">
+            <ns4:r>
+              <ns4:t>git --version</ns4:t>
+            </ns4:r>
+          </ns4:p>
+          <ns5:p xmlns:ns5="http://schemas.openxmlformats.org/drawingml/2006/main">
+            <ns5:r>
+              <ns5:t>本教程主线应优先找到 /ucrt64/bin/git（或 git.exe）。</ns5:t>
+            </ns5:r>
+          </ns5:p>
+          <ns6:p xmlns:ns6="http://schemas.openxmlformats.org/drawingml/2006/main">
+            <ns6:r>
+              <ns6:t>若仍是 /usr/bin/git，先停止源码与模块下载，修正路径选择。</ns6:t>
+            </ns6:r>
+          </ns6:p>
+          <ns7:p xmlns:ns7="http://schemas.openxmlformats.org/drawingml/2006/main">
+            <ns7:r>
+              <ns7:t>type -a 若显示别名或函数，先查明是否遮蔽了 PATH 中的程序。</ns7:t>
+            </ns7:r>
+          </ns7:p>
+          <ns8:p xmlns:ns8="http://schemas.openxmlformats.org/drawingml/2006/main">
+            <ns8:r>
+              <ns8:t>P002 激活 Windows Python 的 .venv 后，还要检查它找到的 Git。</ns8:t>
+            </ns8:r>
+          </ns8:p>
+          <ns9:p xmlns:ns9="http://schemas.openxmlformats.org/drawingml/2006/main">
+            <ns9:r>
+              <ns9:t>type -a 显示 Bash 的别名、函数与 PATH 中所有匹配项；command -v 显示当前解析结果。先确认 MSYSTEM=UCRT64，缺失原生 Git 时按上一页安装。存在原生 Git 但 PATH 优先级不正确时，在当前终端执行 export PATH="/ucrt64/bin:$PATH" 和 hash -r 后重新检查；别名/函数需先查清定义来源，不能仅改 PATH 就认定它们已消失。P002 给出恢复步骤。完整工具检查见配套 TXT。</ns9:t>
+            </ns9:r>
+          </ns9:p>
+        </p:txBody>
+      </p:sp>
+      <p:sp>
+        <p:nvSpPr>
+          <p:cNvPr id="4" name="Slide Number Placeholder 3"/>
+          <p:cNvSpPr>
+            <a:spLocks xmlns:a="http://schemas.openxmlformats.org/drawingml/2006/main" noGrp="1"/>
+          </p:cNvSpPr>
+          <p:nvPr>
+            <p:ph type="sldNum" idx="5"/>
+          </p:nvPr>
+        </p:nvSpPr>
+        <p:spPr/>
+        <p:txBody>
+          <a:bodyPr xmlns:a="http://schemas.openxmlformats.org/drawingml/2006/main"/>
+          <a:lstStyle xmlns:a="http://schemas.openxmlformats.org/drawingml/2006/main"/>
+          <a:p xmlns:a="http://schemas.openxmlformats.org/drawingml/2006/main"/>
+        </p:txBody>
+      </p:sp>
+    </p:spTree>
+  </p:cSld>
+  <p:clrMapOvr>
+    <a:masterClrMapping xmlns:a="http://schemas.openxmlformats.org/drawingml/2006/main"/>
+  </p:clrMapOvr>
+</p:notes>
+</file>
+
+<file path=ppt/notesSlides/guide1.xml><?xml version="1.0" encoding="utf-8"?>
+<p:notes xmlns:a="http://schemas.openxmlformats.org/drawingml/2006/main" xmlns:r="http://schemas.openxmlformats.org/officeDocument/2006/relationships" xmlns:p="http://schemas.openxmlformats.org/presentationml/2006/main">
+  <p:cSld>
+    <p:spTree>
+      <p:nvGrpSpPr>
+        <p:cNvPr id="1" name=""/>
+        <p:cNvGrpSpPr/>
+        <p:nvPr/>
+      </p:nvGrpSpPr>
+      <p:grpSpPr>
+        <a:xfrm>
+          <a:off x="0" y="0"/>
+          <a:ext cx="0" cy="0"/>
+          <a:chOff x="0" y="0"/>
+          <a:chExt cx="0" cy="0"/>
+        </a:xfrm>
+      </p:grpSpPr>
+      <p:sp>
+        <p:nvSpPr>
+          <p:cNvPr id="2" name="Slide Image Placeholder 1"/>
+          <p:cNvSpPr>
+            <a:spLocks noGrp="1" noRot="1" noChangeAspect="1"/>
+          </p:cNvSpPr>
+          <p:nvPr>
+            <p:ph type="sldImg"/>
+          </p:nvPr>
+        </p:nvSpPr>
+        <p:spPr/>
+      </p:sp>
+      <p:sp>
+        <p:nvSpPr>
+          <p:cNvPr id="3" name="Notes Placeholder 2"/>
+          <p:cNvSpPr>
+            <a:spLocks noGrp="1"/>
+          </p:cNvSpPr>
+          <p:nvPr>
+            <p:ph type="body" idx="1"/>
+          </p:nvPr>
+        </p:nvSpPr>
+        <p:spPr/>
+        <p:txBody>
+          <a:bodyPr/>
+          <a:lstStyle/>
+          <a:p>
+            <a:r>
+              <a:t>对应配套正文 P001 Windows 开篇。</a:t>
+            </a:r>
+          </a:p>
+          <a:p>
+            <a:r>
+              <a:t>最终要让自己的芯片和板运行 Zephyr。第一轮保持官方 hello_world 不变，选择已有支持的 mps2/an386，把工具、源码和依赖连成可复现的构建。</a:t>
+            </a:r>
+          </a:p>
+          <a:p>
+            <a:r>
+              <a:t>应用选 samples/hello_world，硬件选 mps2/an386：前者入口是 CMakeLists.txt 与 prj.conf；后者是 Arm MPS2 FPGA 平台的 Cortex-M4F 系统配置。两项独立选择，每种组合保留独立构建目录。</a:t>
+            </a:r>
+          </a:p>
+          <a:p>
+            <a:r>
+              <a:t>之后再把目标换成 HC32F4A0：应用仍可比较，新增工作集中在 SoC、板与驱动，避免把环境故障与移植故障混在一起。</a:t>
+            </a:r>
+          </a:p>
+          <a:p>
+            <a:r>
+              <a:t>本册只先取得同一份官方源码和能再次打开的 UCRT64。主机 Python、ARM 编译器与外部模块在后续逐项准备。</a:t>
+            </a:r>
+          </a:p>
+          <a:p>
+            <a:r>
+              <a:t>P001 Windows 开篇；官方 samples/hello_world、boards/arm/mps2</a:t>
+            </a:r>
+          </a:p>
+        </p:txBody>
+      </p:sp>
+      <p:sp>
+        <p:nvSpPr>
+          <p:cNvPr id="4" name="Slide Number Placeholder 3"/>
+          <p:cNvSpPr>
+            <a:spLocks noGrp="1"/>
+          </p:cNvSpPr>
+          <p:nvPr>
+            <p:ph type="sldNum" idx="5"/>
+          </p:nvPr>
+        </p:nvSpPr>
+        <p:spPr/>
+        <p:txBody>
+          <a:bodyPr/>
+          <a:lstStyle/>
+          <a:p>
+            <a:endParaRPr/>
+          </a:p>
+        </p:txBody>
+      </p:sp>
+    </p:spTree>
+  </p:cSld>
+  <p:clrMapOvr>
+    <a:masterClrMapping/>
+  </p:clrMapOvr>
+</p:notes>
+</file>
+
+<file path=ppt/notesSlides/guide2.xml><?xml version="1.0" encoding="utf-8"?>
+<p:notes xmlns:a="http://schemas.openxmlformats.org/drawingml/2006/main" xmlns:r="http://schemas.openxmlformats.org/officeDocument/2006/relationships" xmlns:p="http://schemas.openxmlformats.org/presentationml/2006/main">
+  <p:cSld>
+    <p:spTree>
+      <p:nvGrpSpPr>
+        <p:cNvPr id="1" name=""/>
+        <p:cNvGrpSpPr/>
+        <p:nvPr/>
+      </p:nvGrpSpPr>
+      <p:grpSpPr>
+        <a:xfrm>
+          <a:off x="0" y="0"/>
+          <a:ext cx="0" cy="0"/>
+          <a:chOff x="0" y="0"/>
+          <a:chExt cx="0" cy="0"/>
+        </a:xfrm>
+      </p:grpSpPr>
+      <p:sp>
+        <p:nvSpPr>
+          <p:cNvPr id="2" name="Slide Image Placeholder 1"/>
+          <p:cNvSpPr>
+            <a:spLocks noGrp="1" noRot="1" noChangeAspect="1"/>
+          </p:cNvSpPr>
+          <p:nvPr>
+            <p:ph type="sldImg"/>
+          </p:nvPr>
+        </p:nvSpPr>
+        <p:spPr/>
+      </p:sp>
+      <p:sp>
+        <p:nvSpPr>
+          <p:cNvPr id="3" name="Notes Placeholder 2"/>
+          <p:cNvSpPr>
+            <a:spLocks noGrp="1"/>
+          </p:cNvSpPr>
+          <p:nvPr>
+            <p:ph type="body" idx="1"/>
+          </p:nvPr>
+        </p:nvSpPr>
+        <p:spPr/>
+        <p:txBody>
+          <a:bodyPr/>
+          <a:lstStyle/>
+          <a:p>
+            <a:r>
+              <a:t>对应配套正文 P001 Windows 1.10。</a:t>
+            </a:r>
+          </a:p>
+          <a:p>
+            <a:r>
+              <a:t>交接的是 G:/zephyr_practice/zephyr-main，不是另一个同名副本。VERSION 说明源码版本，samples/hello_world 是将要构建的应用。</a:t>
+            </a:r>
+          </a:p>
+          <a:p>
+            <a:r>
+              <a:t>boards/arm/mps2 已有参考目标；west.yml 则列出外部项目。主仓内有接入规则，不代表外部源码已经下载。</a:t>
+            </a:r>
+          </a:p>
+          <a:p>
+            <a:r>
+              <a:t>P002 准备主机工具，P003 提供 ARM 编译器，P004 确定并取得 CMSIS。现在尚未开始构建，没有 ELF 正常。</a:t>
+            </a:r>
+          </a:p>
+          <a:p>
+            <a:r>
+              <a:t>P001 Windows 1.10</a:t>
+            </a:r>
+          </a:p>
+        </p:txBody>
+      </p:sp>
+      <p:sp>
+        <p:nvSpPr>
+          <p:cNvPr id="4" name="Slide Number Placeholder 3"/>
+          <p:cNvSpPr>
+            <a:spLocks noGrp="1"/>
+          </p:cNvSpPr>
+          <p:nvPr>
+            <p:ph type="sldNum" idx="5"/>
+          </p:nvPr>
+        </p:nvSpPr>
+        <p:spPr/>
+        <p:txBody>
+          <a:bodyPr/>
+          <a:lstStyle/>
+          <a:p>
+            <a:endParaRPr/>
+          </a:p>
+        </p:txBody>
+      </p:sp>
+    </p:spTree>
+  </p:cSld>
+  <p:clrMapOvr>
+    <a:masterClrMapping/>
+  </p:clrMapOvr>
+</p:notes>
+</file>
+
 <file path=ppt/notesSlides/notesSlide1.xml><?xml version="1.0" encoding="utf-8"?>
 <p:notes xmlns:a="http://schemas.openxmlformats.org/drawingml/2006/main" xmlns:r="http://schemas.openxmlformats.org/officeDocument/2006/relationships" xmlns:p="http://schemas.openxmlformats.org/presentationml/2006/main">
   <p:cSld>
@@ -11109,7 +11456,7 @@
                 <a:cs typeface="Microsoft YaHei"/>
               </a:defRPr>
             </a:pPr>
-            <a:fld id="{8B01BD5A-5FF6-483F-AB7A-D7CE40C8F281}" type="slidenum">
+            <a:fld id="{DBB5BC86-656C-4FE4-A6DC-FC7683D9DF8D}" type="slidenum">
               <a:rPr sz="1350">
                 <a:solidFill>
                   <a:srgbClr val="646173"/>
@@ -11118,7 +11465,7 @@
                 <a:ea typeface="Microsoft YaHei"/>
                 <a:cs typeface="Microsoft YaHei"/>
               </a:rPr>
-              <a:t>4</a:t>
+              <a:t>5</a:t>
             </a:fld>
           </a:p>
         </p:txBody>
@@ -11154,13 +11501,7 @@
       </p:grpSpPr>
       <p:sp>
         <p:nvSpPr>
-          <p:cNvPr id="8" name="title">
-            <a:extLst xmlns:a="http://schemas.openxmlformats.org/drawingml/2006/main">
-              <a:ext uri="{FF2B5EF4-FFF2-40B4-BE49-F238E27FC236}">
-                <a16:creationId xmlns:a16="http://schemas.microsoft.com/office/drawing/2014/main" id="{16F57A0E-6421-4B29-86C6-EFA1BBD821CA}"/>
-              </a:ext>
-            </a:extLst>
-          </p:cNvPr>
+          <p:cNvPr id="2" name="Title"/>
           <p:cNvSpPr>
             <a:spLocks xmlns:a="http://schemas.openxmlformats.org/drawingml/2006/main" noGrp="1"/>
           </p:cNvSpPr>
@@ -11168,8 +11509,8 @@
         </p:nvSpPr>
         <p:spPr>
           <a:xfrm xmlns:a="http://schemas.openxmlformats.org/drawingml/2006/main">
-            <a:off x="609600" y="381000"/>
-            <a:ext cx="10972800" cy="714375"/>
+            <a:off x="609600" y="400050"/>
+            <a:ext cx="10972800" cy="723900"/>
           </a:xfrm>
           <a:prstGeom xmlns:a="http://schemas.openxmlformats.org/drawingml/2006/main" prst="rect">
             <a:avLst/>
@@ -11180,12 +11521,12 @@
           </a:ln>
         </p:spPr>
         <p:txBody>
-          <a:bodyPr xmlns:a="http://schemas.openxmlformats.org/drawingml/2006/main" anchor="t">
+          <a:bodyPr xmlns:a="http://schemas.openxmlformats.org/drawingml/2006/main" lIns="0" tIns="0" rIns="0" bIns="0" anchor="t">
             <a:noAutofit/>
           </a:bodyPr>
           <a:lstStyle xmlns:a="http://schemas.openxmlformats.org/drawingml/2006/main">
             <a:defPPr>
-              <a:defRPr sz="3150" b="1">
+              <a:defRPr sz="3000" b="1">
                 <a:solidFill>
                   <a:srgbClr val="29263B"/>
                 </a:solidFill>
@@ -11197,7 +11538,13 @@
           </a:lstStyle>
           <a:p xmlns:a="http://schemas.openxmlformats.org/drawingml/2006/main">
             <a:pPr>
-              <a:defRPr sz="3150" b="1">
+              <a:lnSpc>
+                <a:spcPct val="120000"/>
+              </a:lnSpc>
+              <a:spcAft>
+                <a:spcPts val="0"/>
+              </a:spcAft>
+              <a:defRPr sz="3000" b="1">
                 <a:solidFill>
                   <a:srgbClr val="29263B"/>
                 </a:solidFill>
@@ -11207,28 +11554,14 @@
               </a:defRPr>
             </a:pPr>
             <a:r>
-              <a:rPr sz="3150" b="1">
-                <a:solidFill>
-                  <a:srgbClr val="29263B"/>
-                </a:solidFill>
-                <a:latin typeface="Microsoft YaHei"/>
-                <a:ea typeface="Microsoft YaHei"/>
-                <a:cs typeface="Microsoft YaHei"/>
-              </a:rPr>
-              <a:t>安装下载与解压工具</a:t>
+              <a:t>先准备 UCRT64 原生 Git 与下载工具</a:t>
             </a:r>
           </a:p>
         </p:txBody>
       </p:sp>
       <p:sp>
         <p:nvSpPr>
-          <p:cNvPr id="2" name="section">
-            <a:extLst xmlns:a="http://schemas.openxmlformats.org/drawingml/2006/main">
-              <a:ext uri="{FF2B5EF4-FFF2-40B4-BE49-F238E27FC236}">
-                <a16:creationId xmlns:a16="http://schemas.microsoft.com/office/drawing/2014/main" id="{BA7CCE1D-BD39-4052-8178-34955229E32F}"/>
-              </a:ext>
-            </a:extLst>
-          </p:cNvPr>
+          <p:cNvPr id="3" name="Stage"/>
           <p:cNvSpPr>
             <a:spLocks xmlns:a="http://schemas.openxmlformats.org/drawingml/2006/main" noGrp="1"/>
           </p:cNvSpPr>
@@ -11236,8 +11569,8 @@
         </p:nvSpPr>
         <p:spPr>
           <a:xfrm xmlns:a="http://schemas.openxmlformats.org/drawingml/2006/main">
-            <a:off x="628650" y="1190625"/>
-            <a:ext cx="10953750" cy="428625"/>
+            <a:off x="609600" y="1209675"/>
+            <a:ext cx="10972800" cy="333375"/>
           </a:xfrm>
           <a:prstGeom xmlns:a="http://schemas.openxmlformats.org/drawingml/2006/main" prst="rect">
             <a:avLst/>
@@ -11248,14 +11581,14 @@
           </a:ln>
         </p:spPr>
         <p:txBody>
-          <a:bodyPr xmlns:a="http://schemas.openxmlformats.org/drawingml/2006/main" anchor="t">
+          <a:bodyPr xmlns:a="http://schemas.openxmlformats.org/drawingml/2006/main" lIns="0" tIns="0" rIns="0" bIns="0" anchor="t">
             <a:noAutofit/>
           </a:bodyPr>
           <a:lstStyle xmlns:a="http://schemas.openxmlformats.org/drawingml/2006/main">
             <a:defPPr>
-              <a:defRPr sz="1575" b="0">
-                <a:solidFill>
-                  <a:srgbClr val="6845AC"/>
+              <a:defRPr sz="1650" b="0">
+                <a:solidFill>
+                  <a:srgbClr val="7350BC"/>
                 </a:solidFill>
                 <a:latin typeface="Microsoft YaHei"/>
                 <a:ea typeface="Microsoft YaHei"/>
@@ -11265,9 +11598,15 @@
           </a:lstStyle>
           <a:p xmlns:a="http://schemas.openxmlformats.org/drawingml/2006/main">
             <a:pPr>
-              <a:defRPr sz="1575" b="0">
-                <a:solidFill>
-                  <a:srgbClr val="6845AC"/>
+              <a:lnSpc>
+                <a:spcPct val="120000"/>
+              </a:lnSpc>
+              <a:spcAft>
+                <a:spcPts val="0"/>
+              </a:spcAft>
+              <a:defRPr sz="1650" b="0">
+                <a:solidFill>
+                  <a:srgbClr val="7350BC"/>
                 </a:solidFill>
                 <a:latin typeface="Microsoft YaHei"/>
                 <a:ea typeface="Microsoft YaHei"/>
@@ -11275,28 +11614,20 @@
               </a:defRPr>
             </a:pPr>
             <a:r>
-              <a:rPr sz="1575" b="0">
-                <a:solidFill>
-                  <a:srgbClr val="6845AC"/>
-                </a:solidFill>
-                <a:latin typeface="Microsoft YaHei"/>
-                <a:ea typeface="Microsoft YaHei"/>
-                <a:cs typeface="Microsoft YaHei"/>
-              </a:rPr>
-              <a:t>1.3.1_安装_Git_与下载解压工具</a:t>
+              <a:rPr>
+                <a:solidFill>
+                  <a:srgbClr val="7350BC"/>
+                </a:solidFill>
+                <a:ea typeface="Microsoft YaHei"/>
+              </a:rPr>
+              <a:t>1.3.1 · 已按 1.2.4 完成 MSYS2 系统更新</a:t>
             </a:r>
           </a:p>
         </p:txBody>
       </p:sp>
       <p:sp>
         <p:nvSpPr>
-          <p:cNvPr id="3" name="Copyable command">
-            <a:extLst xmlns:a="http://schemas.openxmlformats.org/drawingml/2006/main">
-              <a:ext uri="{FF2B5EF4-FFF2-40B4-BE49-F238E27FC236}">
-                <a16:creationId xmlns:a16="http://schemas.microsoft.com/office/drawing/2014/main" id="{2B25C4C7-3A58-45E1-A099-B8BD2E8C5FB4}"/>
-              </a:ext>
-            </a:extLst>
-          </p:cNvPr>
+          <p:cNvPr id="4" name="Continuous code"/>
           <p:cNvSpPr>
             <a:spLocks xmlns:a="http://schemas.openxmlformats.org/drawingml/2006/main" noGrp="1"/>
           </p:cNvSpPr>
@@ -11304,8 +11635,8 @@
         </p:nvSpPr>
         <p:spPr>
           <a:xfrm xmlns:a="http://schemas.openxmlformats.org/drawingml/2006/main">
-            <a:off x="609600" y="1838325"/>
-            <a:ext cx="10972800" cy="2714625"/>
+            <a:off x="609600" y="1771650"/>
+            <a:ext cx="10972800" cy="1828800"/>
           </a:xfrm>
           <a:prstGeom xmlns:a="http://schemas.openxmlformats.org/drawingml/2006/main" prst="rect">
             <a:avLst/>
@@ -11316,17 +11647,17 @@
           </a:ln>
         </p:spPr>
         <p:txBody>
-          <a:bodyPr xmlns:a="http://schemas.openxmlformats.org/drawingml/2006/main" anchor="t">
+          <a:bodyPr xmlns:a="http://schemas.openxmlformats.org/drawingml/2006/main" lIns="0" tIns="0" rIns="0" bIns="0" anchor="t">
             <a:noAutofit/>
           </a:bodyPr>
           <a:lstStyle xmlns:a="http://schemas.openxmlformats.org/drawingml/2006/main">
             <a:defPPr>
               <a:defRPr sz="1875" b="0">
                 <a:solidFill>
-                  <a:srgbClr val="005968"/>
+                  <a:srgbClr val="29263B"/>
                 </a:solidFill>
                 <a:latin typeface="Consolas"/>
-                <a:ea typeface="Consolas"/>
+                <a:ea typeface="Microsoft YaHei"/>
                 <a:cs typeface="Consolas"/>
               </a:defRPr>
             </a:defPPr>
@@ -11336,25 +11667,26 @@
               <a:lnSpc>
                 <a:spcPct val="120000"/>
               </a:lnSpc>
+              <a:spcAft>
+                <a:spcPts val="0"/>
+              </a:spcAft>
               <a:defRPr sz="1875" b="0">
                 <a:solidFill>
-                  <a:srgbClr val="005968"/>
+                  <a:srgbClr val="29263B"/>
                 </a:solidFill>
                 <a:latin typeface="Consolas"/>
-                <a:ea typeface="Consolas"/>
+                <a:ea typeface="Microsoft YaHei"/>
                 <a:cs typeface="Consolas"/>
               </a:defRPr>
             </a:pPr>
             <a:r>
-              <a:rPr sz="1875" b="0">
+              <a:rPr>
                 <a:solidFill>
                   <a:srgbClr val="646173"/>
                 </a:solidFill>
-                <a:latin typeface="Consolas"/>
-                <a:ea typeface="Consolas"/>
-                <a:cs typeface="Consolas"/>
-              </a:rPr>
-              <a:t># 当前位置：任意目录；终端：UCRT64。此前已完成系统更新。</a:t>
+                <a:ea typeface="Microsoft YaHei"/>
+              </a:rPr>
+              <a:t># Windows UCRT64；任意目录；先完成系统更新。</a:t>
             </a:r>
           </a:p>
           <a:p xmlns:a="http://schemas.openxmlformats.org/drawingml/2006/main">
@@ -11362,203 +11694,204 @@
               <a:lnSpc>
                 <a:spcPct val="120000"/>
               </a:lnSpc>
+              <a:spcAft>
+                <a:spcPts val="0"/>
+              </a:spcAft>
               <a:defRPr sz="1875" b="0">
                 <a:solidFill>
-                  <a:srgbClr val="005968"/>
+                  <a:srgbClr val="29263B"/>
                 </a:solidFill>
                 <a:latin typeface="Consolas"/>
-                <a:ea typeface="Consolas"/>
+                <a:ea typeface="Microsoft YaHei"/>
                 <a:cs typeface="Consolas"/>
               </a:defRPr>
             </a:pPr>
             <a:r>
-              <a:rPr sz="1875" b="0">
+              <a:rPr>
                 <a:solidFill>
                   <a:srgbClr val="A02B93"/>
                 </a:solidFill>
+                <a:ea typeface="Microsoft YaHei"/>
+              </a:rPr>
+              <a:t>pacman</a:t>
+            </a:r>
+            <a:r>
+              <a:t> -S --needed </a:t>
+            </a:r>
+            <a:r>
+              <a:rPr>
+                <a:solidFill>
+                  <a:srgbClr val="A02B93"/>
+                </a:solidFill>
+                <a:ea typeface="Microsoft YaHei"/>
+              </a:rPr>
+              <a:t>curl</a:t>
+            </a:r>
+            <a:r>
+              <a:t> </a:t>
+            </a:r>
+            <a:r>
+              <a:rPr>
+                <a:solidFill>
+                  <a:srgbClr val="A02B93"/>
+                </a:solidFill>
+                <a:ea typeface="Microsoft YaHei"/>
+              </a:rPr>
+              <a:t>wget</a:t>
+            </a:r>
+            <a:r>
+              <a:t> </a:t>
+            </a:r>
+            <a:r>
+              <a:rPr>
+                <a:solidFill>
+                  <a:srgbClr val="A02B93"/>
+                </a:solidFill>
+                <a:ea typeface="Microsoft YaHei"/>
+              </a:rPr>
+              <a:t>unzip</a:t>
+            </a:r>
+            <a:r>
+              <a:t> </a:t>
+            </a:r>
+            <a:r>
+              <a:rPr>
+                <a:solidFill>
+                  <a:srgbClr val="A02B93"/>
+                </a:solidFill>
+                <a:ea typeface="Microsoft YaHei"/>
+              </a:rPr>
+              <a:t>tar</a:t>
+            </a:r>
+            <a:r>
+              <a:t> </a:t>
+            </a:r>
+            <a:r>
+              <a:rPr>
+                <a:solidFill>
+                  <a:srgbClr val="A02B93"/>
+                </a:solidFill>
+                <a:ea typeface="Microsoft YaHei"/>
+              </a:rPr>
+              <a:t>xz</a:t>
+            </a:r>
+            <a:r>
+              <a:t> &amp;&amp;</a:t>
+            </a:r>
+          </a:p>
+          <a:p xmlns:a="http://schemas.openxmlformats.org/drawingml/2006/main">
+            <a:pPr>
+              <a:lnSpc>
+                <a:spcPct val="120000"/>
+              </a:lnSpc>
+              <a:spcAft>
+                <a:spcPts val="0"/>
+              </a:spcAft>
+              <a:defRPr sz="1875" b="0">
+                <a:solidFill>
+                  <a:srgbClr val="29263B"/>
+                </a:solidFill>
                 <a:latin typeface="Consolas"/>
-                <a:ea typeface="Consolas"/>
+                <a:ea typeface="Microsoft YaHei"/>
                 <a:cs typeface="Consolas"/>
+              </a:defRPr>
+            </a:pPr>
+            <a:r>
+              <a:t>if ! </a:t>
+            </a:r>
+            <a:r>
+              <a:rPr>
+                <a:solidFill>
+                  <a:srgbClr val="A02B93"/>
+                </a:solidFill>
+                <a:ea typeface="Microsoft YaHei"/>
+              </a:rPr>
+              <a:t>test</a:t>
+            </a:r>
+            <a:r>
+              <a:t> -x </a:t>
+            </a:r>
+            <a:r>
+              <a:rPr>
+                <a:solidFill>
+                  <a:srgbClr val="0070C0"/>
+                </a:solidFill>
+                <a:ea typeface="Microsoft YaHei"/>
+              </a:rPr>
+              <a:t>/ucrt64/bin/git.exe;</a:t>
+            </a:r>
+            <a:r>
+              <a:t> then</a:t>
+            </a:r>
+          </a:p>
+          <a:p xmlns:a="http://schemas.openxmlformats.org/drawingml/2006/main">
+            <a:pPr>
+              <a:lnSpc>
+                <a:spcPct val="120000"/>
+              </a:lnSpc>
+              <a:spcAft>
+                <a:spcPts val="0"/>
+              </a:spcAft>
+              <a:defRPr sz="1875" b="0">
+                <a:solidFill>
+                  <a:srgbClr val="29263B"/>
+                </a:solidFill>
+                <a:latin typeface="Consolas"/>
+                <a:ea typeface="Microsoft YaHei"/>
+                <a:cs typeface="Consolas"/>
+              </a:defRPr>
+            </a:pPr>
+            <a:r>
+              <a:t>  </a:t>
+            </a:r>
+            <a:r>
+              <a:rPr>
+                <a:solidFill>
+                  <a:srgbClr val="A02B93"/>
+                </a:solidFill>
+                <a:ea typeface="Microsoft YaHei"/>
               </a:rPr>
               <a:t>pacman</a:t>
             </a:r>
             <a:r>
-              <a:rPr sz="1875" b="0">
+              <a:t> -S --needed mingw-w64-ucrt-x86_64-</a:t>
+            </a:r>
+            <a:r>
+              <a:rPr>
+                <a:solidFill>
+                  <a:srgbClr val="A02B93"/>
+                </a:solidFill>
+                <a:ea typeface="Microsoft YaHei"/>
+              </a:rPr>
+              <a:t>git</a:t>
+            </a:r>
+          </a:p>
+          <a:p xmlns:a="http://schemas.openxmlformats.org/drawingml/2006/main">
+            <a:pPr>
+              <a:lnSpc>
+                <a:spcPct val="120000"/>
+              </a:lnSpc>
+              <a:spcAft>
+                <a:spcPts val="0"/>
+              </a:spcAft>
+              <a:defRPr sz="1875" b="0">
                 <a:solidFill>
                   <a:srgbClr val="29263B"/>
                 </a:solidFill>
                 <a:latin typeface="Consolas"/>
-                <a:ea typeface="Consolas"/>
+                <a:ea typeface="Microsoft YaHei"/>
                 <a:cs typeface="Consolas"/>
-              </a:rPr>
-              <a:t> </a:t>
-            </a:r>
-            <a:r>
-              <a:rPr sz="1875" b="0">
-                <a:solidFill>
-                  <a:srgbClr val="B84E00"/>
-                </a:solidFill>
-                <a:latin typeface="Consolas"/>
-                <a:ea typeface="Consolas"/>
-                <a:cs typeface="Consolas"/>
-              </a:rPr>
-              <a:t>-S</a:t>
-            </a:r>
-            <a:r>
-              <a:rPr sz="1875" b="0">
-                <a:solidFill>
-                  <a:srgbClr val="29263B"/>
-                </a:solidFill>
-                <a:latin typeface="Consolas"/>
-                <a:ea typeface="Consolas"/>
-                <a:cs typeface="Consolas"/>
-              </a:rPr>
-              <a:t> </a:t>
-            </a:r>
-            <a:r>
-              <a:rPr sz="1875" b="0">
-                <a:solidFill>
-                  <a:srgbClr val="B84E00"/>
-                </a:solidFill>
-                <a:latin typeface="Consolas"/>
-                <a:ea typeface="Consolas"/>
-                <a:cs typeface="Consolas"/>
-              </a:rPr>
-              <a:t>--needed</a:t>
-            </a:r>
-            <a:r>
-              <a:rPr sz="1875" b="0">
-                <a:solidFill>
-                  <a:srgbClr val="29263B"/>
-                </a:solidFill>
-                <a:latin typeface="Consolas"/>
-                <a:ea typeface="Consolas"/>
-                <a:cs typeface="Consolas"/>
-              </a:rPr>
-              <a:t> </a:t>
-            </a:r>
-            <a:r>
-              <a:rPr sz="1875" b="0">
-                <a:solidFill>
-                  <a:srgbClr val="A02B93"/>
-                </a:solidFill>
-                <a:latin typeface="Consolas"/>
-                <a:ea typeface="Consolas"/>
-                <a:cs typeface="Consolas"/>
-              </a:rPr>
-              <a:t>git</a:t>
-            </a:r>
-            <a:r>
-              <a:rPr sz="1875" b="0">
-                <a:solidFill>
-                  <a:srgbClr val="29263B"/>
-                </a:solidFill>
-                <a:latin typeface="Consolas"/>
-                <a:ea typeface="Consolas"/>
-                <a:cs typeface="Consolas"/>
-              </a:rPr>
-              <a:t> </a:t>
-            </a:r>
-            <a:r>
-              <a:rPr sz="1875" b="0">
-                <a:solidFill>
-                  <a:srgbClr val="A02B93"/>
-                </a:solidFill>
-                <a:latin typeface="Consolas"/>
-                <a:ea typeface="Consolas"/>
-                <a:cs typeface="Consolas"/>
-              </a:rPr>
-              <a:t>curl</a:t>
-            </a:r>
-            <a:r>
-              <a:rPr sz="1875" b="0">
-                <a:solidFill>
-                  <a:srgbClr val="29263B"/>
-                </a:solidFill>
-                <a:latin typeface="Consolas"/>
-                <a:ea typeface="Consolas"/>
-                <a:cs typeface="Consolas"/>
-              </a:rPr>
-              <a:t> </a:t>
-            </a:r>
-            <a:r>
-              <a:rPr sz="1875" b="0">
-                <a:solidFill>
-                  <a:srgbClr val="A02B93"/>
-                </a:solidFill>
-                <a:latin typeface="Consolas"/>
-                <a:ea typeface="Consolas"/>
-                <a:cs typeface="Consolas"/>
-              </a:rPr>
-              <a:t>wget</a:t>
-            </a:r>
-            <a:r>
-              <a:rPr sz="1875" b="0">
-                <a:solidFill>
-                  <a:srgbClr val="29263B"/>
-                </a:solidFill>
-                <a:latin typeface="Consolas"/>
-                <a:ea typeface="Consolas"/>
-                <a:cs typeface="Consolas"/>
-              </a:rPr>
-              <a:t> </a:t>
-            </a:r>
-            <a:r>
-              <a:rPr sz="1875" b="0">
-                <a:solidFill>
-                  <a:srgbClr val="A02B93"/>
-                </a:solidFill>
-                <a:latin typeface="Consolas"/>
-                <a:ea typeface="Consolas"/>
-                <a:cs typeface="Consolas"/>
-              </a:rPr>
-              <a:t>unzip</a:t>
-            </a:r>
-            <a:r>
-              <a:rPr sz="1875" b="0">
-                <a:solidFill>
-                  <a:srgbClr val="29263B"/>
-                </a:solidFill>
-                <a:latin typeface="Consolas"/>
-                <a:ea typeface="Consolas"/>
-                <a:cs typeface="Consolas"/>
-              </a:rPr>
-              <a:t> </a:t>
-            </a:r>
-            <a:r>
-              <a:rPr sz="1875" b="0">
-                <a:solidFill>
-                  <a:srgbClr val="A02B93"/>
-                </a:solidFill>
-                <a:latin typeface="Consolas"/>
-                <a:ea typeface="Consolas"/>
-                <a:cs typeface="Consolas"/>
-              </a:rPr>
-              <a:t>tar</a:t>
-            </a:r>
-            <a:r>
-              <a:rPr sz="1875" b="0">
-                <a:solidFill>
-                  <a:srgbClr val="29263B"/>
-                </a:solidFill>
-                <a:latin typeface="Consolas"/>
-                <a:ea typeface="Consolas"/>
-                <a:cs typeface="Consolas"/>
-              </a:rPr>
-              <a:t> xz</a:t>
+              </a:defRPr>
+            </a:pPr>
+            <a:r>
+              <a:t>fi</a:t>
             </a:r>
           </a:p>
         </p:txBody>
       </p:sp>
       <p:sp>
         <p:nvSpPr>
-          <p:cNvPr id="4" name="explanation">
-            <a:extLst xmlns:a="http://schemas.openxmlformats.org/drawingml/2006/main">
-              <a:ext uri="{FF2B5EF4-FFF2-40B4-BE49-F238E27FC236}">
-                <a16:creationId xmlns:a16="http://schemas.microsoft.com/office/drawing/2014/main" id="{75922255-A363-4C99-868B-AB61987CFB81}"/>
-              </a:ext>
-            </a:extLst>
-          </p:cNvPr>
+          <p:cNvPr id="5" name="Body 0"/>
           <p:cNvSpPr>
             <a:spLocks xmlns:a="http://schemas.openxmlformats.org/drawingml/2006/main" noGrp="1"/>
           </p:cNvSpPr>
@@ -11566,8 +11899,8 @@
         </p:nvSpPr>
         <p:spPr>
           <a:xfrm xmlns:a="http://schemas.openxmlformats.org/drawingml/2006/main">
-            <a:off x="609600" y="4762500"/>
-            <a:ext cx="10972800" cy="1257300"/>
+            <a:off x="609600" y="3790950"/>
+            <a:ext cx="10972800" cy="717042"/>
           </a:xfrm>
           <a:prstGeom xmlns:a="http://schemas.openxmlformats.org/drawingml/2006/main" prst="rect">
             <a:avLst/>
@@ -11578,12 +11911,12 @@
           </a:ln>
         </p:spPr>
         <p:txBody>
-          <a:bodyPr xmlns:a="http://schemas.openxmlformats.org/drawingml/2006/main" anchor="t">
+          <a:bodyPr xmlns:a="http://schemas.openxmlformats.org/drawingml/2006/main" lIns="0" tIns="0" rIns="0" bIns="0" anchor="t">
             <a:noAutofit/>
           </a:bodyPr>
           <a:lstStyle xmlns:a="http://schemas.openxmlformats.org/drawingml/2006/main">
             <a:defPPr>
-              <a:defRPr sz="1875" b="0">
+              <a:defRPr sz="2025" b="0">
                 <a:solidFill>
                   <a:srgbClr val="29263B"/>
                 </a:solidFill>
@@ -11598,7 +11931,10 @@
               <a:lnSpc>
                 <a:spcPct val="120000"/>
               </a:lnSpc>
-              <a:defRPr sz="1875" b="0">
+              <a:spcAft>
+                <a:spcPts val="0"/>
+              </a:spcAft>
+              <a:defRPr sz="2025" b="0">
                 <a:solidFill>
                   <a:srgbClr val="29263B"/>
                 </a:solidFill>
@@ -11608,28 +11944,107 @@
               </a:defRPr>
             </a:pPr>
             <a:r>
-              <a:rPr sz="1875" b="0">
+              <a:t>Git 管源码与版本；</a:t>
+            </a:r>
+            <a:r>
+              <a:rPr>
+                <a:solidFill>
+                  <a:srgbClr val="A02B93"/>
+                </a:solidFill>
+                <a:ea typeface="Microsoft YaHei"/>
+              </a:rPr>
+              <a:t>curl</a:t>
+            </a:r>
+            <a:r>
+              <a:t> / </a:t>
+            </a:r>
+            <a:r>
+              <a:rPr>
+                <a:solidFill>
+                  <a:srgbClr val="A02B93"/>
+                </a:solidFill>
+                <a:ea typeface="Microsoft YaHei"/>
+              </a:rPr>
+              <a:t>wget</a:t>
+            </a:r>
+            <a:r>
+              <a:t> 下载，</a:t>
+            </a:r>
+            <a:r>
+              <a:rPr>
+                <a:solidFill>
+                  <a:srgbClr val="A02B93"/>
+                </a:solidFill>
+                <a:ea typeface="Microsoft YaHei"/>
+              </a:rPr>
+              <a:t>unzip</a:t>
+            </a:r>
+            <a:r>
+              <a:t> / </a:t>
+            </a:r>
+            <a:r>
+              <a:rPr>
+                <a:solidFill>
+                  <a:srgbClr val="A02B93"/>
+                </a:solidFill>
+                <a:ea typeface="Microsoft YaHei"/>
+              </a:rPr>
+              <a:t>tar</a:t>
+            </a:r>
+            <a:r>
+              <a:t> / </a:t>
+            </a:r>
+            <a:r>
+              <a:rPr>
+                <a:solidFill>
+                  <a:srgbClr val="A02B93"/>
+                </a:solidFill>
+                <a:ea typeface="Microsoft YaHei"/>
+              </a:rPr>
+              <a:t>xz</a:t>
+            </a:r>
+            <a:r>
+              <a:t> 解压。</a:t>
+            </a:r>
+          </a:p>
+          <a:p xmlns:a="http://schemas.openxmlformats.org/drawingml/2006/main">
+            <a:pPr>
+              <a:lnSpc>
+                <a:spcPct val="120000"/>
+              </a:lnSpc>
+              <a:spcAft>
+                <a:spcPts val="0"/>
+              </a:spcAft>
+              <a:defRPr sz="2025" b="0">
                 <a:solidFill>
                   <a:srgbClr val="29263B"/>
                 </a:solidFill>
                 <a:latin typeface="Microsoft YaHei"/>
                 <a:ea typeface="Microsoft YaHei"/>
                 <a:cs typeface="Microsoft YaHei"/>
-              </a:rPr>
-              <a:t>Git 管版本；curl/wget 下载网址；其余工具负责归档。编译工具在 P002—P005。</a:t>
+              </a:defRPr>
+            </a:pPr>
+            <a:r>
+              <a:t>原生 Git 已存在就跳过安装；这里不安装普通 </a:t>
+            </a:r>
+            <a:r>
+              <a:rPr>
+                <a:solidFill>
+                  <a:srgbClr val="A02B93"/>
+                </a:solidFill>
+                <a:ea typeface="Microsoft YaHei"/>
+              </a:rPr>
+              <a:t>git</a:t>
+            </a:r>
+            <a:r>
+              <a:t> 包。</a:t>
             </a:r>
           </a:p>
         </p:txBody>
       </p:sp>
       <p:sp>
         <p:nvSpPr>
-          <p:cNvPr id="5" name="Command file link">
-            <a:extLst xmlns:a="http://schemas.openxmlformats.org/drawingml/2006/main">
-              <a:ext uri="{FF2B5EF4-FFF2-40B4-BE49-F238E27FC236}">
-                <a16:creationId xmlns:a16="http://schemas.microsoft.com/office/drawing/2014/main" id="{6FEC8641-AEA9-4EDB-8B6D-4B7E5DB8FD6E}"/>
-              </a:ext>
-            </a:extLst>
-          </p:cNvPr>
+          <p:cNvPr id="6" name="Body 1"/>
           <p:cNvSpPr>
             <a:spLocks xmlns:a="http://schemas.openxmlformats.org/drawingml/2006/main" noGrp="1"/>
           </p:cNvSpPr>
@@ -11637,8 +12052,8 @@
         </p:nvSpPr>
         <p:spPr>
           <a:xfrm xmlns:a="http://schemas.openxmlformats.org/drawingml/2006/main">
-            <a:off x="609600" y="6096000"/>
-            <a:ext cx="10839450" cy="295275"/>
+            <a:off x="609600" y="4679442"/>
+            <a:ext cx="10972800" cy="717042"/>
           </a:xfrm>
           <a:prstGeom xmlns:a="http://schemas.openxmlformats.org/drawingml/2006/main" prst="rect">
             <a:avLst/>
@@ -11649,14 +12064,14 @@
           </a:ln>
         </p:spPr>
         <p:txBody>
-          <a:bodyPr xmlns:a="http://schemas.openxmlformats.org/drawingml/2006/main" anchor="t">
+          <a:bodyPr xmlns:a="http://schemas.openxmlformats.org/drawingml/2006/main" lIns="0" tIns="0" rIns="0" bIns="0" anchor="t">
             <a:noAutofit/>
           </a:bodyPr>
           <a:lstStyle xmlns:a="http://schemas.openxmlformats.org/drawingml/2006/main">
             <a:defPPr>
-              <a:defRPr sz="1425" b="0">
-                <a:solidFill>
-                  <a:srgbClr val="5B4290"/>
+              <a:defRPr sz="2025" b="0">
+                <a:solidFill>
+                  <a:srgbClr val="29263B"/>
                 </a:solidFill>
                 <a:latin typeface="Microsoft YaHei"/>
                 <a:ea typeface="Microsoft YaHei"/>
@@ -11666,9 +12081,15 @@
           </a:lstStyle>
           <a:p xmlns:a="http://schemas.openxmlformats.org/drawingml/2006/main">
             <a:pPr>
-              <a:defRPr sz="1425" b="0">
-                <a:solidFill>
-                  <a:srgbClr val="5B4290"/>
+              <a:lnSpc>
+                <a:spcPct val="120000"/>
+              </a:lnSpc>
+              <a:spcAft>
+                <a:spcPts val="0"/>
+              </a:spcAft>
+              <a:defRPr sz="2025" b="0">
+                <a:solidFill>
+                  <a:srgbClr val="29263B"/>
                 </a:solidFill>
                 <a:latin typeface="Microsoft YaHei"/>
                 <a:ea typeface="Microsoft YaHei"/>
@@ -11676,29 +12097,181 @@
               </a:defRPr>
             </a:pPr>
             <a:r>
-              <a:rPr sz="1425" b="0">
-                <a:solidFill>
-                  <a:srgbClr val="5B4290"/>
-                </a:solidFill>
-                <a:latin typeface="Microsoft YaHei"/>
-                <a:ea typeface="Microsoft YaHei"/>
-                <a:cs typeface="Microsoft YaHei"/>
-                <a:hlinkClick xmlns:ns0="http://schemas.openxmlformats.org/officeDocument/2006/relationships" ns0:id="rIdCommandText"/>
-              </a:rPr>
-              <a:t>完整命令：P001_Windows/1.3.1-01.txt</a:t>
+              <a:t>数据库过旧时，返回 1.2.4 完成系统更新。</a:t>
+            </a:r>
+          </a:p>
+          <a:p xmlns:a="http://schemas.openxmlformats.org/drawingml/2006/main">
+            <a:pPr>
+              <a:lnSpc>
+                <a:spcPct val="120000"/>
+              </a:lnSpc>
+              <a:spcAft>
+                <a:spcPts val="0"/>
+              </a:spcAft>
+              <a:defRPr sz="2025" b="0">
+                <a:solidFill>
+                  <a:srgbClr val="29263B"/>
+                </a:solidFill>
+                <a:latin typeface="Microsoft YaHei"/>
+                <a:ea typeface="Microsoft YaHei"/>
+                <a:cs typeface="Microsoft YaHei"/>
+              </a:defRPr>
+            </a:pPr>
+            <a:r>
+              <a:t>不要单独 </a:t>
+            </a:r>
+            <a:r>
+              <a:rPr>
+                <a:solidFill>
+                  <a:srgbClr val="A02B93"/>
+                </a:solidFill>
+                <a:ea typeface="Microsoft YaHei"/>
+              </a:rPr>
+              <a:t>pacman</a:t>
+            </a:r>
+            <a:r>
+              <a:t> -Sy 后继续混装软件。</a:t>
             </a:r>
           </a:p>
         </p:txBody>
       </p:sp>
       <p:sp>
         <p:nvSpPr>
-          <p:cNvPr id="10" name="PageNumber">
-            <a:extLst xmlns:a="http://schemas.openxmlformats.org/drawingml/2006/main">
-              <a:ext uri="{FF2B5EF4-FFF2-40B4-BE49-F238E27FC236}">
-                <a16:creationId xmlns:a16="http://schemas.microsoft.com/office/drawing/2014/main" id="{5F85A1B3-CDCB-4F24-AA25-8EF48E1AD5EC}"/>
-              </a:ext>
-            </a:extLst>
-          </p:cNvPr>
+          <p:cNvPr id="7" name="Reading link"/>
+          <p:cNvSpPr>
+            <a:spLocks xmlns:a="http://schemas.openxmlformats.org/drawingml/2006/main" noGrp="1"/>
+          </p:cNvSpPr>
+          <p:nvPr/>
+        </p:nvSpPr>
+        <p:spPr>
+          <a:xfrm xmlns:a="http://schemas.openxmlformats.org/drawingml/2006/main">
+            <a:off x="609600" y="6105525"/>
+            <a:ext cx="6191250" cy="257175"/>
+          </a:xfrm>
+          <a:prstGeom xmlns:a="http://schemas.openxmlformats.org/drawingml/2006/main" prst="rect">
+            <a:avLst/>
+          </a:prstGeom>
+          <a:noFill xmlns:a="http://schemas.openxmlformats.org/drawingml/2006/main"/>
+          <a:ln xmlns:a="http://schemas.openxmlformats.org/drawingml/2006/main" w="0">
+            <a:noFill/>
+          </a:ln>
+        </p:spPr>
+        <p:txBody>
+          <a:bodyPr xmlns:a="http://schemas.openxmlformats.org/drawingml/2006/main" lIns="0" tIns="0" rIns="0" bIns="0" anchor="t">
+            <a:noAutofit/>
+          </a:bodyPr>
+          <a:lstStyle xmlns:a="http://schemas.openxmlformats.org/drawingml/2006/main">
+            <a:defPPr>
+              <a:defRPr sz="1275" b="0">
+                <a:solidFill>
+                  <a:srgbClr val="347D95"/>
+                </a:solidFill>
+                <a:latin typeface="Microsoft YaHei"/>
+                <a:ea typeface="Microsoft YaHei"/>
+                <a:cs typeface="Microsoft YaHei"/>
+              </a:defRPr>
+            </a:defPPr>
+          </a:lstStyle>
+          <a:p xmlns:a="http://schemas.openxmlformats.org/drawingml/2006/main">
+            <a:pPr>
+              <a:lnSpc>
+                <a:spcPct val="120000"/>
+              </a:lnSpc>
+              <a:spcAft>
+                <a:spcPts val="0"/>
+              </a:spcAft>
+              <a:defRPr sz="1275" b="0">
+                <a:solidFill>
+                  <a:srgbClr val="347D95"/>
+                </a:solidFill>
+                <a:latin typeface="Microsoft YaHei"/>
+                <a:ea typeface="Microsoft YaHei"/>
+                <a:cs typeface="Microsoft YaHei"/>
+              </a:defRPr>
+            </a:pPr>
+            <a:r>
+              <a:rPr>
+                <a:solidFill>
+                  <a:srgbClr val="347D95"/>
+                </a:solidFill>
+                <a:ea typeface="Microsoft YaHei"/>
+                <a:hlinkClick xmlns:ns0="http://schemas.openxmlformats.org/officeDocument/2006/relationships" ns0:id="rReading"/>
+              </a:rPr>
+              <a:t>完整解释与操作：配套 Markdown 1.3.1</a:t>
+            </a:r>
+          </a:p>
+        </p:txBody>
+      </p:sp>
+      <p:sp>
+        <p:nvSpPr>
+          <p:cNvPr id="8" name="Command link"/>
+          <p:cNvSpPr>
+            <a:spLocks xmlns:a="http://schemas.openxmlformats.org/drawingml/2006/main" noGrp="1"/>
+          </p:cNvSpPr>
+          <p:nvPr/>
+        </p:nvSpPr>
+        <p:spPr>
+          <a:xfrm xmlns:a="http://schemas.openxmlformats.org/drawingml/2006/main">
+            <a:off x="8191500" y="6105525"/>
+            <a:ext cx="3390900" cy="257175"/>
+          </a:xfrm>
+          <a:prstGeom xmlns:a="http://schemas.openxmlformats.org/drawingml/2006/main" prst="rect">
+            <a:avLst/>
+          </a:prstGeom>
+          <a:noFill xmlns:a="http://schemas.openxmlformats.org/drawingml/2006/main"/>
+          <a:ln xmlns:a="http://schemas.openxmlformats.org/drawingml/2006/main" w="0">
+            <a:noFill/>
+          </a:ln>
+        </p:spPr>
+        <p:txBody>
+          <a:bodyPr xmlns:a="http://schemas.openxmlformats.org/drawingml/2006/main" lIns="0" tIns="0" rIns="0" bIns="0" anchor="t">
+            <a:noAutofit/>
+          </a:bodyPr>
+          <a:lstStyle xmlns:a="http://schemas.openxmlformats.org/drawingml/2006/main">
+            <a:defPPr>
+              <a:defRPr sz="1275" b="0">
+                <a:solidFill>
+                  <a:srgbClr val="347D95"/>
+                </a:solidFill>
+                <a:latin typeface="Microsoft YaHei"/>
+                <a:ea typeface="Microsoft YaHei"/>
+                <a:cs typeface="Microsoft YaHei"/>
+              </a:defRPr>
+            </a:defPPr>
+          </a:lstStyle>
+          <a:p xmlns:a="http://schemas.openxmlformats.org/drawingml/2006/main">
+            <a:pPr>
+              <a:lnSpc>
+                <a:spcPct val="120000"/>
+              </a:lnSpc>
+              <a:spcAft>
+                <a:spcPts val="0"/>
+              </a:spcAft>
+              <a:defRPr sz="1275" b="0">
+                <a:solidFill>
+                  <a:srgbClr val="347D95"/>
+                </a:solidFill>
+                <a:latin typeface="Microsoft YaHei"/>
+                <a:ea typeface="Microsoft YaHei"/>
+                <a:cs typeface="Microsoft YaHei"/>
+              </a:defRPr>
+            </a:pPr>
+            <a:r>
+              <a:rPr>
+                <a:solidFill>
+                  <a:srgbClr val="347D95"/>
+                </a:solidFill>
+                <a:ea typeface="Microsoft YaHei"/>
+                <a:hlinkClick xmlns:ns1="http://schemas.openxmlformats.org/officeDocument/2006/relationships" ns1:id="rCommand"/>
+              </a:rPr>
+              <a:t>完整命令：打开 TXT</a:t>
+            </a:r>
+          </a:p>
+        </p:txBody>
+      </p:sp>
+      <p:sp>
+        <p:nvSpPr>
+          <p:cNvPr id="9" name="PageNumber"/>
           <p:cNvSpPr>
             <a:spLocks xmlns:a="http://schemas.openxmlformats.org/drawingml/2006/main" noGrp="1"/>
           </p:cNvSpPr>
@@ -11744,7 +12317,7 @@
                 <a:cs typeface="Microsoft YaHei"/>
               </a:defRPr>
             </a:pPr>
-            <a:fld id="{027E52C5-CC15-4656-8287-EEF85DD32B5D}" type="slidenum">
+            <a:fld id="{3F4252E3-3D30-4773-AD6C-787A364D4A6D}" type="slidenum">
               <a:rPr sz="1350">
                 <a:solidFill>
                   <a:srgbClr val="646173"/>
@@ -11753,17 +12326,12 @@
                 <a:ea typeface="Microsoft YaHei"/>
                 <a:cs typeface="Microsoft YaHei"/>
               </a:rPr>
-              <a:t>18</a:t>
+              <a:t>19</a:t>
             </a:fld>
           </a:p>
         </p:txBody>
       </p:sp>
     </p:spTree>
-    <p:extLst>
-      <p:ext uri="{BB962C8B-B14F-4D97-AF65-F5344CB8AC3E}">
-        <p14:creationId xmlns:p14="http://schemas.microsoft.com/office/powerpoint/2010/main" val="1093610149"/>
-      </p:ext>
-    </p:extLst>
   </p:cSld>
 </p:sld>
 </file>
@@ -12354,7 +12922,7 @@
                 <a:cs typeface="Microsoft YaHei"/>
               </a:defRPr>
             </a:pPr>
-            <a:fld id="{673371A0-1618-4480-9DC9-E101B6029B5B}" type="slidenum">
+            <a:fld id="{62AF446D-30B6-4CFD-9957-2ED0157AD6CF}" type="slidenum">
               <a:rPr sz="1350">
                 <a:solidFill>
                   <a:srgbClr val="646173"/>
@@ -12363,7 +12931,7 @@
                 <a:ea typeface="Microsoft YaHei"/>
                 <a:cs typeface="Microsoft YaHei"/>
               </a:rPr>
-              <a:t>20</a:t>
+              <a:t>22</a:t>
             </a:fld>
           </a:p>
         </p:txBody>
@@ -12879,7 +13447,7 @@
                 <a:cs typeface="Microsoft YaHei"/>
               </a:defRPr>
             </a:pPr>
-            <a:fld id="{4609EB3F-FD6B-4365-8FD0-3D883455864A}" type="slidenum">
+            <a:fld id="{3BF1C064-0BFB-459A-9193-DEE361492D64}" type="slidenum">
               <a:rPr sz="1350">
                 <a:solidFill>
                   <a:srgbClr val="646173"/>
@@ -12888,7 +13456,7 @@
                 <a:ea typeface="Microsoft YaHei"/>
                 <a:cs typeface="Microsoft YaHei"/>
               </a:rPr>
-              <a:t>21</a:t>
+              <a:t>23</a:t>
             </a:fld>
           </a:p>
         </p:txBody>
@@ -13556,7 +14124,7 @@
                 <a:cs typeface="Microsoft YaHei"/>
               </a:defRPr>
             </a:pPr>
-            <a:fld id="{909D3E3E-13E6-4428-8E0F-A8EC45A74F5E}" type="slidenum">
+            <a:fld id="{2C9E3666-7362-4913-9573-9C24FAB71B64}" type="slidenum">
               <a:rPr sz="1350">
                 <a:solidFill>
                   <a:srgbClr val="646173"/>
@@ -13565,7 +14133,7 @@
                 <a:ea typeface="Microsoft YaHei"/>
                 <a:cs typeface="Microsoft YaHei"/>
               </a:rPr>
-              <a:t>23</a:t>
+              <a:t>25</a:t>
             </a:fld>
           </a:p>
         </p:txBody>
@@ -14287,7 +14855,7 @@
                 <a:cs typeface="Microsoft YaHei"/>
               </a:defRPr>
             </a:pPr>
-            <a:fld id="{1A2E3CB7-4043-4134-9E38-C51D736B56C7}" type="slidenum">
+            <a:fld id="{831A1B04-E308-489C-8269-DC69CE097874}" type="slidenum">
               <a:rPr sz="1350">
                 <a:solidFill>
                   <a:srgbClr val="646173"/>
@@ -14296,7 +14864,7 @@
                 <a:ea typeface="Microsoft YaHei"/>
                 <a:cs typeface="Microsoft YaHei"/>
               </a:rPr>
-              <a:t>24</a:t>
+              <a:t>26</a:t>
             </a:fld>
           </a:p>
         </p:txBody>
@@ -14735,7 +15303,7 @@
                 <a:cs typeface="Microsoft YaHei"/>
               </a:defRPr>
             </a:pPr>
-            <a:fld id="{11378222-12C3-4B6E-86C5-AA1B76376C7F}" type="slidenum">
+            <a:fld id="{149EB3AA-EB56-48DA-A132-E44C1974F8EE}" type="slidenum">
               <a:rPr sz="1350">
                 <a:solidFill>
                   <a:srgbClr val="646173"/>
@@ -14744,7 +15312,7 @@
                 <a:ea typeface="Microsoft YaHei"/>
                 <a:cs typeface="Microsoft YaHei"/>
               </a:rPr>
-              <a:t>25</a:t>
+              <a:t>27</a:t>
             </a:fld>
           </a:p>
         </p:txBody>
@@ -15569,7 +16137,7 @@
                 <a:cs typeface="Microsoft YaHei"/>
               </a:defRPr>
             </a:pPr>
-            <a:fld id="{72B19AC1-E79E-4580-A124-840F741591F8}" type="slidenum">
+            <a:fld id="{66705E82-430E-40DC-9B6A-32395D03004B}" type="slidenum">
               <a:rPr sz="1350">
                 <a:solidFill>
                   <a:srgbClr val="646173"/>
@@ -15578,7 +16146,7 @@
                 <a:ea typeface="Microsoft YaHei"/>
                 <a:cs typeface="Microsoft YaHei"/>
               </a:rPr>
-              <a:t>27</a:t>
+              <a:t>29</a:t>
             </a:fld>
           </a:p>
         </p:txBody>
@@ -15814,7 +16382,7 @@
                 <a:ea typeface="Microsoft YaHei"/>
                 <a:cs typeface="Microsoft YaHei"/>
               </a:rPr>
-              <a:t>ZIP 已可进入 P002—P005，不必为了编译先补全部 Git 历史。</a:t>
+              <a:t>ZIP 已可从 P002 继续准备工程，不必为了编译先补全部 Git 历史。</a:t>
             </a:r>
           </a:p>
           <a:p xmlns:a="http://schemas.openxmlformats.org/drawingml/2006/main">
@@ -15962,7 +16530,7 @@
                 <a:cs typeface="Microsoft YaHei"/>
               </a:defRPr>
             </a:pPr>
-            <a:fld id="{4758EA1E-9015-4941-B175-02FD15C82791}" type="slidenum">
+            <a:fld id="{2708530C-9695-4236-BE88-F82487397CB3}" type="slidenum">
               <a:rPr sz="1350">
                 <a:solidFill>
                   <a:srgbClr val="646173"/>
@@ -15971,7 +16539,7 @@
                 <a:ea typeface="Microsoft YaHei"/>
                 <a:cs typeface="Microsoft YaHei"/>
               </a:rPr>
-              <a:t>29</a:t>
+              <a:t>31</a:t>
             </a:fld>
           </a:p>
         </p:txBody>
@@ -16664,7 +17232,7 @@
                 <a:cs typeface="Microsoft YaHei"/>
               </a:defRPr>
             </a:pPr>
-            <a:fld id="{101FF0EB-0D36-4442-BA17-DF24C5FBEE08}" type="slidenum">
+            <a:fld id="{6DB529CB-01E0-48AD-BBFF-866639890123}" type="slidenum">
               <a:rPr sz="1350">
                 <a:solidFill>
                   <a:srgbClr val="646173"/>
@@ -16673,7 +17241,7 @@
                 <a:ea typeface="Microsoft YaHei"/>
                 <a:cs typeface="Microsoft YaHei"/>
               </a:rPr>
-              <a:t>30</a:t>
+              <a:t>32</a:t>
             </a:fld>
           </a:p>
         </p:txBody>
@@ -17422,7 +17990,7 @@
                 <a:cs typeface="Microsoft YaHei"/>
               </a:defRPr>
             </a:pPr>
-            <a:fld id="{5710E637-678E-4A47-AADB-ED4C357B4386}" type="slidenum">
+            <a:fld id="{B3F612AE-29CC-4B02-812F-CBDA66B29A13}" type="slidenum">
               <a:rPr sz="1350">
                 <a:solidFill>
                   <a:srgbClr val="646173"/>
@@ -17431,7 +17999,7 @@
                 <a:ea typeface="Microsoft YaHei"/>
                 <a:cs typeface="Microsoft YaHei"/>
               </a:rPr>
-              <a:t>31</a:t>
+              <a:t>33</a:t>
             </a:fld>
           </a:p>
         </p:txBody>
@@ -17826,7 +18394,7 @@
                 <a:cs typeface="Microsoft YaHei"/>
               </a:defRPr>
             </a:pPr>
-            <a:fld id="{65A10FF1-191C-4F92-9CD7-0F7058B45C2E}" type="slidenum">
+            <a:fld id="{CE1EEB45-701F-4EF3-AB4A-A859DB684C83}" type="slidenum">
               <a:rPr sz="1350">
                 <a:solidFill>
                   <a:srgbClr val="646173"/>
@@ -17835,7 +18403,7 @@
                 <a:ea typeface="Microsoft YaHei"/>
                 <a:cs typeface="Microsoft YaHei"/>
               </a:rPr>
-              <a:t>5</a:t>
+              <a:t>6</a:t>
             </a:fld>
           </a:p>
         </p:txBody>
@@ -18636,7 +19204,7 @@
                 <a:cs typeface="Microsoft YaHei"/>
               </a:defRPr>
             </a:pPr>
-            <a:fld id="{37C46620-AE28-4276-8829-0856A1C7135E}" type="slidenum">
+            <a:fld id="{AD36F927-1E13-4145-8132-2088A13FD417}" type="slidenum">
               <a:rPr sz="1350">
                 <a:solidFill>
                   <a:srgbClr val="646173"/>
@@ -18645,7 +19213,7 @@
                 <a:ea typeface="Microsoft YaHei"/>
                 <a:cs typeface="Microsoft YaHei"/>
               </a:rPr>
-              <a:t>32</a:t>
+              <a:t>34</a:t>
             </a:fld>
           </a:p>
         </p:txBody>
@@ -19257,7 +19825,7 @@
                 <a:cs typeface="Microsoft YaHei"/>
               </a:defRPr>
             </a:pPr>
-            <a:fld id="{AA179FDD-7718-4B6B-8C45-F0E232EDE4F0}" type="slidenum">
+            <a:fld id="{88BA1B1B-2D0D-4064-8CF4-A19CCBB274FF}" type="slidenum">
               <a:rPr sz="1350">
                 <a:solidFill>
                   <a:srgbClr val="646173"/>
@@ -19266,7 +19834,7 @@
                 <a:ea typeface="Microsoft YaHei"/>
                 <a:cs typeface="Microsoft YaHei"/>
               </a:rPr>
-              <a:t>33</a:t>
+              <a:t>35</a:t>
             </a:fld>
           </a:p>
         </p:txBody>
@@ -19782,7 +20350,7 @@
                 <a:cs typeface="Microsoft YaHei"/>
               </a:defRPr>
             </a:pPr>
-            <a:fld id="{24D3158F-B746-4C73-B941-C9E570C4696F}" type="slidenum">
+            <a:fld id="{5CC70A3A-4F5D-40E4-8853-EC9A60F6F6C1}" type="slidenum">
               <a:rPr sz="1350">
                 <a:solidFill>
                   <a:srgbClr val="646173"/>
@@ -19791,7 +20359,7 @@
                 <a:ea typeface="Microsoft YaHei"/>
                 <a:cs typeface="Microsoft YaHei"/>
               </a:rPr>
-              <a:t>34</a:t>
+              <a:t>36</a:t>
             </a:fld>
           </a:p>
         </p:txBody>
@@ -20351,7 +20919,7 @@
                 <a:cs typeface="Microsoft YaHei"/>
               </a:defRPr>
             </a:pPr>
-            <a:fld id="{377AACCE-3DC4-4998-BD04-0E1E0066BE53}" type="slidenum">
+            <a:fld id="{F510AE97-E11C-4122-B327-13AB910668B4}" type="slidenum">
               <a:rPr sz="1350">
                 <a:solidFill>
                   <a:srgbClr val="646173"/>
@@ -20360,7 +20928,7 @@
                 <a:ea typeface="Microsoft YaHei"/>
                 <a:cs typeface="Microsoft YaHei"/>
               </a:rPr>
-              <a:t>35</a:t>
+              <a:t>37</a:t>
             </a:fld>
           </a:p>
         </p:txBody>
@@ -20939,7 +21507,7 @@
                 <a:cs typeface="Microsoft YaHei"/>
               </a:defRPr>
             </a:pPr>
-            <a:fld id="{A0B6E9B3-19B9-447C-B362-D9CE234863DF}" type="slidenum">
+            <a:fld id="{4A77CA0B-382A-472A-A797-275FBBEB9AAC}" type="slidenum">
               <a:rPr sz="1350">
                 <a:solidFill>
                   <a:srgbClr val="646173"/>
@@ -20948,7 +21516,7 @@
                 <a:ea typeface="Microsoft YaHei"/>
                 <a:cs typeface="Microsoft YaHei"/>
               </a:rPr>
-              <a:t>37</a:t>
+              <a:t>39</a:t>
             </a:fld>
           </a:p>
         </p:txBody>
@@ -21512,7 +22080,7 @@
                 <a:cs typeface="Microsoft YaHei"/>
               </a:defRPr>
             </a:pPr>
-            <a:fld id="{15909461-BF05-4500-92B5-63A43F54FD22}" type="slidenum">
+            <a:fld id="{E2FC909D-724C-4947-AC00-D3AB204EE245}" type="slidenum">
               <a:rPr sz="1350">
                 <a:solidFill>
                   <a:srgbClr val="646173"/>
@@ -21521,7 +22089,7 @@
                 <a:ea typeface="Microsoft YaHei"/>
                 <a:cs typeface="Microsoft YaHei"/>
               </a:rPr>
-              <a:t>38</a:t>
+              <a:t>40</a:t>
             </a:fld>
           </a:p>
         </p:txBody>
@@ -22328,7 +22896,7 @@
                 <a:cs typeface="Microsoft YaHei"/>
               </a:defRPr>
             </a:pPr>
-            <a:fld id="{152F1F2C-B655-4D95-8B43-C86D86EF32DC}" type="slidenum">
+            <a:fld id="{5F019725-297B-41F6-AB33-4281A086DDEB}" type="slidenum">
               <a:rPr sz="1350">
                 <a:solidFill>
                   <a:srgbClr val="646173"/>
@@ -22337,7 +22905,7 @@
                 <a:ea typeface="Microsoft YaHei"/>
                 <a:cs typeface="Microsoft YaHei"/>
               </a:rPr>
-              <a:t>39</a:t>
+              <a:t>41</a:t>
             </a:fld>
           </a:p>
         </p:txBody>
@@ -22934,7 +23502,7 @@
                 <a:cs typeface="Microsoft YaHei"/>
               </a:defRPr>
             </a:pPr>
-            <a:fld id="{2EB73FA1-CAFA-4850-8ADE-DBAC02195F7E}" type="slidenum">
+            <a:fld id="{A0CE41CC-2E31-4BB1-8E60-95CAC0941F26}" type="slidenum">
               <a:rPr sz="1350">
                 <a:solidFill>
                   <a:srgbClr val="646173"/>
@@ -22943,7 +23511,7 @@
                 <a:ea typeface="Microsoft YaHei"/>
                 <a:cs typeface="Microsoft YaHei"/>
               </a:rPr>
-              <a:t>40</a:t>
+              <a:t>42</a:t>
             </a:fld>
           </a:p>
         </p:txBody>
@@ -23496,7 +24064,7 @@
                 <a:cs typeface="Microsoft YaHei"/>
               </a:defRPr>
             </a:pPr>
-            <a:fld id="{40035FFE-70A2-49DF-9281-52C39322AFDB}" type="slidenum">
+            <a:fld id="{95ADE4D4-8EC8-4A90-8E09-38FDA2164FFC}" type="slidenum">
               <a:rPr sz="1350">
                 <a:solidFill>
                   <a:srgbClr val="646173"/>
@@ -23505,7 +24073,7 @@
                 <a:ea typeface="Microsoft YaHei"/>
                 <a:cs typeface="Microsoft YaHei"/>
               </a:rPr>
-              <a:t>9</a:t>
+              <a:t>10</a:t>
             </a:fld>
           </a:p>
         </p:txBody>
@@ -24338,7 +24906,7 @@
                 <a:cs typeface="Microsoft YaHei"/>
               </a:defRPr>
             </a:pPr>
-            <a:fld id="{5F1D6854-CD1C-44CE-A9F1-269EFAE4A391}" type="slidenum">
+            <a:fld id="{AAC6DB47-0C14-4A95-94E9-538E2CBF3B63}" type="slidenum">
               <a:rPr sz="1350">
                 <a:solidFill>
                   <a:srgbClr val="646173"/>
@@ -24347,7 +24915,7 @@
                 <a:ea typeface="Microsoft YaHei"/>
                 <a:cs typeface="Microsoft YaHei"/>
               </a:rPr>
-              <a:t>11</a:t>
+              <a:t>12</a:t>
             </a:fld>
           </a:p>
         </p:txBody>
@@ -25040,7 +25608,7 @@
                 <a:cs typeface="Microsoft YaHei"/>
               </a:defRPr>
             </a:pPr>
-            <a:fld id="{7831EBC5-4B64-47F3-A656-32D006428B8A}" type="slidenum">
+            <a:fld id="{31DCBA52-7E7D-4D3C-B9AE-AAF0E0709060}" type="slidenum">
               <a:rPr sz="1350">
                 <a:solidFill>
                   <a:srgbClr val="646173"/>
@@ -25049,7 +25617,7 @@
                 <a:ea typeface="Microsoft YaHei"/>
                 <a:cs typeface="Microsoft YaHei"/>
               </a:rPr>
-              <a:t>12</a:t>
+              <a:t>13</a:t>
             </a:fld>
           </a:p>
         </p:txBody>
@@ -25709,7 +26277,7 @@
                 <a:cs typeface="Microsoft YaHei"/>
               </a:defRPr>
             </a:pPr>
-            <a:fld id="{A6BD0EA3-B3B9-4CB5-9D79-D7949B9E0FAD}" type="slidenum">
+            <a:fld id="{9E2DA28B-7CA7-4507-AE3C-0C356D643A02}" type="slidenum">
               <a:rPr sz="1350">
                 <a:solidFill>
                   <a:srgbClr val="646173"/>
@@ -25718,7 +26286,7 @@
                 <a:ea typeface="Microsoft YaHei"/>
                 <a:cs typeface="Microsoft YaHei"/>
               </a:rPr>
-              <a:t>13</a:t>
+              <a:t>14</a:t>
             </a:fld>
           </a:p>
         </p:txBody>
@@ -26374,7 +26942,7 @@
                 <a:cs typeface="Microsoft YaHei"/>
               </a:defRPr>
             </a:pPr>
-            <a:fld id="{A3FEA38A-3616-4B7C-A822-84315804BE0F}" type="slidenum">
+            <a:fld id="{49D05521-721A-400B-ACB6-48B618900A10}" type="slidenum">
               <a:rPr sz="1350">
                 <a:solidFill>
                   <a:srgbClr val="646173"/>
@@ -26383,7 +26951,7 @@
                 <a:ea typeface="Microsoft YaHei"/>
                 <a:cs typeface="Microsoft YaHei"/>
               </a:rPr>
-              <a:t>15</a:t>
+              <a:t>16</a:t>
             </a:fld>
           </a:p>
         </p:txBody>
@@ -26866,7 +27434,7 @@
                 <a:cs typeface="Microsoft YaHei"/>
               </a:defRPr>
             </a:pPr>
-            <a:fld id="{E96EB368-19A9-4E71-B7C1-F5B26E16EB2A}" type="slidenum">
+            <a:fld id="{D7D9EFF9-C619-49E1-A3CF-E5FABEF10554}" type="slidenum">
               <a:rPr sz="1350">
                 <a:solidFill>
                   <a:srgbClr val="646173"/>
@@ -26875,7 +27443,7 @@
                 <a:ea typeface="Microsoft YaHei"/>
                 <a:cs typeface="Microsoft YaHei"/>
               </a:rPr>
-              <a:t>16</a:t>
+              <a:t>17</a:t>
             </a:fld>
           </a:p>
         </p:txBody>
@@ -27358,7 +27926,7 @@
                 <a:cs typeface="Microsoft YaHei"/>
               </a:defRPr>
             </a:pPr>
-            <a:fld id="{39E0DAE4-6F9B-4D8D-BD2E-0D1EECC05791}" type="slidenum">
+            <a:fld id="{49D35F50-5A64-44AA-8D65-2BB420170AAA}" type="slidenum">
               <a:rPr sz="1350">
                 <a:solidFill>
                   <a:srgbClr val="646173"/>
@@ -27367,7 +27935,7 @@
                 <a:ea typeface="Microsoft YaHei"/>
                 <a:cs typeface="Microsoft YaHei"/>
               </a:rPr>
-              <a:t>17</a:t>
+              <a:t>18</a:t>
             </a:fld>
           </a:p>
         </p:txBody>
@@ -27379,6 +27947,1794 @@
       </p:ext>
     </p:extLst>
   </p:cSld>
+</p:sld>
+</file>
+
+<file path=ppt/slides/git_env2.xml><?xml version="1.0" encoding="utf-8"?>
+<p:sld xmlns:p="http://schemas.openxmlformats.org/presentationml/2006/main" showMasterSp="1">
+  <p:cSld>
+    <p:bg>
+      <p:bgPr>
+        <a:solidFill xmlns:a="http://schemas.openxmlformats.org/drawingml/2006/main">
+          <a:srgbClr val="FFFFFF"/>
+        </a:solidFill>
+      </p:bgPr>
+    </p:bg>
+    <p:spTree>
+      <p:nvGrpSpPr>
+        <p:cNvPr id="1" name=""/>
+        <p:cNvGrpSpPr/>
+        <p:nvPr/>
+      </p:nvGrpSpPr>
+      <p:grpSpPr>
+        <a:xfrm xmlns:a="http://schemas.openxmlformats.org/drawingml/2006/main"/>
+      </p:grpSpPr>
+      <p:sp>
+        <p:nvSpPr>
+          <p:cNvPr id="2" name="Title"/>
+          <p:cNvSpPr>
+            <a:spLocks xmlns:a="http://schemas.openxmlformats.org/drawingml/2006/main" noGrp="1"/>
+          </p:cNvSpPr>
+          <p:nvPr/>
+        </p:nvSpPr>
+        <p:spPr>
+          <a:xfrm xmlns:a="http://schemas.openxmlformats.org/drawingml/2006/main">
+            <a:off x="609600" y="400050"/>
+            <a:ext cx="10972800" cy="723900"/>
+          </a:xfrm>
+          <a:prstGeom xmlns:a="http://schemas.openxmlformats.org/drawingml/2006/main" prst="rect">
+            <a:avLst/>
+          </a:prstGeom>
+          <a:noFill xmlns:a="http://schemas.openxmlformats.org/drawingml/2006/main"/>
+          <a:ln xmlns:a="http://schemas.openxmlformats.org/drawingml/2006/main" w="0">
+            <a:noFill/>
+          </a:ln>
+        </p:spPr>
+        <p:txBody>
+          <a:bodyPr xmlns:a="http://schemas.openxmlformats.org/drawingml/2006/main" lIns="0" tIns="0" rIns="0" bIns="0" anchor="t">
+            <a:noAutofit/>
+          </a:bodyPr>
+          <a:lstStyle xmlns:a="http://schemas.openxmlformats.org/drawingml/2006/main">
+            <a:defPPr>
+              <a:defRPr sz="3000" b="1">
+                <a:solidFill>
+                  <a:srgbClr val="29263B"/>
+                </a:solidFill>
+                <a:latin typeface="Microsoft YaHei"/>
+                <a:ea typeface="Microsoft YaHei"/>
+                <a:cs typeface="Microsoft YaHei"/>
+              </a:defRPr>
+            </a:defPPr>
+          </a:lstStyle>
+          <a:p xmlns:a="http://schemas.openxmlformats.org/drawingml/2006/main">
+            <a:pPr>
+              <a:lnSpc>
+                <a:spcPct val="120000"/>
+              </a:lnSpc>
+              <a:spcAft>
+                <a:spcPts val="0"/>
+              </a:spcAft>
+              <a:defRPr sz="3000" b="1">
+                <a:solidFill>
+                  <a:srgbClr val="29263B"/>
+                </a:solidFill>
+                <a:latin typeface="Microsoft YaHei"/>
+                <a:ea typeface="Microsoft YaHei"/>
+                <a:cs typeface="Microsoft YaHei"/>
+              </a:defRPr>
+            </a:pPr>
+            <a:r>
+              <a:t>安装后，确认 Bash 真正选中了哪套 Git</a:t>
+            </a:r>
+          </a:p>
+        </p:txBody>
+      </p:sp>
+      <p:sp>
+        <p:nvSpPr>
+          <p:cNvPr id="3" name="Stage"/>
+          <p:cNvSpPr>
+            <a:spLocks xmlns:a="http://schemas.openxmlformats.org/drawingml/2006/main" noGrp="1"/>
+          </p:cNvSpPr>
+          <p:nvPr/>
+        </p:nvSpPr>
+        <p:spPr>
+          <a:xfrm xmlns:a="http://schemas.openxmlformats.org/drawingml/2006/main">
+            <a:off x="609600" y="1209675"/>
+            <a:ext cx="10972800" cy="333375"/>
+          </a:xfrm>
+          <a:prstGeom xmlns:a="http://schemas.openxmlformats.org/drawingml/2006/main" prst="rect">
+            <a:avLst/>
+          </a:prstGeom>
+          <a:noFill xmlns:a="http://schemas.openxmlformats.org/drawingml/2006/main"/>
+          <a:ln xmlns:a="http://schemas.openxmlformats.org/drawingml/2006/main" w="0">
+            <a:noFill/>
+          </a:ln>
+        </p:spPr>
+        <p:txBody>
+          <a:bodyPr xmlns:a="http://schemas.openxmlformats.org/drawingml/2006/main" lIns="0" tIns="0" rIns="0" bIns="0" anchor="t">
+            <a:noAutofit/>
+          </a:bodyPr>
+          <a:lstStyle xmlns:a="http://schemas.openxmlformats.org/drawingml/2006/main">
+            <a:defPPr>
+              <a:defRPr sz="1650" b="0">
+                <a:solidFill>
+                  <a:srgbClr val="7350BC"/>
+                </a:solidFill>
+                <a:latin typeface="Microsoft YaHei"/>
+                <a:ea typeface="Microsoft YaHei"/>
+                <a:cs typeface="Microsoft YaHei"/>
+              </a:defRPr>
+            </a:defPPr>
+          </a:lstStyle>
+          <a:p xmlns:a="http://schemas.openxmlformats.org/drawingml/2006/main">
+            <a:pPr>
+              <a:lnSpc>
+                <a:spcPct val="120000"/>
+              </a:lnSpc>
+              <a:spcAft>
+                <a:spcPts val="0"/>
+              </a:spcAft>
+              <a:defRPr sz="1650" b="0">
+                <a:solidFill>
+                  <a:srgbClr val="7350BC"/>
+                </a:solidFill>
+                <a:latin typeface="Microsoft YaHei"/>
+                <a:ea typeface="Microsoft YaHei"/>
+                <a:cs typeface="Microsoft YaHei"/>
+              </a:defRPr>
+            </a:pPr>
+            <a:r>
+              <a:rPr>
+                <a:solidFill>
+                  <a:srgbClr val="7350BC"/>
+                </a:solidFill>
+                <a:ea typeface="Microsoft YaHei"/>
+              </a:rPr>
+              <a:t>1.3.1 · Git 版本可用，还要检查来源路径</a:t>
+            </a:r>
+          </a:p>
+        </p:txBody>
+      </p:sp>
+      <p:sp>
+        <p:nvSpPr>
+          <p:cNvPr id="4" name="Continuous code"/>
+          <p:cNvSpPr>
+            <a:spLocks xmlns:a="http://schemas.openxmlformats.org/drawingml/2006/main" noGrp="1"/>
+          </p:cNvSpPr>
+          <p:nvPr/>
+        </p:nvSpPr>
+        <p:spPr>
+          <a:xfrm xmlns:a="http://schemas.openxmlformats.org/drawingml/2006/main">
+            <a:off x="609600" y="1771650"/>
+            <a:ext cx="10972800" cy="1485900"/>
+          </a:xfrm>
+          <a:prstGeom xmlns:a="http://schemas.openxmlformats.org/drawingml/2006/main" prst="rect">
+            <a:avLst/>
+          </a:prstGeom>
+          <a:noFill xmlns:a="http://schemas.openxmlformats.org/drawingml/2006/main"/>
+          <a:ln xmlns:a="http://schemas.openxmlformats.org/drawingml/2006/main" w="0">
+            <a:noFill/>
+          </a:ln>
+        </p:spPr>
+        <p:txBody>
+          <a:bodyPr xmlns:a="http://schemas.openxmlformats.org/drawingml/2006/main" lIns="0" tIns="0" rIns="0" bIns="0" anchor="t">
+            <a:noAutofit/>
+          </a:bodyPr>
+          <a:lstStyle xmlns:a="http://schemas.openxmlformats.org/drawingml/2006/main">
+            <a:defPPr>
+              <a:defRPr sz="1875" b="0">
+                <a:solidFill>
+                  <a:srgbClr val="29263B"/>
+                </a:solidFill>
+                <a:latin typeface="Consolas"/>
+                <a:ea typeface="Microsoft YaHei"/>
+                <a:cs typeface="Consolas"/>
+              </a:defRPr>
+            </a:defPPr>
+          </a:lstStyle>
+          <a:p xmlns:a="http://schemas.openxmlformats.org/drawingml/2006/main">
+            <a:pPr>
+              <a:lnSpc>
+                <a:spcPct val="120000"/>
+              </a:lnSpc>
+              <a:spcAft>
+                <a:spcPts val="0"/>
+              </a:spcAft>
+              <a:defRPr sz="1875" b="0">
+                <a:solidFill>
+                  <a:srgbClr val="29263B"/>
+                </a:solidFill>
+                <a:latin typeface="Consolas"/>
+                <a:ea typeface="Microsoft YaHei"/>
+                <a:cs typeface="Consolas"/>
+              </a:defRPr>
+            </a:pPr>
+            <a:r>
+              <a:rPr>
+                <a:solidFill>
+                  <a:srgbClr val="646173"/>
+                </a:solidFill>
+                <a:ea typeface="Microsoft YaHei"/>
+              </a:rPr>
+              <a:t># Windows UCRT64；任意目录。</a:t>
+            </a:r>
+          </a:p>
+          <a:p xmlns:a="http://schemas.openxmlformats.org/drawingml/2006/main">
+            <a:pPr>
+              <a:lnSpc>
+                <a:spcPct val="120000"/>
+              </a:lnSpc>
+              <a:spcAft>
+                <a:spcPts val="0"/>
+              </a:spcAft>
+              <a:defRPr sz="1875" b="0">
+                <a:solidFill>
+                  <a:srgbClr val="29263B"/>
+                </a:solidFill>
+                <a:latin typeface="Consolas"/>
+                <a:ea typeface="Microsoft YaHei"/>
+                <a:cs typeface="Consolas"/>
+              </a:defRPr>
+            </a:pPr>
+            <a:r>
+              <a:rPr>
+                <a:solidFill>
+                  <a:srgbClr val="A02B93"/>
+                </a:solidFill>
+                <a:ea typeface="Microsoft YaHei"/>
+              </a:rPr>
+              <a:t>type</a:t>
+            </a:r>
+            <a:r>
+              <a:t> -a </a:t>
+            </a:r>
+            <a:r>
+              <a:rPr>
+                <a:solidFill>
+                  <a:srgbClr val="A02B93"/>
+                </a:solidFill>
+                <a:ea typeface="Microsoft YaHei"/>
+              </a:rPr>
+              <a:t>git</a:t>
+            </a:r>
+          </a:p>
+          <a:p xmlns:a="http://schemas.openxmlformats.org/drawingml/2006/main">
+            <a:pPr>
+              <a:lnSpc>
+                <a:spcPct val="120000"/>
+              </a:lnSpc>
+              <a:spcAft>
+                <a:spcPts val="0"/>
+              </a:spcAft>
+              <a:defRPr sz="1875" b="0">
+                <a:solidFill>
+                  <a:srgbClr val="29263B"/>
+                </a:solidFill>
+                <a:latin typeface="Consolas"/>
+                <a:ea typeface="Microsoft YaHei"/>
+                <a:cs typeface="Consolas"/>
+              </a:defRPr>
+            </a:pPr>
+            <a:r>
+              <a:rPr>
+                <a:solidFill>
+                  <a:srgbClr val="A02B93"/>
+                </a:solidFill>
+                <a:ea typeface="Microsoft YaHei"/>
+              </a:rPr>
+              <a:t>command</a:t>
+            </a:r>
+            <a:r>
+              <a:t> -v </a:t>
+            </a:r>
+            <a:r>
+              <a:rPr>
+                <a:solidFill>
+                  <a:srgbClr val="A02B93"/>
+                </a:solidFill>
+                <a:ea typeface="Microsoft YaHei"/>
+              </a:rPr>
+              <a:t>git</a:t>
+            </a:r>
+          </a:p>
+          <a:p xmlns:a="http://schemas.openxmlformats.org/drawingml/2006/main">
+            <a:pPr>
+              <a:lnSpc>
+                <a:spcPct val="120000"/>
+              </a:lnSpc>
+              <a:spcAft>
+                <a:spcPts val="0"/>
+              </a:spcAft>
+              <a:defRPr sz="1875" b="0">
+                <a:solidFill>
+                  <a:srgbClr val="29263B"/>
+                </a:solidFill>
+                <a:latin typeface="Consolas"/>
+                <a:ea typeface="Microsoft YaHei"/>
+                <a:cs typeface="Consolas"/>
+              </a:defRPr>
+            </a:pPr>
+            <a:r>
+              <a:rPr>
+                <a:solidFill>
+                  <a:srgbClr val="A02B93"/>
+                </a:solidFill>
+                <a:ea typeface="Microsoft YaHei"/>
+              </a:rPr>
+              <a:t>git</a:t>
+            </a:r>
+            <a:r>
+              <a:t> --version</a:t>
+            </a:r>
+          </a:p>
+        </p:txBody>
+      </p:sp>
+      <p:sp>
+        <p:nvSpPr>
+          <p:cNvPr id="5" name="Body 0"/>
+          <p:cNvSpPr>
+            <a:spLocks xmlns:a="http://schemas.openxmlformats.org/drawingml/2006/main" noGrp="1"/>
+          </p:cNvSpPr>
+          <p:nvPr/>
+        </p:nvSpPr>
+        <p:spPr>
+          <a:xfrm xmlns:a="http://schemas.openxmlformats.org/drawingml/2006/main">
+            <a:off x="609600" y="3448050"/>
+            <a:ext cx="10972800" cy="717042"/>
+          </a:xfrm>
+          <a:prstGeom xmlns:a="http://schemas.openxmlformats.org/drawingml/2006/main" prst="rect">
+            <a:avLst/>
+          </a:prstGeom>
+          <a:noFill xmlns:a="http://schemas.openxmlformats.org/drawingml/2006/main"/>
+          <a:ln xmlns:a="http://schemas.openxmlformats.org/drawingml/2006/main" w="0">
+            <a:noFill/>
+          </a:ln>
+        </p:spPr>
+        <p:txBody>
+          <a:bodyPr xmlns:a="http://schemas.openxmlformats.org/drawingml/2006/main" lIns="0" tIns="0" rIns="0" bIns="0" anchor="t">
+            <a:noAutofit/>
+          </a:bodyPr>
+          <a:lstStyle xmlns:a="http://schemas.openxmlformats.org/drawingml/2006/main">
+            <a:defPPr>
+              <a:defRPr sz="2025" b="0">
+                <a:solidFill>
+                  <a:srgbClr val="29263B"/>
+                </a:solidFill>
+                <a:latin typeface="Microsoft YaHei"/>
+                <a:ea typeface="Microsoft YaHei"/>
+                <a:cs typeface="Microsoft YaHei"/>
+              </a:defRPr>
+            </a:defPPr>
+          </a:lstStyle>
+          <a:p xmlns:a="http://schemas.openxmlformats.org/drawingml/2006/main">
+            <a:pPr>
+              <a:lnSpc>
+                <a:spcPct val="120000"/>
+              </a:lnSpc>
+              <a:spcAft>
+                <a:spcPts val="0"/>
+              </a:spcAft>
+              <a:defRPr sz="2025" b="0">
+                <a:solidFill>
+                  <a:srgbClr val="29263B"/>
+                </a:solidFill>
+                <a:latin typeface="Microsoft YaHei"/>
+                <a:ea typeface="Microsoft YaHei"/>
+                <a:cs typeface="Microsoft YaHei"/>
+              </a:defRPr>
+            </a:pPr>
+            <a:r>
+              <a:t>本教程主线应优先找到 </a:t>
+            </a:r>
+            <a:r>
+              <a:rPr>
+                <a:solidFill>
+                  <a:srgbClr val="0070C0"/>
+                </a:solidFill>
+                <a:ea typeface="Microsoft YaHei"/>
+              </a:rPr>
+              <a:t>/ucrt64/bin/git（或</a:t>
+            </a:r>
+            <a:r>
+              <a:t> </a:t>
+            </a:r>
+            <a:r>
+              <a:rPr>
+                <a:solidFill>
+                  <a:srgbClr val="A02B93"/>
+                </a:solidFill>
+                <a:ea typeface="Microsoft YaHei"/>
+              </a:rPr>
+              <a:t>git</a:t>
+            </a:r>
+            <a:r>
+              <a:t>.exe）。</a:t>
+            </a:r>
+          </a:p>
+          <a:p xmlns:a="http://schemas.openxmlformats.org/drawingml/2006/main">
+            <a:pPr>
+              <a:lnSpc>
+                <a:spcPct val="120000"/>
+              </a:lnSpc>
+              <a:spcAft>
+                <a:spcPts val="0"/>
+              </a:spcAft>
+              <a:defRPr sz="2025" b="0">
+                <a:solidFill>
+                  <a:srgbClr val="29263B"/>
+                </a:solidFill>
+                <a:latin typeface="Microsoft YaHei"/>
+                <a:ea typeface="Microsoft YaHei"/>
+                <a:cs typeface="Microsoft YaHei"/>
+              </a:defRPr>
+            </a:pPr>
+            <a:r>
+              <a:t>若仍是 </a:t>
+            </a:r>
+            <a:r>
+              <a:rPr>
+                <a:solidFill>
+                  <a:srgbClr val="0070C0"/>
+                </a:solidFill>
+                <a:ea typeface="Microsoft YaHei"/>
+              </a:rPr>
+              <a:t>/usr/bin/git</a:t>
+            </a:r>
+            <a:r>
+              <a:t>，先停止源码与模块下载，修正路径选择。</a:t>
+            </a:r>
+          </a:p>
+        </p:txBody>
+      </p:sp>
+      <p:sp>
+        <p:nvSpPr>
+          <p:cNvPr id="6" name="Body 1"/>
+          <p:cNvSpPr>
+            <a:spLocks xmlns:a="http://schemas.openxmlformats.org/drawingml/2006/main" noGrp="1"/>
+          </p:cNvSpPr>
+          <p:nvPr/>
+        </p:nvSpPr>
+        <p:spPr>
+          <a:xfrm xmlns:a="http://schemas.openxmlformats.org/drawingml/2006/main">
+            <a:off x="609600" y="4336542"/>
+            <a:ext cx="10972800" cy="717042"/>
+          </a:xfrm>
+          <a:prstGeom xmlns:a="http://schemas.openxmlformats.org/drawingml/2006/main" prst="rect">
+            <a:avLst/>
+          </a:prstGeom>
+          <a:noFill xmlns:a="http://schemas.openxmlformats.org/drawingml/2006/main"/>
+          <a:ln xmlns:a="http://schemas.openxmlformats.org/drawingml/2006/main" w="0">
+            <a:noFill/>
+          </a:ln>
+        </p:spPr>
+        <p:txBody>
+          <a:bodyPr xmlns:a="http://schemas.openxmlformats.org/drawingml/2006/main" lIns="0" tIns="0" rIns="0" bIns="0" anchor="t">
+            <a:noAutofit/>
+          </a:bodyPr>
+          <a:lstStyle xmlns:a="http://schemas.openxmlformats.org/drawingml/2006/main">
+            <a:defPPr>
+              <a:defRPr sz="2025" b="0">
+                <a:solidFill>
+                  <a:srgbClr val="29263B"/>
+                </a:solidFill>
+                <a:latin typeface="Microsoft YaHei"/>
+                <a:ea typeface="Microsoft YaHei"/>
+                <a:cs typeface="Microsoft YaHei"/>
+              </a:defRPr>
+            </a:defPPr>
+          </a:lstStyle>
+          <a:p xmlns:a="http://schemas.openxmlformats.org/drawingml/2006/main">
+            <a:pPr>
+              <a:lnSpc>
+                <a:spcPct val="120000"/>
+              </a:lnSpc>
+              <a:spcAft>
+                <a:spcPts val="0"/>
+              </a:spcAft>
+              <a:defRPr sz="2025" b="0">
+                <a:solidFill>
+                  <a:srgbClr val="29263B"/>
+                </a:solidFill>
+                <a:latin typeface="Microsoft YaHei"/>
+                <a:ea typeface="Microsoft YaHei"/>
+                <a:cs typeface="Microsoft YaHei"/>
+              </a:defRPr>
+            </a:pPr>
+            <a:r>
+              <a:rPr>
+                <a:solidFill>
+                  <a:srgbClr val="A02B93"/>
+                </a:solidFill>
+                <a:ea typeface="Microsoft YaHei"/>
+              </a:rPr>
+              <a:t>type</a:t>
+            </a:r>
+            <a:r>
+              <a:t> -a 若显示别名或函数，先查明是否遮蔽了 PATH 中的程序。</a:t>
+            </a:r>
+          </a:p>
+          <a:p xmlns:a="http://schemas.openxmlformats.org/drawingml/2006/main">
+            <a:pPr>
+              <a:lnSpc>
+                <a:spcPct val="120000"/>
+              </a:lnSpc>
+              <a:spcAft>
+                <a:spcPts val="0"/>
+              </a:spcAft>
+              <a:defRPr sz="2025" b="0">
+                <a:solidFill>
+                  <a:srgbClr val="29263B"/>
+                </a:solidFill>
+                <a:latin typeface="Microsoft YaHei"/>
+                <a:ea typeface="Microsoft YaHei"/>
+                <a:cs typeface="Microsoft YaHei"/>
+              </a:defRPr>
+            </a:pPr>
+            <a:r>
+              <a:t>P002 激活 Windows Python 的 .venv 后，还要检查它找到的 Git。</a:t>
+            </a:r>
+          </a:p>
+        </p:txBody>
+      </p:sp>
+      <p:sp>
+        <p:nvSpPr>
+          <p:cNvPr id="7" name="Reading link"/>
+          <p:cNvSpPr>
+            <a:spLocks xmlns:a="http://schemas.openxmlformats.org/drawingml/2006/main" noGrp="1"/>
+          </p:cNvSpPr>
+          <p:nvPr/>
+        </p:nvSpPr>
+        <p:spPr>
+          <a:xfrm xmlns:a="http://schemas.openxmlformats.org/drawingml/2006/main">
+            <a:off x="609600" y="6105525"/>
+            <a:ext cx="6191250" cy="257175"/>
+          </a:xfrm>
+          <a:prstGeom xmlns:a="http://schemas.openxmlformats.org/drawingml/2006/main" prst="rect">
+            <a:avLst/>
+          </a:prstGeom>
+          <a:noFill xmlns:a="http://schemas.openxmlformats.org/drawingml/2006/main"/>
+          <a:ln xmlns:a="http://schemas.openxmlformats.org/drawingml/2006/main" w="0">
+            <a:noFill/>
+          </a:ln>
+        </p:spPr>
+        <p:txBody>
+          <a:bodyPr xmlns:a="http://schemas.openxmlformats.org/drawingml/2006/main" lIns="0" tIns="0" rIns="0" bIns="0" anchor="t">
+            <a:noAutofit/>
+          </a:bodyPr>
+          <a:lstStyle xmlns:a="http://schemas.openxmlformats.org/drawingml/2006/main">
+            <a:defPPr>
+              <a:defRPr sz="1275" b="0">
+                <a:solidFill>
+                  <a:srgbClr val="347D95"/>
+                </a:solidFill>
+                <a:latin typeface="Microsoft YaHei"/>
+                <a:ea typeface="Microsoft YaHei"/>
+                <a:cs typeface="Microsoft YaHei"/>
+              </a:defRPr>
+            </a:defPPr>
+          </a:lstStyle>
+          <a:p xmlns:a="http://schemas.openxmlformats.org/drawingml/2006/main">
+            <a:pPr>
+              <a:lnSpc>
+                <a:spcPct val="120000"/>
+              </a:lnSpc>
+              <a:spcAft>
+                <a:spcPts val="0"/>
+              </a:spcAft>
+              <a:defRPr sz="1275" b="0">
+                <a:solidFill>
+                  <a:srgbClr val="347D95"/>
+                </a:solidFill>
+                <a:latin typeface="Microsoft YaHei"/>
+                <a:ea typeface="Microsoft YaHei"/>
+                <a:cs typeface="Microsoft YaHei"/>
+              </a:defRPr>
+            </a:pPr>
+            <a:r>
+              <a:rPr>
+                <a:solidFill>
+                  <a:srgbClr val="347D95"/>
+                </a:solidFill>
+                <a:ea typeface="Microsoft YaHei"/>
+                <a:hlinkClick xmlns:ns0="http://schemas.openxmlformats.org/officeDocument/2006/relationships" ns0:id="rReading"/>
+              </a:rPr>
+              <a:t>完整解释与操作：配套 Markdown 1.3.1</a:t>
+            </a:r>
+          </a:p>
+        </p:txBody>
+      </p:sp>
+      <p:sp>
+        <p:nvSpPr>
+          <p:cNvPr id="8" name="Command link"/>
+          <p:cNvSpPr>
+            <a:spLocks xmlns:a="http://schemas.openxmlformats.org/drawingml/2006/main" noGrp="1"/>
+          </p:cNvSpPr>
+          <p:nvPr/>
+        </p:nvSpPr>
+        <p:spPr>
+          <a:xfrm xmlns:a="http://schemas.openxmlformats.org/drawingml/2006/main">
+            <a:off x="8191500" y="6105525"/>
+            <a:ext cx="3390900" cy="257175"/>
+          </a:xfrm>
+          <a:prstGeom xmlns:a="http://schemas.openxmlformats.org/drawingml/2006/main" prst="rect">
+            <a:avLst/>
+          </a:prstGeom>
+          <a:noFill xmlns:a="http://schemas.openxmlformats.org/drawingml/2006/main"/>
+          <a:ln xmlns:a="http://schemas.openxmlformats.org/drawingml/2006/main" w="0">
+            <a:noFill/>
+          </a:ln>
+        </p:spPr>
+        <p:txBody>
+          <a:bodyPr xmlns:a="http://schemas.openxmlformats.org/drawingml/2006/main" lIns="0" tIns="0" rIns="0" bIns="0" anchor="t">
+            <a:noAutofit/>
+          </a:bodyPr>
+          <a:lstStyle xmlns:a="http://schemas.openxmlformats.org/drawingml/2006/main">
+            <a:defPPr>
+              <a:defRPr sz="1275" b="0">
+                <a:solidFill>
+                  <a:srgbClr val="347D95"/>
+                </a:solidFill>
+                <a:latin typeface="Microsoft YaHei"/>
+                <a:ea typeface="Microsoft YaHei"/>
+                <a:cs typeface="Microsoft YaHei"/>
+              </a:defRPr>
+            </a:defPPr>
+          </a:lstStyle>
+          <a:p xmlns:a="http://schemas.openxmlformats.org/drawingml/2006/main">
+            <a:pPr>
+              <a:lnSpc>
+                <a:spcPct val="120000"/>
+              </a:lnSpc>
+              <a:spcAft>
+                <a:spcPts val="0"/>
+              </a:spcAft>
+              <a:defRPr sz="1275" b="0">
+                <a:solidFill>
+                  <a:srgbClr val="347D95"/>
+                </a:solidFill>
+                <a:latin typeface="Microsoft YaHei"/>
+                <a:ea typeface="Microsoft YaHei"/>
+                <a:cs typeface="Microsoft YaHei"/>
+              </a:defRPr>
+            </a:pPr>
+            <a:r>
+              <a:rPr>
+                <a:solidFill>
+                  <a:srgbClr val="347D95"/>
+                </a:solidFill>
+                <a:ea typeface="Microsoft YaHei"/>
+                <a:hlinkClick xmlns:ns1="http://schemas.openxmlformats.org/officeDocument/2006/relationships" ns1:id="rCommand"/>
+              </a:rPr>
+              <a:t>完整命令：打开 TXT</a:t>
+            </a:r>
+          </a:p>
+        </p:txBody>
+      </p:sp>
+      <p:sp>
+        <p:nvSpPr>
+          <p:cNvPr id="9" name="PageNumber"/>
+          <p:cNvSpPr>
+            <a:spLocks xmlns:a="http://schemas.openxmlformats.org/drawingml/2006/main" noGrp="1"/>
+          </p:cNvSpPr>
+          <p:nvPr/>
+        </p:nvSpPr>
+        <p:spPr>
+          <a:xfrm xmlns:a="http://schemas.openxmlformats.org/drawingml/2006/main">
+            <a:off x="10858500" y="6438900"/>
+            <a:ext cx="723900" cy="266700"/>
+          </a:xfrm>
+          <a:prstGeom xmlns:a="http://schemas.openxmlformats.org/drawingml/2006/main" prst="rect">
+            <a:avLst/>
+          </a:prstGeom>
+          <a:noFill xmlns:a="http://schemas.openxmlformats.org/drawingml/2006/main"/>
+          <a:ln xmlns:a="http://schemas.openxmlformats.org/drawingml/2006/main" w="0">
+            <a:noFill/>
+          </a:ln>
+        </p:spPr>
+        <p:txBody>
+          <a:bodyPr xmlns:a="http://schemas.openxmlformats.org/drawingml/2006/main" anchor="ctr" lIns="0" rIns="0" tIns="0" bIns="0">
+            <a:noAutofit/>
+          </a:bodyPr>
+          <a:lstStyle xmlns:a="http://schemas.openxmlformats.org/drawingml/2006/main">
+            <a:defPPr algn="r">
+              <a:defRPr sz="1350">
+                <a:solidFill>
+                  <a:srgbClr val="646173"/>
+                </a:solidFill>
+                <a:latin typeface="Microsoft YaHei"/>
+                <a:ea typeface="Microsoft YaHei"/>
+                <a:cs typeface="Microsoft YaHei"/>
+              </a:defRPr>
+            </a:defPPr>
+          </a:lstStyle>
+          <a:p xmlns:a="http://schemas.openxmlformats.org/drawingml/2006/main">
+            <a:pPr algn="r">
+              <a:defRPr sz="1350">
+                <a:solidFill>
+                  <a:srgbClr val="646173"/>
+                </a:solidFill>
+                <a:latin typeface="Microsoft YaHei"/>
+                <a:ea typeface="Microsoft YaHei"/>
+                <a:cs typeface="Microsoft YaHei"/>
+              </a:defRPr>
+            </a:pPr>
+            <a:fld id="{3F4252E3-3D30-4773-AD6C-787A364D4A6D}" type="slidenum">
+              <a:rPr sz="1350">
+                <a:solidFill>
+                  <a:srgbClr val="646173"/>
+                </a:solidFill>
+                <a:latin typeface="Microsoft YaHei"/>
+                <a:ea typeface="Microsoft YaHei"/>
+                <a:cs typeface="Microsoft YaHei"/>
+              </a:rPr>
+              <a:t>20</a:t>
+            </a:fld>
+          </a:p>
+        </p:txBody>
+      </p:sp>
+    </p:spTree>
+  </p:cSld>
+</p:sld>
+</file>
+
+<file path=ppt/slides/guide1.xml><?xml version="1.0" encoding="utf-8"?>
+<p:sld xmlns:a="http://schemas.openxmlformats.org/drawingml/2006/main" xmlns:r="http://schemas.openxmlformats.org/officeDocument/2006/relationships" xmlns:p="http://schemas.openxmlformats.org/presentationml/2006/main" showMasterSp="1">
+  <p:cSld>
+    <p:spTree>
+      <p:nvGrpSpPr>
+        <p:cNvPr id="1" name=""/>
+        <p:cNvGrpSpPr/>
+        <p:nvPr/>
+      </p:nvGrpSpPr>
+      <p:grpSpPr>
+        <a:xfrm>
+          <a:off x="0" y="0"/>
+          <a:ext cx="0" cy="0"/>
+          <a:chOff x="0" y="0"/>
+          <a:chExt cx="0" cy="0"/>
+        </a:xfrm>
+      </p:grpSpPr>
+      <p:sp>
+        <p:nvSpPr>
+          <p:cNvPr id="2" name="Title"/>
+          <p:cNvSpPr>
+            <a:spLocks noGrp="1"/>
+          </p:cNvSpPr>
+          <p:nvPr/>
+        </p:nvSpPr>
+        <p:spPr>
+          <a:xfrm>
+            <a:off x="609600" y="400050"/>
+            <a:ext cx="10972800" cy="723900"/>
+          </a:xfrm>
+          <a:prstGeom prst="rect">
+            <a:avLst/>
+          </a:prstGeom>
+          <a:noFill/>
+          <a:ln w="0">
+            <a:noFill/>
+          </a:ln>
+        </p:spPr>
+        <p:txBody>
+          <a:bodyPr lIns="0" tIns="0" rIns="0" bIns="0" anchor="t">
+            <a:noAutofit/>
+          </a:bodyPr>
+          <a:lstStyle>
+            <a:defPPr>
+              <a:defRPr sz="3000" b="1">
+                <a:solidFill>
+                  <a:srgbClr val="29263B"/>
+                </a:solidFill>
+                <a:latin typeface="Microsoft YaHei"/>
+                <a:ea typeface="Microsoft YaHei"/>
+                <a:cs typeface="Microsoft YaHei"/>
+              </a:defRPr>
+            </a:defPPr>
+          </a:lstStyle>
+          <a:p>
+            <a:pPr>
+              <a:lnSpc>
+                <a:spcPct val="120000"/>
+              </a:lnSpc>
+              <a:spcAft>
+                <a:spcPts val="0"/>
+              </a:spcAft>
+              <a:defRPr sz="3000" b="1">
+                <a:solidFill>
+                  <a:srgbClr val="29263B"/>
+                </a:solidFill>
+                <a:latin typeface="Microsoft YaHei"/>
+                <a:ea typeface="Microsoft YaHei"/>
+                <a:cs typeface="Microsoft YaHei"/>
+              </a:defRPr>
+            </a:pPr>
+            <a:r>
+              <a:t>从自己的板出发，先得到一个可比较的工程</a:t>
+            </a:r>
+          </a:p>
+        </p:txBody>
+      </p:sp>
+      <p:sp>
+        <p:nvSpPr>
+          <p:cNvPr id="3" name="Stage"/>
+          <p:cNvSpPr>
+            <a:spLocks noGrp="1"/>
+          </p:cNvSpPr>
+          <p:nvPr/>
+        </p:nvSpPr>
+        <p:spPr>
+          <a:xfrm>
+            <a:off x="609600" y="1209675"/>
+            <a:ext cx="10972800" cy="333375"/>
+          </a:xfrm>
+          <a:prstGeom prst="rect">
+            <a:avLst/>
+          </a:prstGeom>
+          <a:noFill/>
+          <a:ln w="0">
+            <a:noFill/>
+          </a:ln>
+        </p:spPr>
+        <p:txBody>
+          <a:bodyPr lIns="0" tIns="0" rIns="0" bIns="0" anchor="t">
+            <a:noAutofit/>
+          </a:bodyPr>
+          <a:lstStyle>
+            <a:defPPr>
+              <a:defRPr sz="1650" b="0">
+                <a:solidFill>
+                  <a:srgbClr val="7350BC"/>
+                </a:solidFill>
+                <a:latin typeface="Microsoft YaHei"/>
+                <a:ea typeface="Microsoft YaHei"/>
+                <a:cs typeface="Microsoft YaHei"/>
+              </a:defRPr>
+            </a:defPPr>
+          </a:lstStyle>
+          <a:p>
+            <a:pPr>
+              <a:lnSpc>
+                <a:spcPct val="120000"/>
+              </a:lnSpc>
+              <a:spcAft>
+                <a:spcPts val="0"/>
+              </a:spcAft>
+              <a:defRPr sz="1650" b="0">
+                <a:solidFill>
+                  <a:srgbClr val="7350BC"/>
+                </a:solidFill>
+                <a:latin typeface="Microsoft YaHei"/>
+                <a:ea typeface="Microsoft YaHei"/>
+                <a:cs typeface="Microsoft YaHei"/>
+              </a:defRPr>
+            </a:pPr>
+            <a:r>
+              <a:rPr>
+                <a:solidFill>
+                  <a:srgbClr val="7350BC"/>
+                </a:solidFill>
+                <a:ea typeface="Microsoft YaHei"/>
+              </a:rPr>
+              <a:t>P001 Windows 开篇 · 从当前任务理解工程组织</a:t>
+            </a:r>
+          </a:p>
+        </p:txBody>
+      </p:sp>
+      <p:sp>
+        <p:nvSpPr>
+          <p:cNvPr id="4" name="Body 0"/>
+          <p:cNvSpPr>
+            <a:spLocks noGrp="1"/>
+          </p:cNvSpPr>
+          <p:nvPr/>
+        </p:nvSpPr>
+        <p:spPr>
+          <a:xfrm>
+            <a:off x="609600" y="1771650"/>
+            <a:ext cx="10972800" cy="792480"/>
+          </a:xfrm>
+          <a:prstGeom prst="rect">
+            <a:avLst/>
+          </a:prstGeom>
+          <a:noFill/>
+          <a:ln w="0">
+            <a:noFill/>
+          </a:ln>
+        </p:spPr>
+        <p:txBody>
+          <a:bodyPr lIns="0" tIns="0" rIns="0" bIns="0" anchor="t">
+            <a:noAutofit/>
+          </a:bodyPr>
+          <a:lstStyle>
+            <a:defPPr>
+              <a:defRPr sz="2250" b="0">
+                <a:solidFill>
+                  <a:srgbClr val="29263B"/>
+                </a:solidFill>
+                <a:latin typeface="Microsoft YaHei"/>
+                <a:ea typeface="Microsoft YaHei"/>
+                <a:cs typeface="Microsoft YaHei"/>
+              </a:defRPr>
+            </a:defPPr>
+          </a:lstStyle>
+          <a:p>
+            <a:pPr>
+              <a:lnSpc>
+                <a:spcPct val="120000"/>
+              </a:lnSpc>
+              <a:spcAft>
+                <a:spcPts val="0"/>
+              </a:spcAft>
+              <a:defRPr sz="2250" b="0">
+                <a:solidFill>
+                  <a:srgbClr val="29263B"/>
+                </a:solidFill>
+                <a:latin typeface="Microsoft YaHei"/>
+                <a:ea typeface="Microsoft YaHei"/>
+                <a:cs typeface="Microsoft YaHei"/>
+              </a:defRPr>
+            </a:pPr>
+            <a:r>
+              <a:t>最终要让自己的芯片和板运行 Zephyr。第一轮保持官方 hello_world 不变，选择已有支持的 mps2/an386，把工具、源码和依赖连成可复现的构建。</a:t>
+            </a:r>
+          </a:p>
+        </p:txBody>
+      </p:sp>
+      <p:sp>
+        <p:nvSpPr>
+          <p:cNvPr id="5" name="Body 1"/>
+          <p:cNvSpPr>
+            <a:spLocks noGrp="1"/>
+          </p:cNvSpPr>
+          <p:nvPr/>
+        </p:nvSpPr>
+        <p:spPr>
+          <a:xfrm>
+            <a:off x="609600" y="2735580"/>
+            <a:ext cx="10972800" cy="1169670"/>
+          </a:xfrm>
+          <a:prstGeom prst="rect">
+            <a:avLst/>
+          </a:prstGeom>
+          <a:noFill/>
+          <a:ln w="0">
+            <a:noFill/>
+          </a:ln>
+        </p:spPr>
+        <p:txBody>
+          <a:bodyPr lIns="0" tIns="0" rIns="0" bIns="0" anchor="t">
+            <a:noAutofit/>
+          </a:bodyPr>
+          <a:lstStyle>
+            <a:defPPr>
+              <a:defRPr sz="2250" b="0">
+                <a:solidFill>
+                  <a:srgbClr val="29263B"/>
+                </a:solidFill>
+                <a:latin typeface="Microsoft YaHei"/>
+                <a:ea typeface="Microsoft YaHei"/>
+                <a:cs typeface="Microsoft YaHei"/>
+              </a:defRPr>
+            </a:defPPr>
+          </a:lstStyle>
+          <a:p>
+            <a:pPr>
+              <a:lnSpc>
+                <a:spcPct val="120000"/>
+              </a:lnSpc>
+              <a:spcAft>
+                <a:spcPts val="0"/>
+              </a:spcAft>
+              <a:defRPr sz="2250" b="0">
+                <a:solidFill>
+                  <a:srgbClr val="29263B"/>
+                </a:solidFill>
+                <a:latin typeface="Microsoft YaHei"/>
+                <a:ea typeface="Microsoft YaHei"/>
+                <a:cs typeface="Microsoft YaHei"/>
+              </a:defRPr>
+            </a:pPr>
+            <a:r>
+              <a:t>应用选 </a:t>
+            </a:r>
+            <a:r>
+              <a:rPr>
+                <a:solidFill>
+                  <a:srgbClr val="0070C0"/>
+                </a:solidFill>
+                <a:ea typeface="Microsoft YaHei"/>
+              </a:rPr>
+              <a:t>samples/hello_world</a:t>
+            </a:r>
+            <a:r>
+              <a:t>，硬件选 mps2/an386：前者入口是 </a:t>
+            </a:r>
+            <a:r>
+              <a:rPr>
+                <a:solidFill>
+                  <a:srgbClr val="0070C0"/>
+                </a:solidFill>
+                <a:ea typeface="Microsoft YaHei"/>
+              </a:rPr>
+              <a:t>CMakeLists.txt</a:t>
+            </a:r>
+            <a:r>
+              <a:t> 与 </a:t>
+            </a:r>
+            <a:r>
+              <a:rPr>
+                <a:solidFill>
+                  <a:srgbClr val="0070C0"/>
+                </a:solidFill>
+                <a:ea typeface="Microsoft YaHei"/>
+              </a:rPr>
+              <a:t>prj.conf</a:t>
+            </a:r>
+            <a:r>
+              <a:t>；后者是 Arm MPS2 FPGA 平台的 Cortex-M4F 系统配置。两项独立选择，每种组合保留独立构建目录。</a:t>
+            </a:r>
+          </a:p>
+        </p:txBody>
+      </p:sp>
+      <p:sp>
+        <p:nvSpPr>
+          <p:cNvPr id="6" name="Body 2"/>
+          <p:cNvSpPr>
+            <a:spLocks noGrp="1"/>
+          </p:cNvSpPr>
+          <p:nvPr/>
+        </p:nvSpPr>
+        <p:spPr>
+          <a:xfrm>
+            <a:off x="609600" y="4076700"/>
+            <a:ext cx="10972800" cy="792480"/>
+          </a:xfrm>
+          <a:prstGeom prst="rect">
+            <a:avLst/>
+          </a:prstGeom>
+          <a:noFill/>
+          <a:ln w="0">
+            <a:noFill/>
+          </a:ln>
+        </p:spPr>
+        <p:txBody>
+          <a:bodyPr lIns="0" tIns="0" rIns="0" bIns="0" anchor="t">
+            <a:noAutofit/>
+          </a:bodyPr>
+          <a:lstStyle>
+            <a:defPPr>
+              <a:defRPr sz="2250" b="0">
+                <a:solidFill>
+                  <a:srgbClr val="29263B"/>
+                </a:solidFill>
+                <a:latin typeface="Microsoft YaHei"/>
+                <a:ea typeface="Microsoft YaHei"/>
+                <a:cs typeface="Microsoft YaHei"/>
+              </a:defRPr>
+            </a:defPPr>
+          </a:lstStyle>
+          <a:p>
+            <a:pPr>
+              <a:lnSpc>
+                <a:spcPct val="120000"/>
+              </a:lnSpc>
+              <a:spcAft>
+                <a:spcPts val="0"/>
+              </a:spcAft>
+              <a:defRPr sz="2250" b="0">
+                <a:solidFill>
+                  <a:srgbClr val="29263B"/>
+                </a:solidFill>
+                <a:latin typeface="Microsoft YaHei"/>
+                <a:ea typeface="Microsoft YaHei"/>
+                <a:cs typeface="Microsoft YaHei"/>
+              </a:defRPr>
+            </a:pPr>
+            <a:r>
+              <a:t>之后再把目标换成 HC32F4A0：应用仍可比较，新增工作集中在 SoC、板与驱动，避免把环境故障与移植故障混在一起。</a:t>
+            </a:r>
+          </a:p>
+        </p:txBody>
+      </p:sp>
+      <p:sp>
+        <p:nvSpPr>
+          <p:cNvPr id="7" name="Body 3"/>
+          <p:cNvSpPr>
+            <a:spLocks noGrp="1"/>
+          </p:cNvSpPr>
+          <p:nvPr/>
+        </p:nvSpPr>
+        <p:spPr>
+          <a:xfrm>
+            <a:off x="609600" y="5040630"/>
+            <a:ext cx="10972800" cy="792480"/>
+          </a:xfrm>
+          <a:prstGeom prst="rect">
+            <a:avLst/>
+          </a:prstGeom>
+          <a:noFill/>
+          <a:ln w="0">
+            <a:noFill/>
+          </a:ln>
+        </p:spPr>
+        <p:txBody>
+          <a:bodyPr lIns="0" tIns="0" rIns="0" bIns="0" anchor="t">
+            <a:noAutofit/>
+          </a:bodyPr>
+          <a:lstStyle>
+            <a:defPPr>
+              <a:defRPr sz="2250" b="0">
+                <a:solidFill>
+                  <a:srgbClr val="29263B"/>
+                </a:solidFill>
+                <a:latin typeface="Microsoft YaHei"/>
+                <a:ea typeface="Microsoft YaHei"/>
+                <a:cs typeface="Microsoft YaHei"/>
+              </a:defRPr>
+            </a:defPPr>
+          </a:lstStyle>
+          <a:p>
+            <a:pPr>
+              <a:lnSpc>
+                <a:spcPct val="120000"/>
+              </a:lnSpc>
+              <a:spcAft>
+                <a:spcPts val="0"/>
+              </a:spcAft>
+              <a:defRPr sz="2250" b="0">
+                <a:solidFill>
+                  <a:srgbClr val="29263B"/>
+                </a:solidFill>
+                <a:latin typeface="Microsoft YaHei"/>
+                <a:ea typeface="Microsoft YaHei"/>
+                <a:cs typeface="Microsoft YaHei"/>
+              </a:defRPr>
+            </a:pPr>
+            <a:r>
+              <a:t>本册只先取得同一份官方源码和能再次打开的 UCRT64。主机 Python、ARM 编译器与外部模块在后续逐项准备。</a:t>
+            </a:r>
+          </a:p>
+        </p:txBody>
+      </p:sp>
+      <p:sp>
+        <p:nvSpPr>
+          <p:cNvPr id="8" name="Reading link"/>
+          <p:cNvSpPr>
+            <a:spLocks noGrp="1"/>
+          </p:cNvSpPr>
+          <p:nvPr/>
+        </p:nvSpPr>
+        <p:spPr>
+          <a:xfrm>
+            <a:off x="609600" y="6105525"/>
+            <a:ext cx="10972800" cy="257175"/>
+          </a:xfrm>
+          <a:prstGeom prst="rect">
+            <a:avLst/>
+          </a:prstGeom>
+          <a:noFill/>
+          <a:ln w="0">
+            <a:noFill/>
+          </a:ln>
+        </p:spPr>
+        <p:txBody>
+          <a:bodyPr lIns="0" tIns="0" rIns="0" bIns="0" anchor="t">
+            <a:noAutofit/>
+          </a:bodyPr>
+          <a:lstStyle>
+            <a:defPPr>
+              <a:defRPr sz="1275" b="0">
+                <a:solidFill>
+                  <a:srgbClr val="347D95"/>
+                </a:solidFill>
+                <a:latin typeface="Microsoft YaHei"/>
+                <a:ea typeface="Microsoft YaHei"/>
+                <a:cs typeface="Microsoft YaHei"/>
+              </a:defRPr>
+            </a:defPPr>
+          </a:lstStyle>
+          <a:p>
+            <a:pPr>
+              <a:lnSpc>
+                <a:spcPct val="120000"/>
+              </a:lnSpc>
+              <a:spcAft>
+                <a:spcPts val="0"/>
+              </a:spcAft>
+              <a:defRPr sz="1275" b="0">
+                <a:solidFill>
+                  <a:srgbClr val="347D95"/>
+                </a:solidFill>
+                <a:latin typeface="Microsoft YaHei"/>
+                <a:ea typeface="Microsoft YaHei"/>
+                <a:cs typeface="Microsoft YaHei"/>
+              </a:defRPr>
+            </a:pPr>
+            <a:r>
+              <a:rPr>
+                <a:solidFill>
+                  <a:srgbClr val="347D95"/>
+                </a:solidFill>
+                <a:ea typeface="Microsoft YaHei"/>
+                <a:hlinkClick r:id="rIdReading"/>
+              </a:rPr>
+              <a:t>完整解释与操作：配套 Markdown P001 Windows 开篇</a:t>
+            </a:r>
+          </a:p>
+        </p:txBody>
+      </p:sp>
+      <p:sp>
+        <p:nvSpPr>
+          <p:cNvPr id="9" name="PageNumber"/>
+          <p:cNvSpPr>
+            <a:spLocks noGrp="1"/>
+          </p:cNvSpPr>
+          <p:nvPr/>
+        </p:nvSpPr>
+        <p:spPr>
+          <a:xfrm>
+            <a:off x="10858500" y="6438900"/>
+            <a:ext cx="723900" cy="266700"/>
+          </a:xfrm>
+          <a:prstGeom prst="rect">
+            <a:avLst/>
+          </a:prstGeom>
+          <a:noFill/>
+          <a:ln w="0">
+            <a:noFill/>
+          </a:ln>
+        </p:spPr>
+        <p:txBody>
+          <a:bodyPr anchor="ctr" lIns="0" rIns="0" tIns="0" bIns="0">
+            <a:noAutofit/>
+          </a:bodyPr>
+          <a:lstStyle>
+            <a:defPPr algn="r">
+              <a:defRPr sz="1350">
+                <a:solidFill>
+                  <a:srgbClr val="646173"/>
+                </a:solidFill>
+                <a:latin typeface="Microsoft YaHei"/>
+                <a:ea typeface="Microsoft YaHei"/>
+                <a:cs typeface="Microsoft YaHei"/>
+              </a:defRPr>
+            </a:defPPr>
+          </a:lstStyle>
+          <a:p>
+            <a:pPr algn="r">
+              <a:defRPr sz="1350">
+                <a:solidFill>
+                  <a:srgbClr val="646173"/>
+                </a:solidFill>
+                <a:latin typeface="Microsoft YaHei"/>
+                <a:ea typeface="Microsoft YaHei"/>
+                <a:cs typeface="Microsoft YaHei"/>
+              </a:defRPr>
+            </a:pPr>
+            <a:fld id="{61119C0C-8F16-44C9-83E9-B2D3A4413DE6}" type="slidenum">
+              <a:rPr sz="1350">
+                <a:solidFill>
+                  <a:srgbClr val="646173"/>
+                </a:solidFill>
+                <a:latin typeface="Microsoft YaHei"/>
+                <a:ea typeface="Microsoft YaHei"/>
+                <a:cs typeface="Microsoft YaHei"/>
+              </a:rPr>
+              <a:t>3</a:t>
+            </a:fld>
+          </a:p>
+        </p:txBody>
+      </p:sp>
+    </p:spTree>
+  </p:cSld>
+  <p:clrMapOvr>
+    <a:masterClrMapping/>
+  </p:clrMapOvr>
+</p:sld>
+</file>
+
+<file path=ppt/slides/guide2.xml><?xml version="1.0" encoding="utf-8"?>
+<p:sld xmlns:a="http://schemas.openxmlformats.org/drawingml/2006/main" xmlns:r="http://schemas.openxmlformats.org/officeDocument/2006/relationships" xmlns:p="http://schemas.openxmlformats.org/presentationml/2006/main" showMasterSp="1">
+  <p:cSld>
+    <p:spTree>
+      <p:nvGrpSpPr>
+        <p:cNvPr id="1" name=""/>
+        <p:cNvGrpSpPr/>
+        <p:nvPr/>
+      </p:nvGrpSpPr>
+      <p:grpSpPr>
+        <a:xfrm>
+          <a:off x="0" y="0"/>
+          <a:ext cx="0" cy="0"/>
+          <a:chOff x="0" y="0"/>
+          <a:chExt cx="0" cy="0"/>
+        </a:xfrm>
+      </p:grpSpPr>
+      <p:sp>
+        <p:nvSpPr>
+          <p:cNvPr id="2" name="Title"/>
+          <p:cNvSpPr>
+            <a:spLocks noGrp="1"/>
+          </p:cNvSpPr>
+          <p:nvPr/>
+        </p:nvSpPr>
+        <p:spPr>
+          <a:xfrm>
+            <a:off x="609600" y="400050"/>
+            <a:ext cx="10972800" cy="723900"/>
+          </a:xfrm>
+          <a:prstGeom prst="rect">
+            <a:avLst/>
+          </a:prstGeom>
+          <a:noFill/>
+          <a:ln w="0">
+            <a:noFill/>
+          </a:ln>
+        </p:spPr>
+        <p:txBody>
+          <a:bodyPr lIns="0" tIns="0" rIns="0" bIns="0" anchor="t">
+            <a:noAutofit/>
+          </a:bodyPr>
+          <a:lstStyle>
+            <a:defPPr>
+              <a:defRPr sz="3000" b="1">
+                <a:solidFill>
+                  <a:srgbClr val="29263B"/>
+                </a:solidFill>
+                <a:latin typeface="Microsoft YaHei"/>
+                <a:ea typeface="Microsoft YaHei"/>
+                <a:cs typeface="Microsoft YaHei"/>
+              </a:defRPr>
+            </a:defPPr>
+          </a:lstStyle>
+          <a:p>
+            <a:pPr>
+              <a:lnSpc>
+                <a:spcPct val="120000"/>
+              </a:lnSpc>
+              <a:spcAft>
+                <a:spcPts val="0"/>
+              </a:spcAft>
+              <a:defRPr sz="3000" b="1">
+                <a:solidFill>
+                  <a:srgbClr val="29263B"/>
+                </a:solidFill>
+                <a:latin typeface="Microsoft YaHei"/>
+                <a:ea typeface="Microsoft YaHei"/>
+                <a:cs typeface="Microsoft YaHei"/>
+              </a:defRPr>
+            </a:pPr>
+            <a:r>
+              <a:t>下载成功后，下一章究竟接收什么</a:t>
+            </a:r>
+          </a:p>
+        </p:txBody>
+      </p:sp>
+      <p:sp>
+        <p:nvSpPr>
+          <p:cNvPr id="3" name="Stage"/>
+          <p:cNvSpPr>
+            <a:spLocks noGrp="1"/>
+          </p:cNvSpPr>
+          <p:nvPr/>
+        </p:nvSpPr>
+        <p:spPr>
+          <a:xfrm>
+            <a:off x="609600" y="1209675"/>
+            <a:ext cx="10972800" cy="333375"/>
+          </a:xfrm>
+          <a:prstGeom prst="rect">
+            <a:avLst/>
+          </a:prstGeom>
+          <a:noFill/>
+          <a:ln w="0">
+            <a:noFill/>
+          </a:ln>
+        </p:spPr>
+        <p:txBody>
+          <a:bodyPr lIns="0" tIns="0" rIns="0" bIns="0" anchor="t">
+            <a:noAutofit/>
+          </a:bodyPr>
+          <a:lstStyle>
+            <a:defPPr>
+              <a:defRPr sz="1650" b="0">
+                <a:solidFill>
+                  <a:srgbClr val="7350BC"/>
+                </a:solidFill>
+                <a:latin typeface="Microsoft YaHei"/>
+                <a:ea typeface="Microsoft YaHei"/>
+                <a:cs typeface="Microsoft YaHei"/>
+              </a:defRPr>
+            </a:defPPr>
+          </a:lstStyle>
+          <a:p>
+            <a:pPr>
+              <a:lnSpc>
+                <a:spcPct val="120000"/>
+              </a:lnSpc>
+              <a:spcAft>
+                <a:spcPts val="0"/>
+              </a:spcAft>
+              <a:defRPr sz="1650" b="0">
+                <a:solidFill>
+                  <a:srgbClr val="7350BC"/>
+                </a:solidFill>
+                <a:latin typeface="Microsoft YaHei"/>
+                <a:ea typeface="Microsoft YaHei"/>
+                <a:cs typeface="Microsoft YaHei"/>
+              </a:defRPr>
+            </a:pPr>
+            <a:r>
+              <a:rPr>
+                <a:solidFill>
+                  <a:srgbClr val="7350BC"/>
+                </a:solidFill>
+                <a:ea typeface="Microsoft YaHei"/>
+              </a:rPr>
+              <a:t>P001 Windows 1.10 · 从当前任务理解工程组织</a:t>
+            </a:r>
+          </a:p>
+        </p:txBody>
+      </p:sp>
+      <p:sp>
+        <p:nvSpPr>
+          <p:cNvPr id="4" name="Body 0"/>
+          <p:cNvSpPr>
+            <a:spLocks noGrp="1"/>
+          </p:cNvSpPr>
+          <p:nvPr/>
+        </p:nvSpPr>
+        <p:spPr>
+          <a:xfrm>
+            <a:off x="609600" y="1771650"/>
+            <a:ext cx="10972800" cy="792480"/>
+          </a:xfrm>
+          <a:prstGeom prst="rect">
+            <a:avLst/>
+          </a:prstGeom>
+          <a:noFill/>
+          <a:ln w="0">
+            <a:noFill/>
+          </a:ln>
+        </p:spPr>
+        <p:txBody>
+          <a:bodyPr lIns="0" tIns="0" rIns="0" bIns="0" anchor="t">
+            <a:noAutofit/>
+          </a:bodyPr>
+          <a:lstStyle>
+            <a:defPPr>
+              <a:defRPr sz="2250" b="0">
+                <a:solidFill>
+                  <a:srgbClr val="29263B"/>
+                </a:solidFill>
+                <a:latin typeface="Microsoft YaHei"/>
+                <a:ea typeface="Microsoft YaHei"/>
+                <a:cs typeface="Microsoft YaHei"/>
+              </a:defRPr>
+            </a:defPPr>
+          </a:lstStyle>
+          <a:p>
+            <a:pPr>
+              <a:lnSpc>
+                <a:spcPct val="120000"/>
+              </a:lnSpc>
+              <a:spcAft>
+                <a:spcPts val="0"/>
+              </a:spcAft>
+              <a:defRPr sz="2250" b="0">
+                <a:solidFill>
+                  <a:srgbClr val="29263B"/>
+                </a:solidFill>
+                <a:latin typeface="Microsoft YaHei"/>
+                <a:ea typeface="Microsoft YaHei"/>
+                <a:cs typeface="Microsoft YaHei"/>
+              </a:defRPr>
+            </a:pPr>
+            <a:r>
+              <a:t>交接的是 </a:t>
+            </a:r>
+            <a:r>
+              <a:rPr>
+                <a:solidFill>
+                  <a:srgbClr val="0070C0"/>
+                </a:solidFill>
+                <a:ea typeface="Microsoft YaHei"/>
+              </a:rPr>
+              <a:t>G:/zephyr_practice/zephyr-main</a:t>
+            </a:r>
+            <a:r>
+              <a:t>，不是另一个同名副本。VERSION 说明源码版本，</a:t>
+            </a:r>
+            <a:r>
+              <a:rPr>
+                <a:solidFill>
+                  <a:srgbClr val="0070C0"/>
+                </a:solidFill>
+                <a:ea typeface="Microsoft YaHei"/>
+              </a:rPr>
+              <a:t>samples/hello_world</a:t>
+            </a:r>
+            <a:r>
+              <a:t> 是将要构建的应用。</a:t>
+            </a:r>
+          </a:p>
+        </p:txBody>
+      </p:sp>
+      <p:sp>
+        <p:nvSpPr>
+          <p:cNvPr id="5" name="Body 1"/>
+          <p:cNvSpPr>
+            <a:spLocks noGrp="1"/>
+          </p:cNvSpPr>
+          <p:nvPr/>
+        </p:nvSpPr>
+        <p:spPr>
+          <a:xfrm>
+            <a:off x="609600" y="2735580"/>
+            <a:ext cx="10972800" cy="792480"/>
+          </a:xfrm>
+          <a:prstGeom prst="rect">
+            <a:avLst/>
+          </a:prstGeom>
+          <a:noFill/>
+          <a:ln w="0">
+            <a:noFill/>
+          </a:ln>
+        </p:spPr>
+        <p:txBody>
+          <a:bodyPr lIns="0" tIns="0" rIns="0" bIns="0" anchor="t">
+            <a:noAutofit/>
+          </a:bodyPr>
+          <a:lstStyle>
+            <a:defPPr>
+              <a:defRPr sz="2250" b="0">
+                <a:solidFill>
+                  <a:srgbClr val="29263B"/>
+                </a:solidFill>
+                <a:latin typeface="Microsoft YaHei"/>
+                <a:ea typeface="Microsoft YaHei"/>
+                <a:cs typeface="Microsoft YaHei"/>
+              </a:defRPr>
+            </a:defPPr>
+          </a:lstStyle>
+          <a:p>
+            <a:pPr>
+              <a:lnSpc>
+                <a:spcPct val="120000"/>
+              </a:lnSpc>
+              <a:spcAft>
+                <a:spcPts val="0"/>
+              </a:spcAft>
+              <a:defRPr sz="2250" b="0">
+                <a:solidFill>
+                  <a:srgbClr val="29263B"/>
+                </a:solidFill>
+                <a:latin typeface="Microsoft YaHei"/>
+                <a:ea typeface="Microsoft YaHei"/>
+                <a:cs typeface="Microsoft YaHei"/>
+              </a:defRPr>
+            </a:pPr>
+            <a:r>
+              <a:rPr>
+                <a:solidFill>
+                  <a:srgbClr val="0070C0"/>
+                </a:solidFill>
+                <a:ea typeface="Microsoft YaHei"/>
+              </a:rPr>
+              <a:t>boards/arm/mps2</a:t>
+            </a:r>
+            <a:r>
+              <a:t> 已有参考目标；</a:t>
+            </a:r>
+            <a:r>
+              <a:rPr>
+                <a:solidFill>
+                  <a:srgbClr val="0070C0"/>
+                </a:solidFill>
+                <a:ea typeface="Microsoft YaHei"/>
+              </a:rPr>
+              <a:t>west.yml</a:t>
+            </a:r>
+            <a:r>
+              <a:t> 则列出外部项目。主仓内有接入规则，不代表外部源码已经下载。</a:t>
+            </a:r>
+          </a:p>
+        </p:txBody>
+      </p:sp>
+      <p:sp>
+        <p:nvSpPr>
+          <p:cNvPr id="6" name="Body 2"/>
+          <p:cNvSpPr>
+            <a:spLocks noGrp="1"/>
+          </p:cNvSpPr>
+          <p:nvPr/>
+        </p:nvSpPr>
+        <p:spPr>
+          <a:xfrm>
+            <a:off x="609600" y="3699510"/>
+            <a:ext cx="10972800" cy="792480"/>
+          </a:xfrm>
+          <a:prstGeom prst="rect">
+            <a:avLst/>
+          </a:prstGeom>
+          <a:noFill/>
+          <a:ln w="0">
+            <a:noFill/>
+          </a:ln>
+        </p:spPr>
+        <p:txBody>
+          <a:bodyPr lIns="0" tIns="0" rIns="0" bIns="0" anchor="t">
+            <a:noAutofit/>
+          </a:bodyPr>
+          <a:lstStyle>
+            <a:defPPr>
+              <a:defRPr sz="2250" b="0">
+                <a:solidFill>
+                  <a:srgbClr val="29263B"/>
+                </a:solidFill>
+                <a:latin typeface="Microsoft YaHei"/>
+                <a:ea typeface="Microsoft YaHei"/>
+                <a:cs typeface="Microsoft YaHei"/>
+              </a:defRPr>
+            </a:defPPr>
+          </a:lstStyle>
+          <a:p>
+            <a:pPr>
+              <a:lnSpc>
+                <a:spcPct val="120000"/>
+              </a:lnSpc>
+              <a:spcAft>
+                <a:spcPts val="0"/>
+              </a:spcAft>
+              <a:defRPr sz="2250" b="0">
+                <a:solidFill>
+                  <a:srgbClr val="29263B"/>
+                </a:solidFill>
+                <a:latin typeface="Microsoft YaHei"/>
+                <a:ea typeface="Microsoft YaHei"/>
+                <a:cs typeface="Microsoft YaHei"/>
+              </a:defRPr>
+            </a:pPr>
+            <a:r>
+              <a:t>P002 准备主机工具，P003 提供 ARM 编译器，P004 确定并取得 CMSIS。现在尚未开始构建，没有 ELF 正常。</a:t>
+            </a:r>
+          </a:p>
+        </p:txBody>
+      </p:sp>
+      <p:sp>
+        <p:nvSpPr>
+          <p:cNvPr id="7" name="Reading link"/>
+          <p:cNvSpPr>
+            <a:spLocks noGrp="1"/>
+          </p:cNvSpPr>
+          <p:nvPr/>
+        </p:nvSpPr>
+        <p:spPr>
+          <a:xfrm>
+            <a:off x="609600" y="6105525"/>
+            <a:ext cx="10972800" cy="257175"/>
+          </a:xfrm>
+          <a:prstGeom prst="rect">
+            <a:avLst/>
+          </a:prstGeom>
+          <a:noFill/>
+          <a:ln w="0">
+            <a:noFill/>
+          </a:ln>
+        </p:spPr>
+        <p:txBody>
+          <a:bodyPr lIns="0" tIns="0" rIns="0" bIns="0" anchor="t">
+            <a:noAutofit/>
+          </a:bodyPr>
+          <a:lstStyle>
+            <a:defPPr>
+              <a:defRPr sz="1275" b="0">
+                <a:solidFill>
+                  <a:srgbClr val="347D95"/>
+                </a:solidFill>
+                <a:latin typeface="Microsoft YaHei"/>
+                <a:ea typeface="Microsoft YaHei"/>
+                <a:cs typeface="Microsoft YaHei"/>
+              </a:defRPr>
+            </a:defPPr>
+          </a:lstStyle>
+          <a:p>
+            <a:pPr>
+              <a:lnSpc>
+                <a:spcPct val="120000"/>
+              </a:lnSpc>
+              <a:spcAft>
+                <a:spcPts val="0"/>
+              </a:spcAft>
+              <a:defRPr sz="1275" b="0">
+                <a:solidFill>
+                  <a:srgbClr val="347D95"/>
+                </a:solidFill>
+                <a:latin typeface="Microsoft YaHei"/>
+                <a:ea typeface="Microsoft YaHei"/>
+                <a:cs typeface="Microsoft YaHei"/>
+              </a:defRPr>
+            </a:pPr>
+            <a:r>
+              <a:rPr>
+                <a:solidFill>
+                  <a:srgbClr val="347D95"/>
+                </a:solidFill>
+                <a:ea typeface="Microsoft YaHei"/>
+                <a:hlinkClick r:id="rIdReading"/>
+              </a:rPr>
+              <a:t>完整解释与操作：配套 Markdown P001 Windows 1.10</a:t>
+            </a:r>
+          </a:p>
+        </p:txBody>
+      </p:sp>
+      <p:sp>
+        <p:nvSpPr>
+          <p:cNvPr id="8" name="PageNumber"/>
+          <p:cNvSpPr>
+            <a:spLocks noGrp="1"/>
+          </p:cNvSpPr>
+          <p:nvPr/>
+        </p:nvSpPr>
+        <p:spPr>
+          <a:xfrm>
+            <a:off x="10858500" y="6438900"/>
+            <a:ext cx="723900" cy="266700"/>
+          </a:xfrm>
+          <a:prstGeom prst="rect">
+            <a:avLst/>
+          </a:prstGeom>
+          <a:noFill/>
+          <a:ln w="0">
+            <a:noFill/>
+          </a:ln>
+        </p:spPr>
+        <p:txBody>
+          <a:bodyPr anchor="ctr" lIns="0" rIns="0" tIns="0" bIns="0">
+            <a:noAutofit/>
+          </a:bodyPr>
+          <a:lstStyle>
+            <a:defPPr algn="r">
+              <a:defRPr sz="1350">
+                <a:solidFill>
+                  <a:srgbClr val="646173"/>
+                </a:solidFill>
+                <a:latin typeface="Microsoft YaHei"/>
+                <a:ea typeface="Microsoft YaHei"/>
+                <a:cs typeface="Microsoft YaHei"/>
+              </a:defRPr>
+            </a:defPPr>
+          </a:lstStyle>
+          <a:p>
+            <a:pPr algn="r">
+              <a:defRPr sz="1350">
+                <a:solidFill>
+                  <a:srgbClr val="646173"/>
+                </a:solidFill>
+                <a:latin typeface="Microsoft YaHei"/>
+                <a:ea typeface="Microsoft YaHei"/>
+                <a:cs typeface="Microsoft YaHei"/>
+              </a:defRPr>
+            </a:pPr>
+            <a:fld id="{42640C26-255E-4EE4-AF66-B32CE26B1DE2}" type="slidenum">
+              <a:rPr sz="1350">
+                <a:solidFill>
+                  <a:srgbClr val="646173"/>
+                </a:solidFill>
+                <a:latin typeface="Microsoft YaHei"/>
+                <a:ea typeface="Microsoft YaHei"/>
+                <a:cs typeface="Microsoft YaHei"/>
+              </a:rPr>
+              <a:t>44</a:t>
+            </a:fld>
+          </a:p>
+        </p:txBody>
+      </p:sp>
+    </p:spTree>
+  </p:cSld>
+  <p:clrMapOvr>
+    <a:masterClrMapping/>
+  </p:clrMapOvr>
 </p:sld>
 </file>
 
@@ -29459,7 +31815,7 @@
                 <a:cs typeface="Microsoft YaHei"/>
               </a:defRPr>
             </a:pPr>
-            <a:fld id="{0530DCE1-D6A3-4BED-BDFF-10EF11AF3A80}" type="slidenum">
+            <a:fld id="{B9CFA5F4-8934-46F5-B199-F0536C0B1FF4}" type="slidenum">
               <a:rPr sz="1350">
                 <a:solidFill>
                   <a:srgbClr val="646173"/>
@@ -29468,7 +31824,7 @@
                 <a:ea typeface="Microsoft YaHei"/>
                 <a:cs typeface="Microsoft YaHei"/>
               </a:rPr>
-              <a:t>14</a:t>
+              <a:t>15</a:t>
             </a:fld>
           </a:p>
         </p:txBody>
@@ -32340,7 +34696,7 @@
                 <a:ea typeface="Consolas" panose="020B0609020204030204"/>
                 <a:cs typeface="Consolas" panose="020B0609020204030204"/>
               </a:rPr>
-              <a:t>；详见 Windows P002—P005</a:t>
+              <a:t>；详见 Windows P002</a:t>
             </a:r>
           </a:p>
         </p:txBody>
@@ -32399,7 +34755,7 @@
                 <a:cs typeface="Microsoft YaHei"/>
               </a:defRPr>
             </a:pPr>
-            <a:fld id="{7F95DD6F-89DF-497A-AE60-29705FFF64E4}" type="slidenum">
+            <a:fld id="{F2F76508-00E5-4159-A1E8-2632379E56FB}" type="slidenum">
               <a:rPr sz="1350">
                 <a:solidFill>
                   <a:srgbClr val="646173"/>
@@ -32408,7 +34764,7 @@
                 <a:ea typeface="Microsoft YaHei"/>
                 <a:cs typeface="Microsoft YaHei"/>
               </a:rPr>
-              <a:t>19</a:t>
+              <a:t>21</a:t>
             </a:fld>
           </a:p>
         </p:txBody>
@@ -33053,7 +35409,7 @@
                 <a:cs typeface="Microsoft YaHei"/>
               </a:defRPr>
             </a:pPr>
-            <a:fld id="{3752D2B9-3AC1-4F44-84FD-14181105C490}" type="slidenum">
+            <a:fld id="{6BF7BA14-0FBC-409A-9519-FBC4BAD2DF45}" type="slidenum">
               <a:rPr sz="1350">
                 <a:solidFill>
                   <a:srgbClr val="646173"/>
@@ -33062,7 +35418,7 @@
                 <a:ea typeface="Microsoft YaHei"/>
                 <a:cs typeface="Microsoft YaHei"/>
               </a:rPr>
-              <a:t>22</a:t>
+              <a:t>24</a:t>
             </a:fld>
           </a:p>
         </p:txBody>
@@ -34171,7 +36527,7 @@
                 <a:cs typeface="Microsoft YaHei"/>
               </a:defRPr>
             </a:pPr>
-            <a:fld id="{9684FACF-744D-4053-BD9C-F7C51351921E}" type="slidenum">
+            <a:fld id="{4F017CE9-7609-413F-B509-7FACA1A347DA}" type="slidenum">
               <a:rPr sz="1350">
                 <a:solidFill>
                   <a:srgbClr val="646173"/>
@@ -34180,7 +36536,7 @@
                 <a:ea typeface="Microsoft YaHei"/>
                 <a:cs typeface="Microsoft YaHei"/>
               </a:rPr>
-              <a:t>26</a:t>
+              <a:t>28</a:t>
             </a:fld>
           </a:p>
         </p:txBody>
@@ -34783,7 +37139,7 @@
                 <a:cs typeface="Microsoft YaHei"/>
               </a:defRPr>
             </a:pPr>
-            <a:fld id="{CF809FD7-E90D-48FE-9B2C-FDABCEE83370}" type="slidenum">
+            <a:fld id="{228F52E0-EC68-4A5D-98E9-C94254A9483C}" type="slidenum">
               <a:rPr sz="1350">
                 <a:solidFill>
                   <a:srgbClr val="646173"/>
@@ -34792,7 +37148,7 @@
                 <a:ea typeface="Microsoft YaHei"/>
                 <a:cs typeface="Microsoft YaHei"/>
               </a:rPr>
-              <a:t>28</a:t>
+              <a:t>30</a:t>
             </a:fld>
           </a:p>
         </p:txBody>
@@ -35375,7 +37731,7 @@
                 <a:cs typeface="Microsoft YaHei"/>
               </a:defRPr>
             </a:pPr>
-            <a:fld id="{8B9714F9-22A5-43D2-9FD7-033273F9A464}" type="slidenum">
+            <a:fld id="{957A9701-041C-41BD-A130-358A547294F4}" type="slidenum">
               <a:rPr sz="1350">
                 <a:solidFill>
                   <a:srgbClr val="646173"/>
@@ -38649,7 +41005,7 @@
                 <a:cs typeface="Microsoft YaHei"/>
               </a:defRPr>
             </a:pPr>
-            <a:fld id="{A297421B-E58B-42EC-9725-4C7B86574DC8}" type="slidenum">
+            <a:fld id="{6E7A07DC-1B1C-45BC-A1A9-3C27C641FDDD}" type="slidenum">
               <a:rPr sz="1350">
                 <a:solidFill>
                   <a:srgbClr val="646173"/>
@@ -38658,7 +41014,7 @@
                 <a:ea typeface="Microsoft YaHei"/>
                 <a:cs typeface="Microsoft YaHei"/>
               </a:rPr>
-              <a:t>36</a:t>
+              <a:t>38</a:t>
             </a:fld>
           </a:p>
         </p:txBody>
@@ -41300,35 +43656,13 @@
             <a:r>
               <a:rPr sz="2250" b="1">
                 <a:solidFill>
-                  <a:srgbClr val="252035"/>
+                  <a:srgbClr val="29263B"/>
                 </a:solidFill>
                 <a:latin typeface="Noto Sans SC" panose="020B0200000000000000" charset="-122"/>
                 <a:ea typeface="Noto Sans SC" panose="020B0200000000000000" charset="-122"/>
                 <a:cs typeface="Noto Sans SC" panose="020B0200000000000000" charset="-122"/>
               </a:rPr>
-              <a:t>下一步：Python 虚拟环境、</a:t>
-            </a:r>
-            <a:r>
-              <a:rPr sz="2250" b="1">
-                <a:solidFill>
-                  <a:srgbClr val="A02B93"/>
-                </a:solidFill>
-                <a:latin typeface="Noto Sans SC" panose="020B0200000000000000" charset="-122"/>
-                <a:ea typeface="Noto Sans SC" panose="020B0200000000000000" charset="-122"/>
-                <a:cs typeface="Noto Sans SC" panose="020B0200000000000000" charset="-122"/>
-              </a:rPr>
-              <a:t>west</a:t>
-            </a:r>
-            <a:r>
-              <a:rPr sz="2250" b="1">
-                <a:solidFill>
-                  <a:srgbClr val="252035"/>
-                </a:solidFill>
-                <a:latin typeface="Noto Sans SC" panose="020B0200000000000000" charset="-122"/>
-                <a:ea typeface="Noto Sans SC" panose="020B0200000000000000" charset="-122"/>
-                <a:cs typeface="Noto Sans SC" panose="020B0200000000000000" charset="-122"/>
-              </a:rPr>
-              <a:t> 配套模块与 Zephyr SDK</a:t>
+              <a:t>下一步 P002：让主机程序读取同一源码；然后准备 ARM SDK 和 CMSIS。</a:t>
             </a:r>
           </a:p>
         </p:txBody>
@@ -41387,7 +43721,7 @@
                 <a:cs typeface="Microsoft YaHei"/>
               </a:defRPr>
             </a:pPr>
-            <a:fld id="{5148D0A0-0AF1-4E2C-A638-D8FACD4DE7F1}" type="slidenum">
+            <a:fld id="{FB460D62-546D-4DB8-81B5-7737022A72D6}" type="slidenum">
               <a:rPr sz="1350">
                 <a:solidFill>
                   <a:srgbClr val="646173"/>
@@ -41396,7 +43730,7 @@
                 <a:ea typeface="Microsoft YaHei"/>
                 <a:cs typeface="Microsoft YaHei"/>
               </a:rPr>
-              <a:t>41</a:t>
+              <a:t>43</a:t>
             </a:fld>
           </a:p>
         </p:txBody>
@@ -41882,13 +44216,13 @@
             <a:r>
               <a:rPr sz="1950" b="0">
                 <a:solidFill>
-                  <a:srgbClr val="6C657C"/>
+                  <a:srgbClr val="29263B"/>
                 </a:solidFill>
                 <a:latin typeface="Noto Sans SC" panose="020B0200000000000000" charset="-122"/>
                 <a:ea typeface="Noto Sans SC" panose="020B0200000000000000" charset="-122"/>
                 <a:cs typeface="Noto Sans SC" panose="020B0200000000000000" charset="-122"/>
               </a:rPr>
-              <a:t>安装 Git、解压工具与后续构建工具</a:t>
+              <a:t>本册装 Git 与解压工具；P002 再装构建工具</a:t>
             </a:r>
           </a:p>
         </p:txBody>
@@ -42343,7 +44677,7 @@
                 <a:cs typeface="Microsoft YaHei"/>
               </a:defRPr>
             </a:pPr>
-            <a:fld id="{C514AB91-33C4-4C12-BED2-CB0650D6CA32}" type="slidenum">
+            <a:fld id="{CE627A91-B325-437C-96FF-3E0CCFA805D2}" type="slidenum">
               <a:rPr sz="1350">
                 <a:solidFill>
                   <a:srgbClr val="646173"/>
@@ -42352,7 +44686,7 @@
                 <a:ea typeface="Microsoft YaHei"/>
                 <a:cs typeface="Microsoft YaHei"/>
               </a:rPr>
-              <a:t>3</a:t>
+              <a:t>4</a:t>
             </a:fld>
           </a:p>
         </p:txBody>
@@ -42990,7 +45324,7 @@
                 <a:cs typeface="Microsoft YaHei"/>
               </a:defRPr>
             </a:pPr>
-            <a:fld id="{DEE38430-D7A8-4A0C-93D3-A0B591FE2501}" type="slidenum">
+            <a:fld id="{5E8942CC-1228-4049-873E-826129B1D84E}" type="slidenum">
               <a:rPr sz="1350">
                 <a:solidFill>
                   <a:srgbClr val="646173"/>
@@ -42999,7 +45333,7 @@
                 <a:ea typeface="Microsoft YaHei"/>
                 <a:cs typeface="Microsoft YaHei"/>
               </a:rPr>
-              <a:t>6</a:t>
+              <a:t>7</a:t>
             </a:fld>
           </a:p>
         </p:txBody>
@@ -43628,7 +45962,7 @@
                 <a:cs typeface="Microsoft YaHei"/>
               </a:defRPr>
             </a:pPr>
-            <a:fld id="{FA2168A6-20F1-4958-96F7-17E9E3AFCE67}" type="slidenum">
+            <a:fld id="{111BD902-7504-4547-94D4-96621142F068}" type="slidenum">
               <a:rPr sz="1350">
                 <a:solidFill>
                   <a:srgbClr val="646173"/>
@@ -43637,7 +45971,7 @@
                 <a:ea typeface="Microsoft YaHei"/>
                 <a:cs typeface="Microsoft YaHei"/>
               </a:rPr>
-              <a:t>7</a:t>
+              <a:t>8</a:t>
             </a:fld>
           </a:p>
         </p:txBody>
@@ -44190,7 +46524,7 @@
                 <a:cs typeface="Microsoft YaHei"/>
               </a:defRPr>
             </a:pPr>
-            <a:fld id="{06B5160E-3ACE-4764-ACD3-13271F48E8E1}" type="slidenum">
+            <a:fld id="{3255E36F-DC8B-437D-9AA3-99E5C7E7E2C2}" type="slidenum">
               <a:rPr sz="1350">
                 <a:solidFill>
                   <a:srgbClr val="646173"/>
@@ -44199,7 +46533,7 @@
                 <a:ea typeface="Microsoft YaHei"/>
                 <a:cs typeface="Microsoft YaHei"/>
               </a:rPr>
-              <a:t>8</a:t>
+              <a:t>9</a:t>
             </a:fld>
           </a:p>
         </p:txBody>
@@ -45578,7 +47912,7 @@
                 <a:cs typeface="Microsoft YaHei"/>
               </a:defRPr>
             </a:pPr>
-            <a:fld id="{AA02ADCA-E6A4-4DA5-8526-86A541175DBF}" type="slidenum">
+            <a:fld id="{B87DF7FA-B28B-4199-85E0-8216CCCBC81F}" type="slidenum">
               <a:rPr sz="1350">
                 <a:solidFill>
                   <a:srgbClr val="646173"/>
@@ -45587,7 +47921,7 @@
                 <a:ea typeface="Microsoft YaHei"/>
                 <a:cs typeface="Microsoft YaHei"/>
               </a:rPr>
-              <a:t>10</a:t>
+              <a:t>11</a:t>
             </a:fld>
           </a:p>
         </p:txBody>
